--- a/slides/Day4_Data_APIs_Navigation.pptx
+++ b/slides/Day4_Data_APIs_Navigation.pptx
@@ -1,6 +1,6 @@
 
 <file path=ppt/presentation.xml><?xml version="1.0" encoding="utf-8"?>
-<p:presentation xmlns:a="http://schemas.openxmlformats.org/drawingml/2006/main" xmlns:r="http://schemas.openxmlformats.org/officeDocument/2006/relationships" xmlns:p="http://schemas.openxmlformats.org/presentationml/2006/main" saveSubsetFonts="1" autoCompressPictures="0">
+<p:presentation xmlns:a="http://schemas.openxmlformats.org/drawingml/2006/main" xmlns:p="http://schemas.openxmlformats.org/presentationml/2006/main" xmlns:r="http://schemas.openxmlformats.org/officeDocument/2006/relationships" saveSubsetFonts="1" autoCompressPictures="0">
   <p:sldMasterIdLst>
     <p:sldMasterId id="2147483648" r:id="rId1"/>
   </p:sldMasterIdLst>
@@ -40,7 +40,6 @@
     <p:sldId id="288" r:id="rId34"/>
     <p:sldId id="289" r:id="rId35"/>
     <p:sldId id="290" r:id="rId36"/>
-    <p:sldId id="291" r:id="rId37"/>
     <p:sldId id="292" r:id="rId38"/>
     <p:sldId id="293" r:id="rId39"/>
     <p:sldId id="294" r:id="rId40"/>
@@ -501,4287 +500,6 @@
     </a:lvl9pPr>
   </p:notesStyle>
 </p:notesMaster>
-</file>
-
-<file path=ppt/notesSlides/notesSlide1.xml><?xml version="1.0" encoding="utf-8"?>
-<p:notes xmlns:a="http://schemas.openxmlformats.org/drawingml/2006/main" xmlns:r="http://schemas.openxmlformats.org/officeDocument/2006/relationships" xmlns:p="http://schemas.openxmlformats.org/presentationml/2006/main">
-  <p:cSld>
-    <p:spTree>
-      <p:nvGrpSpPr>
-        <p:cNvPr id="1" name=""/>
-        <p:cNvGrpSpPr/>
-        <p:nvPr/>
-      </p:nvGrpSpPr>
-      <p:grpSpPr>
-        <a:xfrm>
-          <a:off x="0" y="0"/>
-          <a:ext cx="0" cy="0"/>
-          <a:chOff x="0" y="0"/>
-          <a:chExt cx="0" cy="0"/>
-        </a:xfrm>
-      </p:grpSpPr>
-      <p:sp>
-        <p:nvSpPr>
-          <p:cNvPr id="2" name="Slide Image Placeholder 1"/>
-          <p:cNvSpPr>
-            <a:spLocks noGrp="1" noRot="1" noChangeAspect="1"/>
-          </p:cNvSpPr>
-          <p:nvPr>
-            <p:ph type="sldImg"/>
-          </p:nvPr>
-        </p:nvSpPr>
-        <p:spPr/>
-      </p:sp>
-      <p:sp>
-        <p:nvSpPr>
-          <p:cNvPr id="3" name="Notes Placeholder 2"/>
-          <p:cNvSpPr>
-            <a:spLocks noGrp="1"/>
-          </p:cNvSpPr>
-          <p:nvPr>
-            <p:ph type="body" idx="1"/>
-          </p:nvPr>
-        </p:nvSpPr>
-        <p:spPr/>
-        <p:txBody>
-          <a:bodyPr/>
-          <a:lstStyle/>
-          <a:p>
-            <a:r>
-              <a:rPr lang="en-US" dirty="0"/>
-              <a:t>SCRIPT: Yesterday the quote flow ran through a notifier and a fake service. Today it becomes a real app: routes with a guard, a real HTTP API, quotes saved to SQLite, and an onboarding flag that survives restarts. By 16:00 the mini-project runs end to end: onboarding → capture → API → result → saved.
-OPENER: two delegates present the go_router homework (Q1+Q2, Q3+Q4). Then slide 3.
-PRESENTER CHECKLIST: mock API running on your Mac (dart run tool/mock_server.dart) and tested with curl; emulator running; repo at lab-4-start (= lab-3-2-solution); all Day 4 packages already in pubspec on the start branch and pub cache warmed on the USB stick; usesCleartextTraffic set in the start branch's AndroidManifest so http to 10.0.2.2 works.</a:t>
-            </a:r>
-            <a:endParaRPr lang="en-US" dirty="0"/>
-          </a:p>
-        </p:txBody>
-      </p:sp>
-      <p:sp>
-        <p:nvSpPr>
-          <p:cNvPr id="4" name="Slide Number Placeholder 3"/>
-          <p:cNvSpPr>
-            <a:spLocks noGrp="1"/>
-          </p:cNvSpPr>
-          <p:nvPr>
-            <p:ph type="sldNum" sz="quarter" idx="10"/>
-          </p:nvPr>
-        </p:nvSpPr>
-        <p:spPr/>
-        <p:txBody>
-          <a:bodyPr/>
-          <a:lstStyle/>
-          <a:p>
-            <a:fld id="{F7021451-1387-4CA6-816F-3879F97B5CBC}" type="slidenum">
-              <a:rPr lang="en-US"/>
-              <a:t>1</a:t>
-            </a:fld>
-            <a:endParaRPr lang="en-US"/>
-          </a:p>
-        </p:txBody>
-      </p:sp>
-    </p:spTree>
-    <p:extLst>
-      <p:ext uri="{BB962C8B-B14F-4D97-AF65-F5344CB8AC3E}">
-        <p14:creationId xmlns:p14="http://schemas.microsoft.com/office/powerpoint/2010/main" val="1024086991"/>
-      </p:ext>
-    </p:extLst>
-  </p:cSld>
-  <p:clrMapOvr>
-    <a:masterClrMapping/>
-  </p:clrMapOvr>
-</p:notes>
-</file>
-
-<file path=ppt/notesSlides/notesSlide10.xml><?xml version="1.0" encoding="utf-8"?>
-<p:notes xmlns:a="http://schemas.openxmlformats.org/drawingml/2006/main" xmlns:r="http://schemas.openxmlformats.org/officeDocument/2006/relationships" xmlns:p="http://schemas.openxmlformats.org/presentationml/2006/main">
-  <p:cSld>
-    <p:spTree>
-      <p:nvGrpSpPr>
-        <p:cNvPr id="1" name=""/>
-        <p:cNvGrpSpPr/>
-        <p:nvPr/>
-      </p:nvGrpSpPr>
-      <p:grpSpPr>
-        <a:xfrm>
-          <a:off x="0" y="0"/>
-          <a:ext cx="0" cy="0"/>
-          <a:chOff x="0" y="0"/>
-          <a:chExt cx="0" cy="0"/>
-        </a:xfrm>
-      </p:grpSpPr>
-      <p:sp>
-        <p:nvSpPr>
-          <p:cNvPr id="2" name="Slide Image Placeholder 1"/>
-          <p:cNvSpPr>
-            <a:spLocks noGrp="1" noRot="1" noChangeAspect="1"/>
-          </p:cNvSpPr>
-          <p:nvPr>
-            <p:ph type="sldImg"/>
-          </p:nvPr>
-        </p:nvSpPr>
-        <p:spPr/>
-      </p:sp>
-      <p:sp>
-        <p:nvSpPr>
-          <p:cNvPr id="3" name="Notes Placeholder 2"/>
-          <p:cNvSpPr>
-            <a:spLocks noGrp="1"/>
-          </p:cNvSpPr>
-          <p:nvPr>
-            <p:ph type="body" idx="1"/>
-          </p:nvPr>
-        </p:nvSpPr>
-        <p:spPr/>
-        <p:txBody>
-          <a:bodyPr/>
-          <a:lstStyle/>
-          <a:p>
-            <a:r>
-              <a:rPr lang="en-US" dirty="0"/>
-              <a:t>SCRIPT: Replace the top-level GoRoute('/quote') with this shell in Lab 4.1 stretch or 4.3. Three branches, each its own stack. The onboarding route stays outside the shell.
-GOTCHA: routes inside branches must have absolute paths starting with '/'. GOTCHA 2: the shell's builder receives navigationShell; you must place it as the body, not wrap it in another Navigator.
-NavigationBar vs BottomNavigationBar: NavigationBar is the M3 widget; use it.</a:t>
-            </a:r>
-            <a:endParaRPr lang="en-US" dirty="0"/>
-          </a:p>
-        </p:txBody>
-      </p:sp>
-      <p:sp>
-        <p:nvSpPr>
-          <p:cNvPr id="4" name="Slide Number Placeholder 3"/>
-          <p:cNvSpPr>
-            <a:spLocks noGrp="1"/>
-          </p:cNvSpPr>
-          <p:nvPr>
-            <p:ph type="sldNum" sz="quarter" idx="10"/>
-          </p:nvPr>
-        </p:nvSpPr>
-        <p:spPr/>
-        <p:txBody>
-          <a:bodyPr/>
-          <a:lstStyle/>
-          <a:p>
-            <a:fld id="{F7021451-1387-4CA6-816F-3879F97B5CBC}" type="slidenum">
-              <a:rPr lang="en-US"/>
-              <a:t>10</a:t>
-            </a:fld>
-            <a:endParaRPr lang="en-US"/>
-          </a:p>
-        </p:txBody>
-      </p:sp>
-    </p:spTree>
-    <p:extLst>
-      <p:ext uri="{BB962C8B-B14F-4D97-AF65-F5344CB8AC3E}">
-        <p14:creationId xmlns:p14="http://schemas.microsoft.com/office/powerpoint/2010/main" val="1024086991"/>
-      </p:ext>
-    </p:extLst>
-  </p:cSld>
-  <p:clrMapOvr>
-    <a:masterClrMapping/>
-  </p:clrMapOvr>
-</p:notes>
-</file>
-
-<file path=ppt/notesSlides/notesSlide11.xml><?xml version="1.0" encoding="utf-8"?>
-<p:notes xmlns:a="http://schemas.openxmlformats.org/drawingml/2006/main" xmlns:r="http://schemas.openxmlformats.org/officeDocument/2006/relationships" xmlns:p="http://schemas.openxmlformats.org/presentationml/2006/main">
-  <p:cSld>
-    <p:spTree>
-      <p:nvGrpSpPr>
-        <p:cNvPr id="1" name=""/>
-        <p:cNvGrpSpPr/>
-        <p:nvPr/>
-      </p:nvGrpSpPr>
-      <p:grpSpPr>
-        <a:xfrm>
-          <a:off x="0" y="0"/>
-          <a:ext cx="0" cy="0"/>
-          <a:chOff x="0" y="0"/>
-          <a:chExt cx="0" cy="0"/>
-        </a:xfrm>
-      </p:grpSpPr>
-      <p:sp>
-        <p:nvSpPr>
-          <p:cNvPr id="2" name="Slide Image Placeholder 1"/>
-          <p:cNvSpPr>
-            <a:spLocks noGrp="1" noRot="1" noChangeAspect="1"/>
-          </p:cNvSpPr>
-          <p:nvPr>
-            <p:ph type="sldImg"/>
-          </p:nvPr>
-        </p:nvSpPr>
-        <p:spPr/>
-      </p:sp>
-      <p:sp>
-        <p:nvSpPr>
-          <p:cNvPr id="3" name="Notes Placeholder 2"/>
-          <p:cNvSpPr>
-            <a:spLocks noGrp="1"/>
-          </p:cNvSpPr>
-          <p:nvPr>
-            <p:ph type="body" idx="1"/>
-          </p:nvPr>
-        </p:nvSpPr>
-        <p:spPr/>
-        <p:txBody>
-          <a:bodyPr/>
-          <a:lstStyle/>
-          <a:p>
-            <a:r>
-              <a:rPr lang="en-US" dirty="0"/>
-              <a:t>SCRIPT: Add the intent filter inside the existing &lt;activity&gt;. flutter_deeplinking_enabled meta-data tells Flutter to hand the URL to the Router. Hot restart is not enough after a manifest change: stop and flutter run.
-TEST: adb shell am start … with the custom scheme and a TRIPLE slash (quoteapp:///quote/...) - Flutter takes the route from the URI path, so with two slashes 'quote' becomes the host and the route is /result/q-123. Run it from the terminal on either OS (adb on PATH; Windows path in Day 1 Appendix A). The app opens directly on /quote/result/q-123 and Back goes to /quote because of the nested route.
-NOTE the result screen shows "Quote not found" for an unknown id until Lab 4.3 loads it from SQLite - that is expected.</a:t>
-            </a:r>
-            <a:endParaRPr lang="en-US" dirty="0"/>
-          </a:p>
-        </p:txBody>
-      </p:sp>
-      <p:sp>
-        <p:nvSpPr>
-          <p:cNvPr id="4" name="Slide Number Placeholder 3"/>
-          <p:cNvSpPr>
-            <a:spLocks noGrp="1"/>
-          </p:cNvSpPr>
-          <p:nvPr>
-            <p:ph type="sldNum" sz="quarter" idx="10"/>
-          </p:nvPr>
-        </p:nvSpPr>
-        <p:spPr/>
-        <p:txBody>
-          <a:bodyPr/>
-          <a:lstStyle/>
-          <a:p>
-            <a:fld id="{F7021451-1387-4CA6-816F-3879F97B5CBC}" type="slidenum">
-              <a:rPr lang="en-US"/>
-              <a:t>11</a:t>
-            </a:fld>
-            <a:endParaRPr lang="en-US"/>
-          </a:p>
-        </p:txBody>
-      </p:sp>
-    </p:spTree>
-    <p:extLst>
-      <p:ext uri="{BB962C8B-B14F-4D97-AF65-F5344CB8AC3E}">
-        <p14:creationId xmlns:p14="http://schemas.microsoft.com/office/powerpoint/2010/main" val="1024086991"/>
-      </p:ext>
-    </p:extLst>
-  </p:cSld>
-  <p:clrMapOvr>
-    <a:masterClrMapping/>
-  </p:clrMapOvr>
-</p:notes>
-</file>
-
-<file path=ppt/notesSlides/notesSlide12.xml><?xml version="1.0" encoding="utf-8"?>
-<p:notes xmlns:a="http://schemas.openxmlformats.org/drawingml/2006/main" xmlns:r="http://schemas.openxmlformats.org/officeDocument/2006/relationships" xmlns:p="http://schemas.openxmlformats.org/presentationml/2006/main">
-  <p:cSld>
-    <p:spTree>
-      <p:nvGrpSpPr>
-        <p:cNvPr id="1" name=""/>
-        <p:cNvGrpSpPr/>
-        <p:nvPr/>
-      </p:nvGrpSpPr>
-      <p:grpSpPr>
-        <a:xfrm>
-          <a:off x="0" y="0"/>
-          <a:ext cx="0" cy="0"/>
-          <a:chOff x="0" y="0"/>
-          <a:chExt cx="0" cy="0"/>
-        </a:xfrm>
-      </p:grpSpPr>
-      <p:sp>
-        <p:nvSpPr>
-          <p:cNvPr id="2" name="Slide Image Placeholder 1"/>
-          <p:cNvSpPr>
-            <a:spLocks noGrp="1" noRot="1" noChangeAspect="1"/>
-          </p:cNvSpPr>
-          <p:nvPr>
-            <p:ph type="sldImg"/>
-          </p:nvPr>
-        </p:nvSpPr>
-        <p:spPr/>
-      </p:sp>
-      <p:sp>
-        <p:nvSpPr>
-          <p:cNvPr id="3" name="Notes Placeholder 2"/>
-          <p:cNvSpPr>
-            <a:spLocks noGrp="1"/>
-          </p:cNvSpPr>
-          <p:nvPr>
-            <p:ph type="body" idx="1"/>
-          </p:nvPr>
-        </p:nvSpPr>
-        <p:spPr/>
-        <p:txBody>
-          <a:bodyPr/>
-          <a:lstStyle/>
-          <a:p>
-            <a:r>
-              <a:rPr lang="en-US" dirty="0"/>
-              <a:t>WHY: redirect loops are the go_router bug everyone hits once. Making them construct one on purpose inoculates the room.
-EXPECTED: Q1 default limit 5; GoException "redirect loop detected"; our rules loop if both conditions can be true, e.g. returning '/onboarding' when already there. Q2 top-level runs first on every navigation; per-route for auth on a specific subtree. Q3 renders for unknown paths; show a friendly "Page not found" with a Go home button. Q4 keep navigation in widgets via ref.listen (yesterday's pattern); a global router instance or GoRouter.of(context) in callbacks; avoid navigating from notifiers.</a:t>
-            </a:r>
-            <a:endParaRPr lang="en-US" dirty="0"/>
-          </a:p>
-        </p:txBody>
-      </p:sp>
-      <p:sp>
-        <p:nvSpPr>
-          <p:cNvPr id="4" name="Slide Number Placeholder 3"/>
-          <p:cNvSpPr>
-            <a:spLocks noGrp="1"/>
-          </p:cNvSpPr>
-          <p:nvPr>
-            <p:ph type="sldNum" sz="quarter" idx="10"/>
-          </p:nvPr>
-        </p:nvSpPr>
-        <p:spPr/>
-        <p:txBody>
-          <a:bodyPr/>
-          <a:lstStyle/>
-          <a:p>
-            <a:fld id="{F7021451-1387-4CA6-816F-3879F97B5CBC}" type="slidenum">
-              <a:rPr lang="en-US"/>
-              <a:t>12</a:t>
-            </a:fld>
-            <a:endParaRPr lang="en-US"/>
-          </a:p>
-        </p:txBody>
-      </p:sp>
-    </p:spTree>
-    <p:extLst>
-      <p:ext uri="{BB962C8B-B14F-4D97-AF65-F5344CB8AC3E}">
-        <p14:creationId xmlns:p14="http://schemas.microsoft.com/office/powerpoint/2010/main" val="1024086991"/>
-      </p:ext>
-    </p:extLst>
-  </p:cSld>
-  <p:clrMapOvr>
-    <a:masterClrMapping/>
-  </p:clrMapOvr>
-</p:notes>
-</file>
-
-<file path=ppt/notesSlides/notesSlide13.xml><?xml version="1.0" encoding="utf-8"?>
-<p:notes xmlns:a="http://schemas.openxmlformats.org/drawingml/2006/main" xmlns:r="http://schemas.openxmlformats.org/officeDocument/2006/relationships" xmlns:p="http://schemas.openxmlformats.org/presentationml/2006/main">
-  <p:cSld>
-    <p:spTree>
-      <p:nvGrpSpPr>
-        <p:cNvPr id="1" name=""/>
-        <p:cNvGrpSpPr/>
-        <p:nvPr/>
-      </p:nvGrpSpPr>
-      <p:grpSpPr>
-        <a:xfrm>
-          <a:off x="0" y="0"/>
-          <a:ext cx="0" cy="0"/>
-          <a:chOff x="0" y="0"/>
-          <a:chExt cx="0" cy="0"/>
-        </a:xfrm>
-      </p:grpSpPr>
-      <p:sp>
-        <p:nvSpPr>
-          <p:cNvPr id="2" name="Slide Image Placeholder 1"/>
-          <p:cNvSpPr>
-            <a:spLocks noGrp="1" noRot="1" noChangeAspect="1"/>
-          </p:cNvSpPr>
-          <p:nvPr>
-            <p:ph type="sldImg"/>
-          </p:nvPr>
-        </p:nvSpPr>
-        <p:spPr/>
-      </p:sp>
-      <p:sp>
-        <p:nvSpPr>
-          <p:cNvPr id="3" name="Notes Placeholder 2"/>
-          <p:cNvSpPr>
-            <a:spLocks noGrp="1"/>
-          </p:cNvSpPr>
-          <p:nvPr>
-            <p:ph type="body" idx="1"/>
-          </p:nvPr>
-        </p:nvSpPr>
-        <p:spPr/>
-        <p:txBody>
-          <a:bodyPr/>
-          <a:lstStyle/>
-          <a:p>
-            <a:r>
-              <a:rPr lang="en-US" dirty="0"/>
-              <a:t>RUN THE LAB: 40 min. Watch for: redirect loop (returning a location when already there), "No GoRouter found in context" (context above MaterialApp.router), Back returning to onboarding (used push instead of relying on redirect), deep link not opening (manifest edit needs a full stop/run; meta-data missing).
-adb NOT FOUND (Windows): use the full path %LOCALAPPDATA%\Android\Sdk\platform-tools\adb.exe or add it to PATH.
-SOLUTION: Appendix B, branch lab-4-1-solution.</a:t>
-            </a:r>
-            <a:endParaRPr lang="en-US" dirty="0"/>
-          </a:p>
-        </p:txBody>
-      </p:sp>
-      <p:sp>
-        <p:nvSpPr>
-          <p:cNvPr id="4" name="Slide Number Placeholder 3"/>
-          <p:cNvSpPr>
-            <a:spLocks noGrp="1"/>
-          </p:cNvSpPr>
-          <p:nvPr>
-            <p:ph type="sldNum" sz="quarter" idx="10"/>
-          </p:nvPr>
-        </p:nvSpPr>
-        <p:spPr/>
-        <p:txBody>
-          <a:bodyPr/>
-          <a:lstStyle/>
-          <a:p>
-            <a:fld id="{F7021451-1387-4CA6-816F-3879F97B5CBC}" type="slidenum">
-              <a:rPr lang="en-US"/>
-              <a:t>13</a:t>
-            </a:fld>
-            <a:endParaRPr lang="en-US"/>
-          </a:p>
-        </p:txBody>
-      </p:sp>
-    </p:spTree>
-    <p:extLst>
-      <p:ext uri="{BB962C8B-B14F-4D97-AF65-F5344CB8AC3E}">
-        <p14:creationId xmlns:p14="http://schemas.microsoft.com/office/powerpoint/2010/main" val="1024086991"/>
-      </p:ext>
-    </p:extLst>
-  </p:cSld>
-  <p:clrMapOvr>
-    <a:masterClrMapping/>
-  </p:clrMapOvr>
-</p:notes>
-</file>
-
-<file path=ppt/notesSlides/notesSlide14.xml><?xml version="1.0" encoding="utf-8"?>
-<p:notes xmlns:a="http://schemas.openxmlformats.org/drawingml/2006/main" xmlns:r="http://schemas.openxmlformats.org/officeDocument/2006/relationships" xmlns:p="http://schemas.openxmlformats.org/presentationml/2006/main">
-  <p:cSld>
-    <p:spTree>
-      <p:nvGrpSpPr>
-        <p:cNvPr id="1" name=""/>
-        <p:cNvGrpSpPr/>
-        <p:nvPr/>
-      </p:nvGrpSpPr>
-      <p:grpSpPr>
-        <a:xfrm>
-          <a:off x="0" y="0"/>
-          <a:ext cx="0" cy="0"/>
-          <a:chOff x="0" y="0"/>
-          <a:chExt cx="0" cy="0"/>
-        </a:xfrm>
-      </p:grpSpPr>
-      <p:sp>
-        <p:nvSpPr>
-          <p:cNvPr id="2" name="Slide Image Placeholder 1"/>
-          <p:cNvSpPr>
-            <a:spLocks noGrp="1" noRot="1" noChangeAspect="1"/>
-          </p:cNvSpPr>
-          <p:nvPr>
-            <p:ph type="sldImg"/>
-          </p:nvPr>
-        </p:nvSpPr>
-        <p:spPr/>
-      </p:sp>
-      <p:sp>
-        <p:nvSpPr>
-          <p:cNvPr id="3" name="Notes Placeholder 2"/>
-          <p:cNvSpPr>
-            <a:spLocks noGrp="1"/>
-          </p:cNvSpPr>
-          <p:nvPr>
-            <p:ph type="body" idx="1"/>
-          </p:nvPr>
-        </p:nvSpPr>
-        <p:spPr/>
-        <p:txBody>
-          <a:bodyPr/>
-          <a:lstStyle/>
-          <a:p>
-            <a:r>
-              <a:rPr lang="en-US" dirty="0"/>
-              <a:t>SCRIPT: The group is strong on REST. Spend the time on the Flutter-specific parts: dio configuration, the error mapping, the code generator and its stale-output error, and the dart-define for the base URL.</a:t>
-            </a:r>
-            <a:endParaRPr lang="en-US" dirty="0"/>
-          </a:p>
-        </p:txBody>
-      </p:sp>
-      <p:sp>
-        <p:nvSpPr>
-          <p:cNvPr id="4" name="Slide Number Placeholder 3"/>
-          <p:cNvSpPr>
-            <a:spLocks noGrp="1"/>
-          </p:cNvSpPr>
-          <p:nvPr>
-            <p:ph type="sldNum" sz="quarter" idx="10"/>
-          </p:nvPr>
-        </p:nvSpPr>
-        <p:spPr/>
-        <p:txBody>
-          <a:bodyPr/>
-          <a:lstStyle/>
-          <a:p>
-            <a:fld id="{F7021451-1387-4CA6-816F-3879F97B5CBC}" type="slidenum">
-              <a:rPr lang="en-US"/>
-              <a:t>14</a:t>
-            </a:fld>
-            <a:endParaRPr lang="en-US"/>
-          </a:p>
-        </p:txBody>
-      </p:sp>
-    </p:spTree>
-    <p:extLst>
-      <p:ext uri="{BB962C8B-B14F-4D97-AF65-F5344CB8AC3E}">
-        <p14:creationId xmlns:p14="http://schemas.microsoft.com/office/powerpoint/2010/main" val="1024086991"/>
-      </p:ext>
-    </p:extLst>
-  </p:cSld>
-  <p:clrMapOvr>
-    <a:masterClrMapping/>
-  </p:clrMapOvr>
-</p:notes>
-</file>
-
-<file path=ppt/notesSlides/notesSlide15.xml><?xml version="1.0" encoding="utf-8"?>
-<p:notes xmlns:a="http://schemas.openxmlformats.org/drawingml/2006/main" xmlns:r="http://schemas.openxmlformats.org/officeDocument/2006/relationships" xmlns:p="http://schemas.openxmlformats.org/presentationml/2006/main">
-  <p:cSld>
-    <p:spTree>
-      <p:nvGrpSpPr>
-        <p:cNvPr id="1" name=""/>
-        <p:cNvGrpSpPr/>
-        <p:nvPr/>
-      </p:nvGrpSpPr>
-      <p:grpSpPr>
-        <a:xfrm>
-          <a:off x="0" y="0"/>
-          <a:ext cx="0" cy="0"/>
-          <a:chOff x="0" y="0"/>
-          <a:chExt cx="0" cy="0"/>
-        </a:xfrm>
-      </p:grpSpPr>
-      <p:sp>
-        <p:nvSpPr>
-          <p:cNvPr id="2" name="Slide Image Placeholder 1"/>
-          <p:cNvSpPr>
-            <a:spLocks noGrp="1" noRot="1" noChangeAspect="1"/>
-          </p:cNvSpPr>
-          <p:nvPr>
-            <p:ph type="sldImg"/>
-          </p:nvPr>
-        </p:nvSpPr>
-        <p:spPr/>
-      </p:sp>
-      <p:sp>
-        <p:nvSpPr>
-          <p:cNvPr id="3" name="Notes Placeholder 2"/>
-          <p:cNvSpPr>
-            <a:spLocks noGrp="1"/>
-          </p:cNvSpPr>
-          <p:nvPr>
-            <p:ph type="body" idx="1"/>
-          </p:nvPr>
-        </p:nvSpPr>
-        <p:spPr/>
-        <p:txBody>
-          <a:bodyPr/>
-          <a:lstStyle/>
-          <a:p>
-            <a:r>
-              <a:rPr lang="en-US" dirty="0"/>
-              <a:t>SCRIPT: Start the mock on your Mac before this slide and curl it on the projector. Then have every delegate start their own (dart run tool/mock_server.dart in a second terminal) so nobody depends on the venue network.
-WINDOWS FIREWALL: the first run prompts "allow dart to accept connections" - click Allow on private networks, or the emulator cannot connect. If no prompt appeared and it still fails: Windows Security → Firewall → Allow an app → dart.exe.
-10.0.2.2: the emulator's alias for the host. Physical phones use the laptop's LAN IP (ipconfig / ifconfig) and the phone must be on the same Wi-Fi; corporate networks often block client-to-client traffic - use the emulator.
-PORT IN USE: change 8080 in the server and in --dart-define.</a:t>
-            </a:r>
-            <a:endParaRPr lang="en-US" dirty="0"/>
-          </a:p>
-        </p:txBody>
-      </p:sp>
-      <p:sp>
-        <p:nvSpPr>
-          <p:cNvPr id="4" name="Slide Number Placeholder 3"/>
-          <p:cNvSpPr>
-            <a:spLocks noGrp="1"/>
-          </p:cNvSpPr>
-          <p:nvPr>
-            <p:ph type="sldNum" sz="quarter" idx="10"/>
-          </p:nvPr>
-        </p:nvSpPr>
-        <p:spPr/>
-        <p:txBody>
-          <a:bodyPr/>
-          <a:lstStyle/>
-          <a:p>
-            <a:fld id="{F7021451-1387-4CA6-816F-3879F97B5CBC}" type="slidenum">
-              <a:rPr lang="en-US"/>
-              <a:t>15</a:t>
-            </a:fld>
-            <a:endParaRPr lang="en-US"/>
-          </a:p>
-        </p:txBody>
-      </p:sp>
-    </p:spTree>
-    <p:extLst>
-      <p:ext uri="{BB962C8B-B14F-4D97-AF65-F5344CB8AC3E}">
-        <p14:creationId xmlns:p14="http://schemas.microsoft.com/office/powerpoint/2010/main" val="1024086991"/>
-      </p:ext>
-    </p:extLst>
-  </p:cSld>
-  <p:clrMapOvr>
-    <a:masterClrMapping/>
-  </p:clrMapOvr>
-</p:notes>
-</file>
-
-<file path=ppt/notesSlides/notesSlide16.xml><?xml version="1.0" encoding="utf-8"?>
-<p:notes xmlns:a="http://schemas.openxmlformats.org/drawingml/2006/main" xmlns:r="http://schemas.openxmlformats.org/officeDocument/2006/relationships" xmlns:p="http://schemas.openxmlformats.org/presentationml/2006/main">
-  <p:cSld>
-    <p:spTree>
-      <p:nvGrpSpPr>
-        <p:cNvPr id="1" name=""/>
-        <p:cNvGrpSpPr/>
-        <p:nvPr/>
-      </p:nvGrpSpPr>
-      <p:grpSpPr>
-        <a:xfrm>
-          <a:off x="0" y="0"/>
-          <a:ext cx="0" cy="0"/>
-          <a:chOff x="0" y="0"/>
-          <a:chExt cx="0" cy="0"/>
-        </a:xfrm>
-      </p:grpSpPr>
-      <p:sp>
-        <p:nvSpPr>
-          <p:cNvPr id="2" name="Slide Image Placeholder 1"/>
-          <p:cNvSpPr>
-            <a:spLocks noGrp="1" noRot="1" noChangeAspect="1"/>
-          </p:cNvSpPr>
-          <p:nvPr>
-            <p:ph type="sldImg"/>
-          </p:nvPr>
-        </p:nvSpPr>
-        <p:spPr/>
-      </p:sp>
-      <p:sp>
-        <p:nvSpPr>
-          <p:cNvPr id="3" name="Notes Placeholder 2"/>
-          <p:cNvSpPr>
-            <a:spLocks noGrp="1"/>
-          </p:cNvSpPr>
-          <p:nvPr>
-            <p:ph type="body" idx="1"/>
-          </p:nvPr>
-        </p:nvSpPr>
-        <p:spPr/>
-        <p:txBody>
-          <a:bodyPr/>
-          <a:lstStyle/>
-          <a:p>
-            <a:r>
-              <a:rPr lang="en-US" dirty="0"/>
-              <a:t>SCRIPT: One client, configured once. kDebugMode from package:flutter/foundation.dart gates the logger so release builds do not print bodies (insurance data!).
-Windows-vs-Mac: identical. --dart-define quoting: in PowerShell, --dart-define=API_URL=http://10.0.2.2:8080 needs no quotes; if the URL has &amp; or spaces, wrap in double quotes.
-Multiple defines: repeat the flag; or --dart-define-from-file=env.json (Flutter 3.7+), which is what we use on Day 5 for flavours.</a:t>
-            </a:r>
-            <a:endParaRPr lang="en-US" dirty="0"/>
-          </a:p>
-        </p:txBody>
-      </p:sp>
-      <p:sp>
-        <p:nvSpPr>
-          <p:cNvPr id="4" name="Slide Number Placeholder 3"/>
-          <p:cNvSpPr>
-            <a:spLocks noGrp="1"/>
-          </p:cNvSpPr>
-          <p:nvPr>
-            <p:ph type="sldNum" sz="quarter" idx="10"/>
-          </p:nvPr>
-        </p:nvSpPr>
-        <p:spPr/>
-        <p:txBody>
-          <a:bodyPr/>
-          <a:lstStyle/>
-          <a:p>
-            <a:fld id="{F7021451-1387-4CA6-816F-3879F97B5CBC}" type="slidenum">
-              <a:rPr lang="en-US"/>
-              <a:t>16</a:t>
-            </a:fld>
-            <a:endParaRPr lang="en-US"/>
-          </a:p>
-        </p:txBody>
-      </p:sp>
-    </p:spTree>
-    <p:extLst>
-      <p:ext uri="{BB962C8B-B14F-4D97-AF65-F5344CB8AC3E}">
-        <p14:creationId xmlns:p14="http://schemas.microsoft.com/office/powerpoint/2010/main" val="1024086991"/>
-      </p:ext>
-    </p:extLst>
-  </p:cSld>
-  <p:clrMapOvr>
-    <a:masterClrMapping/>
-  </p:clrMapOvr>
-</p:notes>
-</file>
-
-<file path=ppt/notesSlides/notesSlide17.xml><?xml version="1.0" encoding="utf-8"?>
-<p:notes xmlns:a="http://schemas.openxmlformats.org/drawingml/2006/main" xmlns:r="http://schemas.openxmlformats.org/officeDocument/2006/relationships" xmlns:p="http://schemas.openxmlformats.org/presentationml/2006/main">
-  <p:cSld>
-    <p:spTree>
-      <p:nvGrpSpPr>
-        <p:cNvPr id="1" name=""/>
-        <p:cNvGrpSpPr/>
-        <p:nvPr/>
-      </p:nvGrpSpPr>
-      <p:grpSpPr>
-        <a:xfrm>
-          <a:off x="0" y="0"/>
-          <a:ext cx="0" cy="0"/>
-          <a:chOff x="0" y="0"/>
-          <a:chExt cx="0" cy="0"/>
-        </a:xfrm>
-      </p:grpSpPr>
-      <p:sp>
-        <p:nvSpPr>
-          <p:cNvPr id="2" name="Slide Image Placeholder 1"/>
-          <p:cNvSpPr>
-            <a:spLocks noGrp="1" noRot="1" noChangeAspect="1"/>
-          </p:cNvSpPr>
-          <p:nvPr>
-            <p:ph type="sldImg"/>
-          </p:nvPr>
-        </p:nvSpPr>
-        <p:spPr/>
-      </p:sp>
-      <p:sp>
-        <p:nvSpPr>
-          <p:cNvPr id="3" name="Notes Placeholder 2"/>
-          <p:cNvSpPr>
-            <a:spLocks noGrp="1"/>
-          </p:cNvSpPr>
-          <p:nvPr>
-            <p:ph type="body" idx="1"/>
-          </p:nvPr>
-        </p:nvSpPr>
-        <p:spPr/>
-        <p:txBody>
-          <a:bodyPr/>
-          <a:lstStyle/>
-          <a:p>
-            <a:r>
-              <a:rPr lang="en-US" dirty="0"/>
-              <a:t>SCRIPT: Walk the switch on e.type: timeouts, connection error, bad response (with a nested switch on status), fallback. This is the layer that turns "SocketException: Connection refused" into "Cannot reach the quote service."
-QuoteException.toString() returns the message so yesterday's notifier catch (e.toString()) shows clean text without the "Exception:" prefix.
-Then the one-line swap in quote_providers.dart. Hot restart, submit, watch the LogInterceptor output in the console.
-DEMO FAILURE MODES: stop the mock → connectionError message. Year 1998 → 422 message from the server. Both without touching the UI.</a:t>
-            </a:r>
-            <a:endParaRPr lang="en-US" dirty="0"/>
-          </a:p>
-        </p:txBody>
-      </p:sp>
-      <p:sp>
-        <p:nvSpPr>
-          <p:cNvPr id="4" name="Slide Number Placeholder 3"/>
-          <p:cNvSpPr>
-            <a:spLocks noGrp="1"/>
-          </p:cNvSpPr>
-          <p:nvPr>
-            <p:ph type="sldNum" sz="quarter" idx="10"/>
-          </p:nvPr>
-        </p:nvSpPr>
-        <p:spPr/>
-        <p:txBody>
-          <a:bodyPr/>
-          <a:lstStyle/>
-          <a:p>
-            <a:fld id="{F7021451-1387-4CA6-816F-3879F97B5CBC}" type="slidenum">
-              <a:rPr lang="en-US"/>
-              <a:t>17</a:t>
-            </a:fld>
-            <a:endParaRPr lang="en-US"/>
-          </a:p>
-        </p:txBody>
-      </p:sp>
-    </p:spTree>
-    <p:extLst>
-      <p:ext uri="{BB962C8B-B14F-4D97-AF65-F5344CB8AC3E}">
-        <p14:creationId xmlns:p14="http://schemas.microsoft.com/office/powerpoint/2010/main" val="1024086991"/>
-      </p:ext>
-    </p:extLst>
-  </p:cSld>
-  <p:clrMapOvr>
-    <a:masterClrMapping/>
-  </p:clrMapOvr>
-</p:notes>
-</file>
-
-<file path=ppt/notesSlides/notesSlide18.xml><?xml version="1.0" encoding="utf-8"?>
-<p:notes xmlns:a="http://schemas.openxmlformats.org/drawingml/2006/main" xmlns:r="http://schemas.openxmlformats.org/officeDocument/2006/relationships" xmlns:p="http://schemas.openxmlformats.org/presentationml/2006/main">
-  <p:cSld>
-    <p:spTree>
-      <p:nvGrpSpPr>
-        <p:cNvPr id="1" name=""/>
-        <p:cNvGrpSpPr/>
-        <p:nvPr/>
-      </p:nvGrpSpPr>
-      <p:grpSpPr>
-        <a:xfrm>
-          <a:off x="0" y="0"/>
-          <a:ext cx="0" cy="0"/>
-          <a:chOff x="0" y="0"/>
-          <a:chExt cx="0" cy="0"/>
-        </a:xfrm>
-      </p:grpSpPr>
-      <p:sp>
-        <p:nvSpPr>
-          <p:cNvPr id="2" name="Slide Image Placeholder 1"/>
-          <p:cNvSpPr>
-            <a:spLocks noGrp="1" noRot="1" noChangeAspect="1"/>
-          </p:cNvSpPr>
-          <p:nvPr>
-            <p:ph type="sldImg"/>
-          </p:nvPr>
-        </p:nvSpPr>
-        <p:spPr/>
-      </p:sp>
-      <p:sp>
-        <p:nvSpPr>
-          <p:cNvPr id="3" name="Notes Placeholder 2"/>
-          <p:cNvSpPr>
-            <a:spLocks noGrp="1"/>
-          </p:cNvSpPr>
-          <p:nvPr>
-            <p:ph type="body" idx="1"/>
-          </p:nvPr>
-        </p:nvSpPr>
-        <p:spPr/>
-        <p:txBody>
-          <a:bodyPr/>
-          <a:lstStyle/>
-          <a:p>
-            <a:r>
-              <a:rPr lang="en-US" dirty="0"/>
-              <a:t>SCRIPT: Walk the switch on e.type: timeouts, connection error, bad response (with a nested switch on status), fallback. This is the layer that turns "SocketException: Connection refused" into "Cannot reach the quote service."
-QuoteException.toString() returns the message so yesterday's notifier catch (e.toString()) shows clean text without the "Exception:" prefix.
-Then the one-line swap in quote_providers.dart. Hot restart, submit, watch the LogInterceptor output in the console.
-DEMO FAILURE MODES: stop the mock → connectionError message. Year 1998 → 422 message from the server. Both without touching the UI.</a:t>
-            </a:r>
-            <a:endParaRPr lang="en-US" dirty="0"/>
-          </a:p>
-        </p:txBody>
-      </p:sp>
-      <p:sp>
-        <p:nvSpPr>
-          <p:cNvPr id="4" name="Slide Number Placeholder 3"/>
-          <p:cNvSpPr>
-            <a:spLocks noGrp="1"/>
-          </p:cNvSpPr>
-          <p:nvPr>
-            <p:ph type="sldNum" sz="quarter" idx="10"/>
-          </p:nvPr>
-        </p:nvSpPr>
-        <p:spPr/>
-        <p:txBody>
-          <a:bodyPr/>
-          <a:lstStyle/>
-          <a:p>
-            <a:fld id="{F7021451-1387-4CA6-816F-3879F97B5CBC}" type="slidenum">
-              <a:rPr lang="en-US"/>
-              <a:t>18</a:t>
-            </a:fld>
-            <a:endParaRPr lang="en-US"/>
-          </a:p>
-        </p:txBody>
-      </p:sp>
-    </p:spTree>
-    <p:extLst>
-      <p:ext uri="{BB962C8B-B14F-4D97-AF65-F5344CB8AC3E}">
-        <p14:creationId xmlns:p14="http://schemas.microsoft.com/office/powerpoint/2010/main" val="1024086991"/>
-      </p:ext>
-    </p:extLst>
-  </p:cSld>
-  <p:clrMapOvr>
-    <a:masterClrMapping/>
-  </p:clrMapOvr>
-</p:notes>
-</file>
-
-<file path=ppt/notesSlides/notesSlide19.xml><?xml version="1.0" encoding="utf-8"?>
-<p:notes xmlns:a="http://schemas.openxmlformats.org/drawingml/2006/main" xmlns:r="http://schemas.openxmlformats.org/officeDocument/2006/relationships" xmlns:p="http://schemas.openxmlformats.org/presentationml/2006/main">
-  <p:cSld>
-    <p:spTree>
-      <p:nvGrpSpPr>
-        <p:cNvPr id="1" name=""/>
-        <p:cNvGrpSpPr/>
-        <p:nvPr/>
-      </p:nvGrpSpPr>
-      <p:grpSpPr>
-        <a:xfrm>
-          <a:off x="0" y="0"/>
-          <a:ext cx="0" cy="0"/>
-          <a:chOff x="0" y="0"/>
-          <a:chExt cx="0" cy="0"/>
-        </a:xfrm>
-      </p:grpSpPr>
-      <p:sp>
-        <p:nvSpPr>
-          <p:cNvPr id="2" name="Slide Image Placeholder 1"/>
-          <p:cNvSpPr>
-            <a:spLocks noGrp="1" noRot="1" noChangeAspect="1"/>
-          </p:cNvSpPr>
-          <p:nvPr>
-            <p:ph type="sldImg"/>
-          </p:nvPr>
-        </p:nvSpPr>
-        <p:spPr/>
-      </p:sp>
-      <p:sp>
-        <p:nvSpPr>
-          <p:cNvPr id="3" name="Notes Placeholder 2"/>
-          <p:cNvSpPr>
-            <a:spLocks noGrp="1"/>
-          </p:cNvSpPr>
-          <p:nvPr>
-            <p:ph type="body" idx="1"/>
-          </p:nvPr>
-        </p:nvSpPr>
-        <p:spPr/>
-        <p:txBody>
-          <a:bodyPr/>
-          <a:lstStyle/>
-          <a:p>
-            <a:r>
-              <a:rPr lang="en-US" dirty="0"/>
-              <a:t>SCRIPT: Two minutes; they know JSON. The Dart-specific traps: num vs int/double, enums by name, and that dio has already decoded.
-Cover.values.byName throws on unknown names - for a public API wrap it and default, or use @JsonEnum/@JsonValue with the generator.</a:t>
-            </a:r>
-            <a:endParaRPr lang="en-US" dirty="0"/>
-          </a:p>
-        </p:txBody>
-      </p:sp>
-      <p:sp>
-        <p:nvSpPr>
-          <p:cNvPr id="4" name="Slide Number Placeholder 3"/>
-          <p:cNvSpPr>
-            <a:spLocks noGrp="1"/>
-          </p:cNvSpPr>
-          <p:nvPr>
-            <p:ph type="sldNum" sz="quarter" idx="10"/>
-          </p:nvPr>
-        </p:nvSpPr>
-        <p:spPr/>
-        <p:txBody>
-          <a:bodyPr/>
-          <a:lstStyle/>
-          <a:p>
-            <a:fld id="{F7021451-1387-4CA6-816F-3879F97B5CBC}" type="slidenum">
-              <a:rPr lang="en-US"/>
-              <a:t>19</a:t>
-            </a:fld>
-            <a:endParaRPr lang="en-US"/>
-          </a:p>
-        </p:txBody>
-      </p:sp>
-    </p:spTree>
-    <p:extLst>
-      <p:ext uri="{BB962C8B-B14F-4D97-AF65-F5344CB8AC3E}">
-        <p14:creationId xmlns:p14="http://schemas.microsoft.com/office/powerpoint/2010/main" val="1024086991"/>
-      </p:ext>
-    </p:extLst>
-  </p:cSld>
-  <p:clrMapOvr>
-    <a:masterClrMapping/>
-  </p:clrMapOvr>
-</p:notes>
-</file>
-
-<file path=ppt/notesSlides/notesSlide2.xml><?xml version="1.0" encoding="utf-8"?>
-<p:notes xmlns:a="http://schemas.openxmlformats.org/drawingml/2006/main" xmlns:r="http://schemas.openxmlformats.org/officeDocument/2006/relationships" xmlns:p="http://schemas.openxmlformats.org/presentationml/2006/main">
-  <p:cSld>
-    <p:spTree>
-      <p:nvGrpSpPr>
-        <p:cNvPr id="1" name=""/>
-        <p:cNvGrpSpPr/>
-        <p:nvPr/>
-      </p:nvGrpSpPr>
-      <p:grpSpPr>
-        <a:xfrm>
-          <a:off x="0" y="0"/>
-          <a:ext cx="0" cy="0"/>
-          <a:chOff x="0" y="0"/>
-          <a:chExt cx="0" cy="0"/>
-        </a:xfrm>
-      </p:grpSpPr>
-      <p:sp>
-        <p:nvSpPr>
-          <p:cNvPr id="2" name="Slide Image Placeholder 1"/>
-          <p:cNvSpPr>
-            <a:spLocks noGrp="1" noRot="1" noChangeAspect="1"/>
-          </p:cNvSpPr>
-          <p:nvPr>
-            <p:ph type="sldImg"/>
-          </p:nvPr>
-        </p:nvSpPr>
-        <p:spPr/>
-      </p:sp>
-      <p:sp>
-        <p:nvSpPr>
-          <p:cNvPr id="3" name="Notes Placeholder 2"/>
-          <p:cNvSpPr>
-            <a:spLocks noGrp="1"/>
-          </p:cNvSpPr>
-          <p:nvPr>
-            <p:ph type="body" idx="1"/>
-          </p:nvPr>
-        </p:nvSpPr>
-        <p:spPr/>
-        <p:txBody>
-          <a:bodyPr/>
-          <a:lstStyle/>
-          <a:p>
-            <a:r>
-              <a:rPr lang="en-US" dirty="0"/>
-              <a:t>SCRIPT: Four blocks, three labs; the third lab assembles the whole flow. REST is the group's strength, so block 2 moves fast and spends its time on Flutter idioms (dio, code-gen), not on HTTP.
-TIMING: protect block 4. If block 3 runs long, drop the "which store" slide to the appendix.</a:t>
-            </a:r>
-            <a:endParaRPr lang="en-US" dirty="0"/>
-          </a:p>
-        </p:txBody>
-      </p:sp>
-      <p:sp>
-        <p:nvSpPr>
-          <p:cNvPr id="4" name="Slide Number Placeholder 3"/>
-          <p:cNvSpPr>
-            <a:spLocks noGrp="1"/>
-          </p:cNvSpPr>
-          <p:nvPr>
-            <p:ph type="sldNum" sz="quarter" idx="10"/>
-          </p:nvPr>
-        </p:nvSpPr>
-        <p:spPr/>
-        <p:txBody>
-          <a:bodyPr/>
-          <a:lstStyle/>
-          <a:p>
-            <a:fld id="{F7021451-1387-4CA6-816F-3879F97B5CBC}" type="slidenum">
-              <a:rPr lang="en-US"/>
-              <a:t>2</a:t>
-            </a:fld>
-            <a:endParaRPr lang="en-US"/>
-          </a:p>
-        </p:txBody>
-      </p:sp>
-    </p:spTree>
-    <p:extLst>
-      <p:ext uri="{BB962C8B-B14F-4D97-AF65-F5344CB8AC3E}">
-        <p14:creationId xmlns:p14="http://schemas.microsoft.com/office/powerpoint/2010/main" val="1024086991"/>
-      </p:ext>
-    </p:extLst>
-  </p:cSld>
-  <p:clrMapOvr>
-    <a:masterClrMapping/>
-  </p:clrMapOvr>
-</p:notes>
-</file>
-
-<file path=ppt/notesSlides/notesSlide20.xml><?xml version="1.0" encoding="utf-8"?>
-<p:notes xmlns:a="http://schemas.openxmlformats.org/drawingml/2006/main" xmlns:r="http://schemas.openxmlformats.org/officeDocument/2006/relationships" xmlns:p="http://schemas.openxmlformats.org/presentationml/2006/main">
-  <p:cSld>
-    <p:spTree>
-      <p:nvGrpSpPr>
-        <p:cNvPr id="1" name=""/>
-        <p:cNvGrpSpPr/>
-        <p:nvPr/>
-      </p:nvGrpSpPr>
-      <p:grpSpPr>
-        <a:xfrm>
-          <a:off x="0" y="0"/>
-          <a:ext cx="0" cy="0"/>
-          <a:chOff x="0" y="0"/>
-          <a:chExt cx="0" cy="0"/>
-        </a:xfrm>
-      </p:grpSpPr>
-      <p:sp>
-        <p:nvSpPr>
-          <p:cNvPr id="2" name="Slide Image Placeholder 1"/>
-          <p:cNvSpPr>
-            <a:spLocks noGrp="1" noRot="1" noChangeAspect="1"/>
-          </p:cNvSpPr>
-          <p:nvPr>
-            <p:ph type="sldImg"/>
-          </p:nvPr>
-        </p:nvSpPr>
-        <p:spPr/>
-      </p:sp>
-      <p:sp>
-        <p:nvSpPr>
-          <p:cNvPr id="3" name="Notes Placeholder 2"/>
-          <p:cNvSpPr>
-            <a:spLocks noGrp="1"/>
-          </p:cNvSpPr>
-          <p:nvPr>
-            <p:ph type="body" idx="1"/>
-          </p:nvPr>
-        </p:nvSpPr>
-        <p:spPr/>
-        <p:txBody>
-          <a:bodyPr/>
-          <a:lstStyle/>
-          <a:p>
-            <a:r>
-              <a:rPr lang="en-US" dirty="0"/>
-              <a:t>SCRIPT: Demo live: annotate Quote, run dart run build_runner build --delete-conflicting-outputs, open quote.g.dart, show that it is the hand-written code from the previous slide.
-THE ERROR EVERYONE HITS: run without --delete-conflicting-outputs → "Found 1 declared output which already exists on disk" and a prompt. Always pass the flag. Second error: "part 'quote.g.dart' … Target of URI hasn't been generated" → run the generator. Third: name mismatch between file and part directive.
-WINDOWS: identical command. If build_runner is very slow, antivirus exclusions on .dart_tool help.
-freezed: mention that freezed builds on json_serializable and also generates copyWith/==/unions; the team can adopt it after the course.</a:t>
-            </a:r>
-            <a:endParaRPr lang="en-US" dirty="0"/>
-          </a:p>
-        </p:txBody>
-      </p:sp>
-      <p:sp>
-        <p:nvSpPr>
-          <p:cNvPr id="4" name="Slide Number Placeholder 3"/>
-          <p:cNvSpPr>
-            <a:spLocks noGrp="1"/>
-          </p:cNvSpPr>
-          <p:nvPr>
-            <p:ph type="sldNum" sz="quarter" idx="10"/>
-          </p:nvPr>
-        </p:nvSpPr>
-        <p:spPr/>
-        <p:txBody>
-          <a:bodyPr/>
-          <a:lstStyle/>
-          <a:p>
-            <a:fld id="{F7021451-1387-4CA6-816F-3879F97B5CBC}" type="slidenum">
-              <a:rPr lang="en-US"/>
-              <a:t>20</a:t>
-            </a:fld>
-            <a:endParaRPr lang="en-US"/>
-          </a:p>
-        </p:txBody>
-      </p:sp>
-    </p:spTree>
-    <p:extLst>
-      <p:ext uri="{BB962C8B-B14F-4D97-AF65-F5344CB8AC3E}">
-        <p14:creationId xmlns:p14="http://schemas.microsoft.com/office/powerpoint/2010/main" val="1024086991"/>
-      </p:ext>
-    </p:extLst>
-  </p:cSld>
-  <p:clrMapOvr>
-    <a:masterClrMapping/>
-  </p:clrMapOvr>
-</p:notes>
-</file>
-
-<file path=ppt/notesSlides/notesSlide21.xml><?xml version="1.0" encoding="utf-8"?>
-<p:notes xmlns:a="http://schemas.openxmlformats.org/drawingml/2006/main" xmlns:r="http://schemas.openxmlformats.org/officeDocument/2006/relationships" xmlns:p="http://schemas.openxmlformats.org/presentationml/2006/main">
-  <p:cSld>
-    <p:spTree>
-      <p:nvGrpSpPr>
-        <p:cNvPr id="1" name=""/>
-        <p:cNvGrpSpPr/>
-        <p:nvPr/>
-      </p:nvGrpSpPr>
-      <p:grpSpPr>
-        <a:xfrm>
-          <a:off x="0" y="0"/>
-          <a:ext cx="0" cy="0"/>
-          <a:chOff x="0" y="0"/>
-          <a:chExt cx="0" cy="0"/>
-        </a:xfrm>
-      </p:grpSpPr>
-      <p:sp>
-        <p:nvSpPr>
-          <p:cNvPr id="2" name="Slide Image Placeholder 1"/>
-          <p:cNvSpPr>
-            <a:spLocks noGrp="1" noRot="1" noChangeAspect="1"/>
-          </p:cNvSpPr>
-          <p:nvPr>
-            <p:ph type="sldImg"/>
-          </p:nvPr>
-        </p:nvSpPr>
-        <p:spPr/>
-      </p:sp>
-      <p:sp>
-        <p:nvSpPr>
-          <p:cNvPr id="3" name="Notes Placeholder 2"/>
-          <p:cNvSpPr>
-            <a:spLocks noGrp="1"/>
-          </p:cNvSpPr>
-          <p:nvPr>
-            <p:ph type="body" idx="1"/>
-          </p:nvPr>
-        </p:nvSpPr>
-        <p:spPr/>
-        <p:txBody>
-          <a:bodyPr/>
-          <a:lstStyle/>
-          <a:p>
-            <a:r>
-              <a:rPr lang="en-US" dirty="0"/>
-              <a:t>RUN THE LAB: 45 min. First 10 minutes are infrastructure (mock running, cleartext, emulator reaching 10.0.2.2) - get every machine past that before anyone writes Dart.
-COMMON ERRORS: "Connection refused" → mock not running, or app using localhost instead of 10.0.2.2. "Cleartext HTTP traffic not permitted" → manifest flag missing or app not fully restarted. build_runner "conflicting outputs" → add the flag. "_$QuoteFromJson isn't defined" → part directive/file name mismatch or generator not run. Firewall prompt dismissed on Windows → allow dart.exe.
-SOLUTION: Appendix D, branch lab-4-2-solution.</a:t>
-            </a:r>
-            <a:endParaRPr lang="en-US" dirty="0"/>
-          </a:p>
-        </p:txBody>
-      </p:sp>
-      <p:sp>
-        <p:nvSpPr>
-          <p:cNvPr id="4" name="Slide Number Placeholder 3"/>
-          <p:cNvSpPr>
-            <a:spLocks noGrp="1"/>
-          </p:cNvSpPr>
-          <p:nvPr>
-            <p:ph type="sldNum" sz="quarter" idx="10"/>
-          </p:nvPr>
-        </p:nvSpPr>
-        <p:spPr/>
-        <p:txBody>
-          <a:bodyPr/>
-          <a:lstStyle/>
-          <a:p>
-            <a:fld id="{F7021451-1387-4CA6-816F-3879F97B5CBC}" type="slidenum">
-              <a:rPr lang="en-US"/>
-              <a:t>21</a:t>
-            </a:fld>
-            <a:endParaRPr lang="en-US"/>
-          </a:p>
-        </p:txBody>
-      </p:sp>
-    </p:spTree>
-    <p:extLst>
-      <p:ext uri="{BB962C8B-B14F-4D97-AF65-F5344CB8AC3E}">
-        <p14:creationId xmlns:p14="http://schemas.microsoft.com/office/powerpoint/2010/main" val="1024086991"/>
-      </p:ext>
-    </p:extLst>
-  </p:cSld>
-  <p:clrMapOvr>
-    <a:masterClrMapping/>
-  </p:clrMapOvr>
-</p:notes>
-</file>
-
-<file path=ppt/notesSlides/notesSlide22.xml><?xml version="1.0" encoding="utf-8"?>
-<p:notes xmlns:a="http://schemas.openxmlformats.org/drawingml/2006/main" xmlns:r="http://schemas.openxmlformats.org/officeDocument/2006/relationships" xmlns:p="http://schemas.openxmlformats.org/presentationml/2006/main">
-  <p:cSld>
-    <p:spTree>
-      <p:nvGrpSpPr>
-        <p:cNvPr id="1" name=""/>
-        <p:cNvGrpSpPr/>
-        <p:nvPr/>
-      </p:nvGrpSpPr>
-      <p:grpSpPr>
-        <a:xfrm>
-          <a:off x="0" y="0"/>
-          <a:ext cx="0" cy="0"/>
-          <a:chOff x="0" y="0"/>
-          <a:chExt cx="0" cy="0"/>
-        </a:xfrm>
-      </p:grpSpPr>
-      <p:sp>
-        <p:nvSpPr>
-          <p:cNvPr id="2" name="Slide Image Placeholder 1"/>
-          <p:cNvSpPr>
-            <a:spLocks noGrp="1" noRot="1" noChangeAspect="1"/>
-          </p:cNvSpPr>
-          <p:nvPr>
-            <p:ph type="sldImg"/>
-          </p:nvPr>
-        </p:nvSpPr>
-        <p:spPr/>
-      </p:sp>
-      <p:sp>
-        <p:nvSpPr>
-          <p:cNvPr id="3" name="Notes Placeholder 2"/>
-          <p:cNvSpPr>
-            <a:spLocks noGrp="1"/>
-          </p:cNvSpPr>
-          <p:nvPr>
-            <p:ph type="body" idx="1"/>
-          </p:nvPr>
-        </p:nvSpPr>
-        <p:spPr/>
-        <p:txBody>
-          <a:bodyPr/>
-          <a:lstStyle/>
-          <a:p>
-            <a:r>
-              <a:rPr lang="en-US" dirty="0"/>
-              <a:t>SCRIPT: Storage scored 3.0 with a wide spread. Two stores get built (prefs, SQLite); the rest are a decision table.</a:t>
-            </a:r>
-            <a:endParaRPr lang="en-US" dirty="0"/>
-          </a:p>
-        </p:txBody>
-      </p:sp>
-      <p:sp>
-        <p:nvSpPr>
-          <p:cNvPr id="4" name="Slide Number Placeholder 3"/>
-          <p:cNvSpPr>
-            <a:spLocks noGrp="1"/>
-          </p:cNvSpPr>
-          <p:nvPr>
-            <p:ph type="sldNum" sz="quarter" idx="10"/>
-          </p:nvPr>
-        </p:nvSpPr>
-        <p:spPr/>
-        <p:txBody>
-          <a:bodyPr/>
-          <a:lstStyle/>
-          <a:p>
-            <a:fld id="{F7021451-1387-4CA6-816F-3879F97B5CBC}" type="slidenum">
-              <a:rPr lang="en-US"/>
-              <a:t>22</a:t>
-            </a:fld>
-            <a:endParaRPr lang="en-US"/>
-          </a:p>
-        </p:txBody>
-      </p:sp>
-    </p:spTree>
-    <p:extLst>
-      <p:ext uri="{BB962C8B-B14F-4D97-AF65-F5344CB8AC3E}">
-        <p14:creationId xmlns:p14="http://schemas.microsoft.com/office/powerpoint/2010/main" val="1024086991"/>
-      </p:ext>
-    </p:extLst>
-  </p:cSld>
-  <p:clrMapOvr>
-    <a:masterClrMapping/>
-  </p:clrMapOvr>
-</p:notes>
-</file>
-
-<file path=ppt/notesSlides/notesSlide23.xml><?xml version="1.0" encoding="utf-8"?>
-<p:notes xmlns:a="http://schemas.openxmlformats.org/drawingml/2006/main" xmlns:r="http://schemas.openxmlformats.org/officeDocument/2006/relationships" xmlns:p="http://schemas.openxmlformats.org/presentationml/2006/main">
-  <p:cSld>
-    <p:spTree>
-      <p:nvGrpSpPr>
-        <p:cNvPr id="1" name=""/>
-        <p:cNvGrpSpPr/>
-        <p:nvPr/>
-      </p:nvGrpSpPr>
-      <p:grpSpPr>
-        <a:xfrm>
-          <a:off x="0" y="0"/>
-          <a:ext cx="0" cy="0"/>
-          <a:chOff x="0" y="0"/>
-          <a:chExt cx="0" cy="0"/>
-        </a:xfrm>
-      </p:grpSpPr>
-      <p:sp>
-        <p:nvSpPr>
-          <p:cNvPr id="2" name="Slide Image Placeholder 1"/>
-          <p:cNvSpPr>
-            <a:spLocks noGrp="1" noRot="1" noChangeAspect="1"/>
-          </p:cNvSpPr>
-          <p:nvPr>
-            <p:ph type="sldImg"/>
-          </p:nvPr>
-        </p:nvSpPr>
-        <p:spPr/>
-      </p:sp>
-      <p:sp>
-        <p:nvSpPr>
-          <p:cNvPr id="3" name="Notes Placeholder 2"/>
-          <p:cNvSpPr>
-            <a:spLocks noGrp="1"/>
-          </p:cNvSpPr>
-          <p:nvPr>
-            <p:ph type="body" idx="1"/>
-          </p:nvPr>
-        </p:nvSpPr>
-        <p:spPr/>
-        <p:txBody>
-          <a:bodyPr/>
-          <a:lstStyle/>
-          <a:p>
-            <a:r>
-              <a:rPr lang="en-US" dirty="0"/>
-              <a:t>SCRIPT: The pattern to remember: async init in main, override a provider with the ready instance, everything else reads synchronously. The throw UnimplementedError() in the base provider makes forgetting the override a loud, immediate failure.
-Newer API: shared_preferences also ships SharedPreferencesAsync / SharedPreferencesWithCache (2.3+). The classic getInstance API on the slide still works and is the most documented; mention the new one exists.
-RESET FOR TESTING: to see onboarding again, clear app data on the emulator (Settings → Apps → quote_app → Clear storage) or adb shell pm clear &lt;applicationId&gt;.</a:t>
-            </a:r>
-            <a:endParaRPr lang="en-US" dirty="0"/>
-          </a:p>
-        </p:txBody>
-      </p:sp>
-      <p:sp>
-        <p:nvSpPr>
-          <p:cNvPr id="4" name="Slide Number Placeholder 3"/>
-          <p:cNvSpPr>
-            <a:spLocks noGrp="1"/>
-          </p:cNvSpPr>
-          <p:nvPr>
-            <p:ph type="sldNum" sz="quarter" idx="10"/>
-          </p:nvPr>
-        </p:nvSpPr>
-        <p:spPr/>
-        <p:txBody>
-          <a:bodyPr/>
-          <a:lstStyle/>
-          <a:p>
-            <a:fld id="{F7021451-1387-4CA6-816F-3879F97B5CBC}" type="slidenum">
-              <a:rPr lang="en-US"/>
-              <a:t>23</a:t>
-            </a:fld>
-            <a:endParaRPr lang="en-US"/>
-          </a:p>
-        </p:txBody>
-      </p:sp>
-    </p:spTree>
-    <p:extLst>
-      <p:ext uri="{BB962C8B-B14F-4D97-AF65-F5344CB8AC3E}">
-        <p14:creationId xmlns:p14="http://schemas.microsoft.com/office/powerpoint/2010/main" val="1024086991"/>
-      </p:ext>
-    </p:extLst>
-  </p:cSld>
-  <p:clrMapOvr>
-    <a:masterClrMapping/>
-  </p:clrMapOvr>
-</p:notes>
-</file>
-
-<file path=ppt/notesSlides/notesSlide24.xml><?xml version="1.0" encoding="utf-8"?>
-<p:notes xmlns:a="http://schemas.openxmlformats.org/drawingml/2006/main" xmlns:r="http://schemas.openxmlformats.org/officeDocument/2006/relationships" xmlns:p="http://schemas.openxmlformats.org/presentationml/2006/main">
-  <p:cSld>
-    <p:spTree>
-      <p:nvGrpSpPr>
-        <p:cNvPr id="1" name=""/>
-        <p:cNvGrpSpPr/>
-        <p:nvPr/>
-      </p:nvGrpSpPr>
-      <p:grpSpPr>
-        <a:xfrm>
-          <a:off x="0" y="0"/>
-          <a:ext cx="0" cy="0"/>
-          <a:chOff x="0" y="0"/>
-          <a:chExt cx="0" cy="0"/>
-        </a:xfrm>
-      </p:grpSpPr>
-      <p:sp>
-        <p:nvSpPr>
-          <p:cNvPr id="2" name="Slide Image Placeholder 1"/>
-          <p:cNvSpPr>
-            <a:spLocks noGrp="1" noRot="1" noChangeAspect="1"/>
-          </p:cNvSpPr>
-          <p:nvPr>
-            <p:ph type="sldImg"/>
-          </p:nvPr>
-        </p:nvSpPr>
-        <p:spPr/>
-      </p:sp>
-      <p:sp>
-        <p:nvSpPr>
-          <p:cNvPr id="3" name="Notes Placeholder 2"/>
-          <p:cNvSpPr>
-            <a:spLocks noGrp="1"/>
-          </p:cNvSpPr>
-          <p:nvPr>
-            <p:ph type="body" idx="1"/>
-          </p:nvPr>
-        </p:nvSpPr>
-        <p:spPr/>
-        <p:txBody>
-          <a:bodyPr/>
-          <a:lstStyle/>
-          <a:p>
-            <a:r>
-              <a:rPr lang="en-US" dirty="0"/>
-              <a:t>SCRIPT: Real SQLite, real SQL - they know SQL. The Flutter parts: getDatabasesPath(), version/onCreate/onUpgrade, and that the Database is opened once in main and provided, like prefs.
-DESKTOP/WEB: sqflite is mobile-only. flutter run -d chrome will throw MissingPluginException - anyone on the Chrome fallback uses an in-memory repository today (Appendix E). Windows desktop target needs sqflite_common_ffi; not our target.
-drift: type-safe SQL with generated DAOs and reactive queries; recommend it once the schema passes ~5 tables.</a:t>
-            </a:r>
-            <a:endParaRPr lang="en-US" dirty="0"/>
-          </a:p>
-        </p:txBody>
-      </p:sp>
-      <p:sp>
-        <p:nvSpPr>
-          <p:cNvPr id="4" name="Slide Number Placeholder 3"/>
-          <p:cNvSpPr>
-            <a:spLocks noGrp="1"/>
-          </p:cNvSpPr>
-          <p:nvPr>
-            <p:ph type="sldNum" sz="quarter" idx="10"/>
-          </p:nvPr>
-        </p:nvSpPr>
-        <p:spPr/>
-        <p:txBody>
-          <a:bodyPr/>
-          <a:lstStyle/>
-          <a:p>
-            <a:fld id="{F7021451-1387-4CA6-816F-3879F97B5CBC}" type="slidenum">
-              <a:rPr lang="en-US"/>
-              <a:t>24</a:t>
-            </a:fld>
-            <a:endParaRPr lang="en-US"/>
-          </a:p>
-        </p:txBody>
-      </p:sp>
-    </p:spTree>
-    <p:extLst>
-      <p:ext uri="{BB962C8B-B14F-4D97-AF65-F5344CB8AC3E}">
-        <p14:creationId xmlns:p14="http://schemas.microsoft.com/office/powerpoint/2010/main" val="1024086991"/>
-      </p:ext>
-    </p:extLst>
-  </p:cSld>
-  <p:clrMapOvr>
-    <a:masterClrMapping/>
-  </p:clrMapOvr>
-</p:notes>
-</file>
-
-<file path=ppt/notesSlides/notesSlide25.xml><?xml version="1.0" encoding="utf-8"?>
-<p:notes xmlns:a="http://schemas.openxmlformats.org/drawingml/2006/main" xmlns:r="http://schemas.openxmlformats.org/officeDocument/2006/relationships" xmlns:p="http://schemas.openxmlformats.org/presentationml/2006/main">
-  <p:cSld>
-    <p:spTree>
-      <p:nvGrpSpPr>
-        <p:cNvPr id="1" name=""/>
-        <p:cNvGrpSpPr/>
-        <p:nvPr/>
-      </p:nvGrpSpPr>
-      <p:grpSpPr>
-        <a:xfrm>
-          <a:off x="0" y="0"/>
-          <a:ext cx="0" cy="0"/>
-          <a:chOff x="0" y="0"/>
-          <a:chExt cx="0" cy="0"/>
-        </a:xfrm>
-      </p:grpSpPr>
-      <p:sp>
-        <p:nvSpPr>
-          <p:cNvPr id="2" name="Slide Image Placeholder 1"/>
-          <p:cNvSpPr>
-            <a:spLocks noGrp="1" noRot="1" noChangeAspect="1"/>
-          </p:cNvSpPr>
-          <p:nvPr>
-            <p:ph type="sldImg"/>
-          </p:nvPr>
-        </p:nvSpPr>
-        <p:spPr/>
-      </p:sp>
-      <p:sp>
-        <p:nvSpPr>
-          <p:cNvPr id="3" name="Notes Placeholder 2"/>
-          <p:cNvSpPr>
-            <a:spLocks noGrp="1"/>
-          </p:cNvSpPr>
-          <p:nvPr>
-            <p:ph type="body" idx="1"/>
-          </p:nvPr>
-        </p:nvSpPr>
-        <p:spPr/>
-        <p:txBody>
-          <a:bodyPr/>
-          <a:lstStyle/>
-          <a:p>
-            <a:r>
-              <a:rPr lang="en-US" dirty="0"/>
-              <a:t>SCRIPT: Repository interface, SQLite implementation (next slide), provider, AsyncNotifier. Yesterday's AsyncNotifier slide becomes real.
-invalidateSelf vs manual state assignment: invalidate is simpler and always consistent with the DB; assigning state = AsyncData([...]) avoids a re-query but risks drift. Teach invalidate.
-Tests: override quoteRepositoryProvider with an in-memory implementation - no SQLite in unit tests.</a:t>
-            </a:r>
-            <a:endParaRPr lang="en-US" dirty="0"/>
-          </a:p>
-        </p:txBody>
-      </p:sp>
-      <p:sp>
-        <p:nvSpPr>
-          <p:cNvPr id="4" name="Slide Number Placeholder 3"/>
-          <p:cNvSpPr>
-            <a:spLocks noGrp="1"/>
-          </p:cNvSpPr>
-          <p:nvPr>
-            <p:ph type="sldNum" sz="quarter" idx="10"/>
-          </p:nvPr>
-        </p:nvSpPr>
-        <p:spPr/>
-        <p:txBody>
-          <a:bodyPr/>
-          <a:lstStyle/>
-          <a:p>
-            <a:fld id="{F7021451-1387-4CA6-816F-3879F97B5CBC}" type="slidenum">
-              <a:rPr lang="en-US"/>
-              <a:t>25</a:t>
-            </a:fld>
-            <a:endParaRPr lang="en-US"/>
-          </a:p>
-        </p:txBody>
-      </p:sp>
-    </p:spTree>
-    <p:extLst>
-      <p:ext uri="{BB962C8B-B14F-4D97-AF65-F5344CB8AC3E}">
-        <p14:creationId xmlns:p14="http://schemas.microsoft.com/office/powerpoint/2010/main" val="1024086991"/>
-      </p:ext>
-    </p:extLst>
-  </p:cSld>
-  <p:clrMapOvr>
-    <a:masterClrMapping/>
-  </p:clrMapOvr>
-</p:notes>
-</file>
-
-<file path=ppt/notesSlides/notesSlide26.xml><?xml version="1.0" encoding="utf-8"?>
-<p:notes xmlns:a="http://schemas.openxmlformats.org/drawingml/2006/main" xmlns:r="http://schemas.openxmlformats.org/officeDocument/2006/relationships" xmlns:p="http://schemas.openxmlformats.org/presentationml/2006/main">
-  <p:cSld>
-    <p:spTree>
-      <p:nvGrpSpPr>
-        <p:cNvPr id="1" name=""/>
-        <p:cNvGrpSpPr/>
-        <p:nvPr/>
-      </p:nvGrpSpPr>
-      <p:grpSpPr>
-        <a:xfrm>
-          <a:off x="0" y="0"/>
-          <a:ext cx="0" cy="0"/>
-          <a:chOff x="0" y="0"/>
-          <a:chExt cx="0" cy="0"/>
-        </a:xfrm>
-      </p:grpSpPr>
-      <p:sp>
-        <p:nvSpPr>
-          <p:cNvPr id="2" name="Slide Image Placeholder 1"/>
-          <p:cNvSpPr>
-            <a:spLocks noGrp="1" noRot="1" noChangeAspect="1"/>
-          </p:cNvSpPr>
-          <p:nvPr>
-            <p:ph type="sldImg"/>
-          </p:nvPr>
-        </p:nvSpPr>
-        <p:spPr/>
-      </p:sp>
-      <p:sp>
-        <p:nvSpPr>
-          <p:cNvPr id="3" name="Notes Placeholder 2"/>
-          <p:cNvSpPr>
-            <a:spLocks noGrp="1"/>
-          </p:cNvSpPr>
-          <p:nvPr>
-            <p:ph type="body" idx="1"/>
-          </p:nvPr>
-        </p:nvSpPr>
-        <p:spPr/>
-        <p:txBody>
-          <a:bodyPr/>
-          <a:lstStyle/>
-          <a:p>
-            <a:r>
-              <a:rPr lang="en-US" dirty="0"/>
-              <a:t>SCRIPT: Nothing surprising for a SQL room. Point out: parameterised queries, upsert via conflictAlgorithm, rawQuery exists for anything the helpers cannot express, and transactions via db.transaction((txn) async {...}).
-Row types come back as Map&lt;String, Object?&gt;; the num cast on premium again.</a:t>
-            </a:r>
-            <a:endParaRPr lang="en-US" dirty="0"/>
-          </a:p>
-        </p:txBody>
-      </p:sp>
-      <p:sp>
-        <p:nvSpPr>
-          <p:cNvPr id="4" name="Slide Number Placeholder 3"/>
-          <p:cNvSpPr>
-            <a:spLocks noGrp="1"/>
-          </p:cNvSpPr>
-          <p:nvPr>
-            <p:ph type="sldNum" sz="quarter" idx="10"/>
-          </p:nvPr>
-        </p:nvSpPr>
-        <p:spPr/>
-        <p:txBody>
-          <a:bodyPr/>
-          <a:lstStyle/>
-          <a:p>
-            <a:fld id="{F7021451-1387-4CA6-816F-3879F97B5CBC}" type="slidenum">
-              <a:rPr lang="en-US"/>
-              <a:t>26</a:t>
-            </a:fld>
-            <a:endParaRPr lang="en-US"/>
-          </a:p>
-        </p:txBody>
-      </p:sp>
-    </p:spTree>
-    <p:extLst>
-      <p:ext uri="{BB962C8B-B14F-4D97-AF65-F5344CB8AC3E}">
-        <p14:creationId xmlns:p14="http://schemas.microsoft.com/office/powerpoint/2010/main" val="1024086991"/>
-      </p:ext>
-    </p:extLst>
-  </p:cSld>
-  <p:clrMapOvr>
-    <a:masterClrMapping/>
-  </p:clrMapOvr>
-</p:notes>
-</file>
-
-<file path=ppt/notesSlides/notesSlide27.xml><?xml version="1.0" encoding="utf-8"?>
-<p:notes xmlns:a="http://schemas.openxmlformats.org/drawingml/2006/main" xmlns:r="http://schemas.openxmlformats.org/officeDocument/2006/relationships" xmlns:p="http://schemas.openxmlformats.org/presentationml/2006/main">
-  <p:cSld>
-    <p:spTree>
-      <p:nvGrpSpPr>
-        <p:cNvPr id="1" name=""/>
-        <p:cNvGrpSpPr/>
-        <p:nvPr/>
-      </p:nvGrpSpPr>
-      <p:grpSpPr>
-        <a:xfrm>
-          <a:off x="0" y="0"/>
-          <a:ext cx="0" cy="0"/>
-          <a:chOff x="0" y="0"/>
-          <a:chExt cx="0" cy="0"/>
-        </a:xfrm>
-      </p:grpSpPr>
-      <p:sp>
-        <p:nvSpPr>
-          <p:cNvPr id="2" name="Slide Image Placeholder 1"/>
-          <p:cNvSpPr>
-            <a:spLocks noGrp="1" noRot="1" noChangeAspect="1"/>
-          </p:cNvSpPr>
-          <p:nvPr>
-            <p:ph type="sldImg"/>
-          </p:nvPr>
-        </p:nvSpPr>
-        <p:spPr/>
-      </p:sp>
-      <p:sp>
-        <p:nvSpPr>
-          <p:cNvPr id="3" name="Notes Placeholder 2"/>
-          <p:cNvSpPr>
-            <a:spLocks noGrp="1"/>
-          </p:cNvSpPr>
-          <p:nvPr>
-            <p:ph type="body" idx="1"/>
-          </p:nvPr>
-        </p:nvSpPr>
-        <p:spPr/>
-        <p:txBody>
-          <a:bodyPr/>
-          <a:lstStyle/>
-          <a:p>
-            <a:r>
-              <a:rPr lang="en-US" dirty="0"/>
-              <a:t>SCRIPT: Nothing surprising for a SQL room. Point out: parameterised queries, upsert via conflictAlgorithm, rawQuery exists for anything the helpers cannot express, and transactions via db.transaction((txn) async {...}).
-Row types come back as Map&lt;String, Object?&gt;; the num cast on premium again.</a:t>
-            </a:r>
-            <a:endParaRPr lang="en-US" dirty="0"/>
-          </a:p>
-        </p:txBody>
-      </p:sp>
-      <p:sp>
-        <p:nvSpPr>
-          <p:cNvPr id="4" name="Slide Number Placeholder 3"/>
-          <p:cNvSpPr>
-            <a:spLocks noGrp="1"/>
-          </p:cNvSpPr>
-          <p:nvPr>
-            <p:ph type="sldNum" sz="quarter" idx="10"/>
-          </p:nvPr>
-        </p:nvSpPr>
-        <p:spPr/>
-        <p:txBody>
-          <a:bodyPr/>
-          <a:lstStyle/>
-          <a:p>
-            <a:fld id="{F7021451-1387-4CA6-816F-3879F97B5CBC}" type="slidenum">
-              <a:rPr lang="en-US"/>
-              <a:t>27</a:t>
-            </a:fld>
-            <a:endParaRPr lang="en-US"/>
-          </a:p>
-        </p:txBody>
-      </p:sp>
-    </p:spTree>
-    <p:extLst>
-      <p:ext uri="{BB962C8B-B14F-4D97-AF65-F5344CB8AC3E}">
-        <p14:creationId xmlns:p14="http://schemas.microsoft.com/office/powerpoint/2010/main" val="1024086991"/>
-      </p:ext>
-    </p:extLst>
-  </p:cSld>
-  <p:clrMapOvr>
-    <a:masterClrMapping/>
-  </p:clrMapOvr>
-</p:notes>
-</file>
-
-<file path=ppt/notesSlides/notesSlide28.xml><?xml version="1.0" encoding="utf-8"?>
-<p:notes xmlns:a="http://schemas.openxmlformats.org/drawingml/2006/main" xmlns:r="http://schemas.openxmlformats.org/officeDocument/2006/relationships" xmlns:p="http://schemas.openxmlformats.org/presentationml/2006/main">
-  <p:cSld>
-    <p:spTree>
-      <p:nvGrpSpPr>
-        <p:cNvPr id="1" name=""/>
-        <p:cNvGrpSpPr/>
-        <p:nvPr/>
-      </p:nvGrpSpPr>
-      <p:grpSpPr>
-        <a:xfrm>
-          <a:off x="0" y="0"/>
-          <a:ext cx="0" cy="0"/>
-          <a:chOff x="0" y="0"/>
-          <a:chExt cx="0" cy="0"/>
-        </a:xfrm>
-      </p:grpSpPr>
-      <p:sp>
-        <p:nvSpPr>
-          <p:cNvPr id="2" name="Slide Image Placeholder 1"/>
-          <p:cNvSpPr>
-            <a:spLocks noGrp="1" noRot="1" noChangeAspect="1"/>
-          </p:cNvSpPr>
-          <p:nvPr>
-            <p:ph type="sldImg"/>
-          </p:nvPr>
-        </p:nvSpPr>
-        <p:spPr/>
-      </p:sp>
-      <p:sp>
-        <p:nvSpPr>
-          <p:cNvPr id="3" name="Notes Placeholder 2"/>
-          <p:cNvSpPr>
-            <a:spLocks noGrp="1"/>
-          </p:cNvSpPr>
-          <p:nvPr>
-            <p:ph type="body" idx="1"/>
-          </p:nvPr>
-        </p:nvSpPr>
-        <p:spPr/>
-        <p:txBody>
-          <a:bodyPr/>
-          <a:lstStyle/>
-          <a:p>
-            <a:r>
-              <a:rPr lang="en-US" dirty="0"/>
-              <a:t>SCRIPT: Decision table. The insurance-specific line: auth tokens and policy documents. Tokens → secure storage; documents → files in the app's documents directory, encrypted if regulation requires.
-Offline-first: cache API responses in SQLite with a timestamp; serve cache, refresh in background; show "last updated". That is a Day 5 clinic topic if the client asks.</a:t>
-            </a:r>
-            <a:endParaRPr lang="en-US" dirty="0"/>
-          </a:p>
-        </p:txBody>
-      </p:sp>
-      <p:sp>
-        <p:nvSpPr>
-          <p:cNvPr id="4" name="Slide Number Placeholder 3"/>
-          <p:cNvSpPr>
-            <a:spLocks noGrp="1"/>
-          </p:cNvSpPr>
-          <p:nvPr>
-            <p:ph type="sldNum" sz="quarter" idx="10"/>
-          </p:nvPr>
-        </p:nvSpPr>
-        <p:spPr/>
-        <p:txBody>
-          <a:bodyPr/>
-          <a:lstStyle/>
-          <a:p>
-            <a:fld id="{F7021451-1387-4CA6-816F-3879F97B5CBC}" type="slidenum">
-              <a:rPr lang="en-US"/>
-              <a:t>28</a:t>
-            </a:fld>
-            <a:endParaRPr lang="en-US"/>
-          </a:p>
-        </p:txBody>
-      </p:sp>
-    </p:spTree>
-    <p:extLst>
-      <p:ext uri="{BB962C8B-B14F-4D97-AF65-F5344CB8AC3E}">
-        <p14:creationId xmlns:p14="http://schemas.microsoft.com/office/powerpoint/2010/main" val="1024086991"/>
-      </p:ext>
-    </p:extLst>
-  </p:cSld>
-  <p:clrMapOvr>
-    <a:masterClrMapping/>
-  </p:clrMapOvr>
-</p:notes>
-</file>
-
-<file path=ppt/notesSlides/notesSlide29.xml><?xml version="1.0" encoding="utf-8"?>
-<p:notes xmlns:a="http://schemas.openxmlformats.org/drawingml/2006/main" xmlns:r="http://schemas.openxmlformats.org/officeDocument/2006/relationships" xmlns:p="http://schemas.openxmlformats.org/presentationml/2006/main">
-  <p:cSld>
-    <p:spTree>
-      <p:nvGrpSpPr>
-        <p:cNvPr id="1" name=""/>
-        <p:cNvGrpSpPr/>
-        <p:nvPr/>
-      </p:nvGrpSpPr>
-      <p:grpSpPr>
-        <a:xfrm>
-          <a:off x="0" y="0"/>
-          <a:ext cx="0" cy="0"/>
-          <a:chOff x="0" y="0"/>
-          <a:chExt cx="0" cy="0"/>
-        </a:xfrm>
-      </p:grpSpPr>
-      <p:sp>
-        <p:nvSpPr>
-          <p:cNvPr id="2" name="Slide Image Placeholder 1"/>
-          <p:cNvSpPr>
-            <a:spLocks noGrp="1" noRot="1" noChangeAspect="1"/>
-          </p:cNvSpPr>
-          <p:nvPr>
-            <p:ph type="sldImg"/>
-          </p:nvPr>
-        </p:nvSpPr>
-        <p:spPr/>
-      </p:sp>
-      <p:sp>
-        <p:nvSpPr>
-          <p:cNvPr id="3" name="Notes Placeholder 2"/>
-          <p:cNvSpPr>
-            <a:spLocks noGrp="1"/>
-          </p:cNvSpPr>
-          <p:nvPr>
-            <p:ph type="body" idx="1"/>
-          </p:nvPr>
-        </p:nvSpPr>
-        <p:spPr/>
-        <p:txBody>
-          <a:bodyPr/>
-          <a:lstStyle/>
-          <a:p>
-            <a:r>
-              <a:rPr lang="en-US" dirty="0"/>
-              <a:t>WHY: the cookbook is the top Google result and shows a simpler-but-worse pattern (opening per call). Reading it against our version teaches judgement.
-EXPECTED: Q1 per-call open is simple but slower and hides lifecycle; once-in-main is faster and explicit but needs DI (which we have). Q2 multi-row consistency (save quote + lines); a throw rolls back. Q3 final b = db.batch(); for (...) b.insert(...); await b.commit(noResult: true). Q4 String ids need no AUTOINCREMENT, conflicts use the primary key, order by created_at explicitly.</a:t>
-            </a:r>
-            <a:endParaRPr lang="en-US" dirty="0"/>
-          </a:p>
-        </p:txBody>
-      </p:sp>
-      <p:sp>
-        <p:nvSpPr>
-          <p:cNvPr id="4" name="Slide Number Placeholder 3"/>
-          <p:cNvSpPr>
-            <a:spLocks noGrp="1"/>
-          </p:cNvSpPr>
-          <p:nvPr>
-            <p:ph type="sldNum" sz="quarter" idx="10"/>
-          </p:nvPr>
-        </p:nvSpPr>
-        <p:spPr/>
-        <p:txBody>
-          <a:bodyPr/>
-          <a:lstStyle/>
-          <a:p>
-            <a:fld id="{F7021451-1387-4CA6-816F-3879F97B5CBC}" type="slidenum">
-              <a:rPr lang="en-US"/>
-              <a:t>29</a:t>
-            </a:fld>
-            <a:endParaRPr lang="en-US"/>
-          </a:p>
-        </p:txBody>
-      </p:sp>
-    </p:spTree>
-    <p:extLst>
-      <p:ext uri="{BB962C8B-B14F-4D97-AF65-F5344CB8AC3E}">
-        <p14:creationId xmlns:p14="http://schemas.microsoft.com/office/powerpoint/2010/main" val="1024086991"/>
-      </p:ext>
-    </p:extLst>
-  </p:cSld>
-  <p:clrMapOvr>
-    <a:masterClrMapping/>
-  </p:clrMapOvr>
-</p:notes>
-</file>
-
-<file path=ppt/notesSlides/notesSlide3.xml><?xml version="1.0" encoding="utf-8"?>
-<p:notes xmlns:a="http://schemas.openxmlformats.org/drawingml/2006/main" xmlns:r="http://schemas.openxmlformats.org/officeDocument/2006/relationships" xmlns:p="http://schemas.openxmlformats.org/presentationml/2006/main">
-  <p:cSld>
-    <p:spTree>
-      <p:nvGrpSpPr>
-        <p:cNvPr id="1" name=""/>
-        <p:cNvGrpSpPr/>
-        <p:nvPr/>
-      </p:nvGrpSpPr>
-      <p:grpSpPr>
-        <a:xfrm>
-          <a:off x="0" y="0"/>
-          <a:ext cx="0" cy="0"/>
-          <a:chOff x="0" y="0"/>
-          <a:chExt cx="0" cy="0"/>
-        </a:xfrm>
-      </p:grpSpPr>
-      <p:sp>
-        <p:nvSpPr>
-          <p:cNvPr id="2" name="Slide Image Placeholder 1"/>
-          <p:cNvSpPr>
-            <a:spLocks noGrp="1" noRot="1" noChangeAspect="1"/>
-          </p:cNvSpPr>
-          <p:nvPr>
-            <p:ph type="sldImg"/>
-          </p:nvPr>
-        </p:nvSpPr>
-        <p:spPr/>
-      </p:sp>
-      <p:sp>
-        <p:nvSpPr>
-          <p:cNvPr id="3" name="Notes Placeholder 2"/>
-          <p:cNvSpPr>
-            <a:spLocks noGrp="1"/>
-          </p:cNvSpPr>
-          <p:nvPr>
-            <p:ph type="body" idx="1"/>
-          </p:nvPr>
-        </p:nvSpPr>
-        <p:spPr/>
-        <p:txBody>
-          <a:bodyPr/>
-          <a:lstStyle/>
-          <a:p>
-            <a:r>
-              <a:rPr lang="en-US" dirty="0"/>
-              <a:t>SCRIPT: After the two presenters. Correct gently. The go/push distinction is the one that matters: push from the capture screen to the result (user expects Back), go after onboarding completes (user must not go back to onboarding).
-Nested routes: a GoRoute inside another's routes: builds the parent's path as prefix, and push to a nested route builds the parent screen underneath automatically - which is why back from result lands on capture even after a deep link.</a:t>
-            </a:r>
-            <a:endParaRPr lang="en-US" dirty="0"/>
-          </a:p>
-        </p:txBody>
-      </p:sp>
-      <p:sp>
-        <p:nvSpPr>
-          <p:cNvPr id="4" name="Slide Number Placeholder 3"/>
-          <p:cNvSpPr>
-            <a:spLocks noGrp="1"/>
-          </p:cNvSpPr>
-          <p:nvPr>
-            <p:ph type="sldNum" sz="quarter" idx="10"/>
-          </p:nvPr>
-        </p:nvSpPr>
-        <p:spPr/>
-        <p:txBody>
-          <a:bodyPr/>
-          <a:lstStyle/>
-          <a:p>
-            <a:fld id="{F7021451-1387-4CA6-816F-3879F97B5CBC}" type="slidenum">
-              <a:rPr lang="en-US"/>
-              <a:t>3</a:t>
-            </a:fld>
-            <a:endParaRPr lang="en-US"/>
-          </a:p>
-        </p:txBody>
-      </p:sp>
-    </p:spTree>
-    <p:extLst>
-      <p:ext uri="{BB962C8B-B14F-4D97-AF65-F5344CB8AC3E}">
-        <p14:creationId xmlns:p14="http://schemas.microsoft.com/office/powerpoint/2010/main" val="1024086991"/>
-      </p:ext>
-    </p:extLst>
-  </p:cSld>
-  <p:clrMapOvr>
-    <a:masterClrMapping/>
-  </p:clrMapOvr>
-</p:notes>
-</file>
-
-<file path=ppt/notesSlides/notesSlide30.xml><?xml version="1.0" encoding="utf-8"?>
-<p:notes xmlns:a="http://schemas.openxmlformats.org/drawingml/2006/main" xmlns:r="http://schemas.openxmlformats.org/officeDocument/2006/relationships" xmlns:p="http://schemas.openxmlformats.org/presentationml/2006/main">
-  <p:cSld>
-    <p:spTree>
-      <p:nvGrpSpPr>
-        <p:cNvPr id="1" name=""/>
-        <p:cNvGrpSpPr/>
-        <p:nvPr/>
-      </p:nvGrpSpPr>
-      <p:grpSpPr>
-        <a:xfrm>
-          <a:off x="0" y="0"/>
-          <a:ext cx="0" cy="0"/>
-          <a:chOff x="0" y="0"/>
-          <a:chExt cx="0" cy="0"/>
-        </a:xfrm>
-      </p:grpSpPr>
-      <p:sp>
-        <p:nvSpPr>
-          <p:cNvPr id="2" name="Slide Image Placeholder 1"/>
-          <p:cNvSpPr>
-            <a:spLocks noGrp="1" noRot="1" noChangeAspect="1"/>
-          </p:cNvSpPr>
-          <p:nvPr>
-            <p:ph type="sldImg"/>
-          </p:nvPr>
-        </p:nvSpPr>
-        <p:spPr/>
-      </p:sp>
-      <p:sp>
-        <p:nvSpPr>
-          <p:cNvPr id="3" name="Notes Placeholder 2"/>
-          <p:cNvSpPr>
-            <a:spLocks noGrp="1"/>
-          </p:cNvSpPr>
-          <p:nvPr>
-            <p:ph type="body" idx="1"/>
-          </p:nvPr>
-        </p:nvSpPr>
-        <p:spPr/>
-        <p:txBody>
-          <a:bodyPr/>
-          <a:lstStyle/>
-          <a:p>
-            <a:r>
-              <a:rPr lang="en-US" dirty="0"/>
-              <a:t>SCRIPT: Sixty minutes, one lab, the whole app. Friday's testing and release work on this exact code, so everyone must finish the core steps.</a:t>
-            </a:r>
-            <a:endParaRPr lang="en-US" dirty="0"/>
-          </a:p>
-        </p:txBody>
-      </p:sp>
-      <p:sp>
-        <p:nvSpPr>
-          <p:cNvPr id="4" name="Slide Number Placeholder 3"/>
-          <p:cNvSpPr>
-            <a:spLocks noGrp="1"/>
-          </p:cNvSpPr>
-          <p:nvPr>
-            <p:ph type="sldNum" sz="quarter" idx="10"/>
-          </p:nvPr>
-        </p:nvSpPr>
-        <p:spPr/>
-        <p:txBody>
-          <a:bodyPr/>
-          <a:lstStyle/>
-          <a:p>
-            <a:fld id="{F7021451-1387-4CA6-816F-3879F97B5CBC}" type="slidenum">
-              <a:rPr lang="en-US"/>
-              <a:t>30</a:t>
-            </a:fld>
-            <a:endParaRPr lang="en-US"/>
-          </a:p>
-        </p:txBody>
-      </p:sp>
-    </p:spTree>
-    <p:extLst>
-      <p:ext uri="{BB962C8B-B14F-4D97-AF65-F5344CB8AC3E}">
-        <p14:creationId xmlns:p14="http://schemas.microsoft.com/office/powerpoint/2010/main" val="1024086991"/>
-      </p:ext>
-    </p:extLst>
-  </p:cSld>
-  <p:clrMapOvr>
-    <a:masterClrMapping/>
-  </p:clrMapOvr>
-</p:notes>
-</file>
-
-<file path=ppt/notesSlides/notesSlide31.xml><?xml version="1.0" encoding="utf-8"?>
-<p:notes xmlns:a="http://schemas.openxmlformats.org/drawingml/2006/main" xmlns:r="http://schemas.openxmlformats.org/officeDocument/2006/relationships" xmlns:p="http://schemas.openxmlformats.org/presentationml/2006/main">
-  <p:cSld>
-    <p:spTree>
-      <p:nvGrpSpPr>
-        <p:cNvPr id="1" name=""/>
-        <p:cNvGrpSpPr/>
-        <p:nvPr/>
-      </p:nvGrpSpPr>
-      <p:grpSpPr>
-        <a:xfrm>
-          <a:off x="0" y="0"/>
-          <a:ext cx="0" cy="0"/>
-          <a:chOff x="0" y="0"/>
-          <a:chExt cx="0" cy="0"/>
-        </a:xfrm>
-      </p:grpSpPr>
-      <p:sp>
-        <p:nvSpPr>
-          <p:cNvPr id="2" name="Slide Image Placeholder 1"/>
-          <p:cNvSpPr>
-            <a:spLocks noGrp="1" noRot="1" noChangeAspect="1"/>
-          </p:cNvSpPr>
-          <p:nvPr>
-            <p:ph type="sldImg"/>
-          </p:nvPr>
-        </p:nvSpPr>
-        <p:spPr/>
-      </p:sp>
-      <p:sp>
-        <p:nvSpPr>
-          <p:cNvPr id="3" name="Notes Placeholder 2"/>
-          <p:cNvSpPr>
-            <a:spLocks noGrp="1"/>
-          </p:cNvSpPr>
-          <p:nvPr>
-            <p:ph type="body" idx="1"/>
-          </p:nvPr>
-        </p:nvSpPr>
-        <p:spPr/>
-        <p:txBody>
-          <a:bodyPr/>
-          <a:lstStyle/>
-          <a:p>
-            <a:r>
-              <a:rPr lang="en-US" dirty="0"/>
-              <a:t>SCRIPT: Draw the five boxes; each is a lab from this week. The ResultScreen change: look up the quote by id from savedQuotesProvider if the notifier does not hold it - so deep links into saved quotes work.
-main.dart is on the next slide; it is the reference bootstrap for Friday.</a:t>
-            </a:r>
-            <a:endParaRPr lang="en-US" dirty="0"/>
-          </a:p>
-        </p:txBody>
-      </p:sp>
-      <p:sp>
-        <p:nvSpPr>
-          <p:cNvPr id="4" name="Slide Number Placeholder 3"/>
-          <p:cNvSpPr>
-            <a:spLocks noGrp="1"/>
-          </p:cNvSpPr>
-          <p:nvPr>
-            <p:ph type="sldNum" sz="quarter" idx="10"/>
-          </p:nvPr>
-        </p:nvSpPr>
-        <p:spPr/>
-        <p:txBody>
-          <a:bodyPr/>
-          <a:lstStyle/>
-          <a:p>
-            <a:fld id="{F7021451-1387-4CA6-816F-3879F97B5CBC}" type="slidenum">
-              <a:rPr lang="en-US"/>
-              <a:t>31</a:t>
-            </a:fld>
-            <a:endParaRPr lang="en-US"/>
-          </a:p>
-        </p:txBody>
-      </p:sp>
-    </p:spTree>
-    <p:extLst>
-      <p:ext uri="{BB962C8B-B14F-4D97-AF65-F5344CB8AC3E}">
-        <p14:creationId xmlns:p14="http://schemas.microsoft.com/office/powerpoint/2010/main" val="1024086991"/>
-      </p:ext>
-    </p:extLst>
-  </p:cSld>
-  <p:clrMapOvr>
-    <a:masterClrMapping/>
-  </p:clrMapOvr>
-</p:notes>
-</file>
-
-<file path=ppt/notesSlides/notesSlide32.xml><?xml version="1.0" encoding="utf-8"?>
-<p:notes xmlns:a="http://schemas.openxmlformats.org/drawingml/2006/main" xmlns:r="http://schemas.openxmlformats.org/officeDocument/2006/relationships" xmlns:p="http://schemas.openxmlformats.org/presentationml/2006/main">
-  <p:cSld>
-    <p:spTree>
-      <p:nvGrpSpPr>
-        <p:cNvPr id="1" name=""/>
-        <p:cNvGrpSpPr/>
-        <p:nvPr/>
-      </p:nvGrpSpPr>
-      <p:grpSpPr>
-        <a:xfrm>
-          <a:off x="0" y="0"/>
-          <a:ext cx="0" cy="0"/>
-          <a:chOff x="0" y="0"/>
-          <a:chExt cx="0" cy="0"/>
-        </a:xfrm>
-      </p:grpSpPr>
-      <p:sp>
-        <p:nvSpPr>
-          <p:cNvPr id="2" name="Slide Image Placeholder 1"/>
-          <p:cNvSpPr>
-            <a:spLocks noGrp="1" noRot="1" noChangeAspect="1"/>
-          </p:cNvSpPr>
-          <p:nvPr>
-            <p:ph type="sldImg"/>
-          </p:nvPr>
-        </p:nvSpPr>
-        <p:spPr/>
-      </p:sp>
-      <p:sp>
-        <p:nvSpPr>
-          <p:cNvPr id="3" name="Notes Placeholder 2"/>
-          <p:cNvSpPr>
-            <a:spLocks noGrp="1"/>
-          </p:cNvSpPr>
-          <p:nvPr>
-            <p:ph type="body" idx="1"/>
-          </p:nvPr>
-        </p:nvSpPr>
-        <p:spPr/>
-        <p:txBody>
-          <a:bodyPr/>
-          <a:lstStyle/>
-          <a:p>
-            <a:r>
-              <a:rPr lang="en-US" dirty="0"/>
-              <a:t>SCRIPT: Two things: the bootstrap with both overrides, and the listen that navigates. Navigation is a side effect, so it lives in ref.listen, not in the returned tree.
-After a QuoteLoaded push, the capture screen can call reset() in the result's Back handler or leave the state - either works; keep it simple.</a:t>
-            </a:r>
-            <a:endParaRPr lang="en-US" dirty="0"/>
-          </a:p>
-        </p:txBody>
-      </p:sp>
-      <p:sp>
-        <p:nvSpPr>
-          <p:cNvPr id="4" name="Slide Number Placeholder 3"/>
-          <p:cNvSpPr>
-            <a:spLocks noGrp="1"/>
-          </p:cNvSpPr>
-          <p:nvPr>
-            <p:ph type="sldNum" sz="quarter" idx="10"/>
-          </p:nvPr>
-        </p:nvSpPr>
-        <p:spPr/>
-        <p:txBody>
-          <a:bodyPr/>
-          <a:lstStyle/>
-          <a:p>
-            <a:fld id="{F7021451-1387-4CA6-816F-3879F97B5CBC}" type="slidenum">
-              <a:rPr lang="en-US"/>
-              <a:t>32</a:t>
-            </a:fld>
-            <a:endParaRPr lang="en-US"/>
-          </a:p>
-        </p:txBody>
-      </p:sp>
-    </p:spTree>
-    <p:extLst>
-      <p:ext uri="{BB962C8B-B14F-4D97-AF65-F5344CB8AC3E}">
-        <p14:creationId xmlns:p14="http://schemas.microsoft.com/office/powerpoint/2010/main" val="1024086991"/>
-      </p:ext>
-    </p:extLst>
-  </p:cSld>
-  <p:clrMapOvr>
-    <a:masterClrMapping/>
-  </p:clrMapOvr>
-</p:notes>
-</file>
-
-<file path=ppt/notesSlides/notesSlide33.xml><?xml version="1.0" encoding="utf-8"?>
-<p:notes xmlns:a="http://schemas.openxmlformats.org/drawingml/2006/main" xmlns:r="http://schemas.openxmlformats.org/officeDocument/2006/relationships" xmlns:p="http://schemas.openxmlformats.org/presentationml/2006/main">
-  <p:cSld>
-    <p:spTree>
-      <p:nvGrpSpPr>
-        <p:cNvPr id="1" name=""/>
-        <p:cNvGrpSpPr/>
-        <p:nvPr/>
-      </p:nvGrpSpPr>
-      <p:grpSpPr>
-        <a:xfrm>
-          <a:off x="0" y="0"/>
-          <a:ext cx="0" cy="0"/>
-          <a:chOff x="0" y="0"/>
-          <a:chExt cx="0" cy="0"/>
-        </a:xfrm>
-      </p:grpSpPr>
-      <p:sp>
-        <p:nvSpPr>
-          <p:cNvPr id="2" name="Slide Image Placeholder 1"/>
-          <p:cNvSpPr>
-            <a:spLocks noGrp="1" noRot="1" noChangeAspect="1"/>
-          </p:cNvSpPr>
-          <p:nvPr>
-            <p:ph type="sldImg"/>
-          </p:nvPr>
-        </p:nvSpPr>
-        <p:spPr/>
-      </p:sp>
-      <p:sp>
-        <p:nvSpPr>
-          <p:cNvPr id="3" name="Notes Placeholder 2"/>
-          <p:cNvSpPr>
-            <a:spLocks noGrp="1"/>
-          </p:cNvSpPr>
-          <p:nvPr>
-            <p:ph type="body" idx="1"/>
-          </p:nvPr>
-        </p:nvSpPr>
-        <p:spPr/>
-        <p:txBody>
-          <a:bodyPr/>
-          <a:lstStyle/>
-          <a:p>
-            <a:r>
-              <a:rPr lang="en-US" dirty="0"/>
-              <a:t>RUN THE LAB: 60 min. Core = steps 1-5. Circulate on step 1 first: the bootstrap is where "MissingPluginException" and "UnimplementedError" appear.
-COMMON ERRORS: "MissingPluginException(getDatabasesPath)" → plugin added but app hot-reloaded; stop and run. "UnimplementedError" → provider override missing in main. "Bad state: No element" → firstWhere without orElse; use where(...).firstOrNull (collection package) or a try. Saved list does not refresh → forgot invalidateSelf. Onboarding shows every time → setBool not awaited or wrong key.
-CHROME FALLBACK USERS: use InMemoryQuoteRepository (Appendix E) instead of SQLite; everything else is identical.
-SOLUTION: Appendix E, branch lab-4-3-solution.</a:t>
-            </a:r>
-            <a:endParaRPr lang="en-US" dirty="0"/>
-          </a:p>
-        </p:txBody>
-      </p:sp>
-      <p:sp>
-        <p:nvSpPr>
-          <p:cNvPr id="4" name="Slide Number Placeholder 3"/>
-          <p:cNvSpPr>
-            <a:spLocks noGrp="1"/>
-          </p:cNvSpPr>
-          <p:nvPr>
-            <p:ph type="sldNum" sz="quarter" idx="10"/>
-          </p:nvPr>
-        </p:nvSpPr>
-        <p:spPr/>
-        <p:txBody>
-          <a:bodyPr/>
-          <a:lstStyle/>
-          <a:p>
-            <a:fld id="{F7021451-1387-4CA6-816F-3879F97B5CBC}" type="slidenum">
-              <a:rPr lang="en-US"/>
-              <a:t>33</a:t>
-            </a:fld>
-            <a:endParaRPr lang="en-US"/>
-          </a:p>
-        </p:txBody>
-      </p:sp>
-    </p:spTree>
-    <p:extLst>
-      <p:ext uri="{BB962C8B-B14F-4D97-AF65-F5344CB8AC3E}">
-        <p14:creationId xmlns:p14="http://schemas.microsoft.com/office/powerpoint/2010/main" val="1024086991"/>
-      </p:ext>
-    </p:extLst>
-  </p:cSld>
-  <p:clrMapOvr>
-    <a:masterClrMapping/>
-  </p:clrMapOvr>
-</p:notes>
-</file>
-
-<file path=ppt/notesSlides/notesSlide34.xml><?xml version="1.0" encoding="utf-8"?>
-<p:notes xmlns:a="http://schemas.openxmlformats.org/drawingml/2006/main" xmlns:r="http://schemas.openxmlformats.org/officeDocument/2006/relationships" xmlns:p="http://schemas.openxmlformats.org/presentationml/2006/main">
-  <p:cSld>
-    <p:spTree>
-      <p:nvGrpSpPr>
-        <p:cNvPr id="1" name=""/>
-        <p:cNvGrpSpPr/>
-        <p:nvPr/>
-      </p:nvGrpSpPr>
-      <p:grpSpPr>
-        <a:xfrm>
-          <a:off x="0" y="0"/>
-          <a:ext cx="0" cy="0"/>
-          <a:chOff x="0" y="0"/>
-          <a:chExt cx="0" cy="0"/>
-        </a:xfrm>
-      </p:grpSpPr>
-      <p:sp>
-        <p:nvSpPr>
-          <p:cNvPr id="2" name="Slide Image Placeholder 1"/>
-          <p:cNvSpPr>
-            <a:spLocks noGrp="1" noRot="1" noChangeAspect="1"/>
-          </p:cNvSpPr>
-          <p:nvPr>
-            <p:ph type="sldImg"/>
-          </p:nvPr>
-        </p:nvSpPr>
-        <p:spPr/>
-      </p:sp>
-      <p:sp>
-        <p:nvSpPr>
-          <p:cNvPr id="3" name="Notes Placeholder 2"/>
-          <p:cNvSpPr>
-            <a:spLocks noGrp="1"/>
-          </p:cNvSpPr>
-          <p:nvPr>
-            <p:ph type="body" idx="1"/>
-          </p:nvPr>
-        </p:nvSpPr>
-        <p:spPr/>
-        <p:txBody>
-          <a:bodyPr/>
-          <a:lstStyle/>
-          <a:p>
-            <a:r>
-              <a:rPr lang="en-US" dirty="0"/>
-              <a:t>WHY: Day 5 morning is testing; the reading means the first test is written by the room, not by you.
-EXPECTED: Q1 unit = notifier/calculator; widget = form and cards; integration = the whole flow on a device. Q2 pumpWidget mounts; pump advances one frame/duration; pumpAndSettle repeats until no frames scheduled - hangs with infinite animations (CircularProgressIndicator!). Q3 find.text, find.byType, find.byKey; tester.tap(finder) then pump. Q4 ProviderScope(overrides: [quoteServiceProvider.overrideWithValue(Fake())], child: …).</a:t>
-            </a:r>
-            <a:endParaRPr lang="en-US" dirty="0"/>
-          </a:p>
-        </p:txBody>
-      </p:sp>
-      <p:sp>
-        <p:nvSpPr>
-          <p:cNvPr id="4" name="Slide Number Placeholder 3"/>
-          <p:cNvSpPr>
-            <a:spLocks noGrp="1"/>
-          </p:cNvSpPr>
-          <p:nvPr>
-            <p:ph type="sldNum" sz="quarter" idx="10"/>
-          </p:nvPr>
-        </p:nvSpPr>
-        <p:spPr/>
-        <p:txBody>
-          <a:bodyPr/>
-          <a:lstStyle/>
-          <a:p>
-            <a:fld id="{F7021451-1387-4CA6-816F-3879F97B5CBC}" type="slidenum">
-              <a:rPr lang="en-US"/>
-              <a:t>34</a:t>
-            </a:fld>
-            <a:endParaRPr lang="en-US"/>
-          </a:p>
-        </p:txBody>
-      </p:sp>
-    </p:spTree>
-    <p:extLst>
-      <p:ext uri="{BB962C8B-B14F-4D97-AF65-F5344CB8AC3E}">
-        <p14:creationId xmlns:p14="http://schemas.microsoft.com/office/powerpoint/2010/main" val="1024086991"/>
-      </p:ext>
-    </p:extLst>
-  </p:cSld>
-  <p:clrMapOvr>
-    <a:masterClrMapping/>
-  </p:clrMapOvr>
-</p:notes>
-</file>
-
-<file path=ppt/notesSlides/notesSlide35.xml><?xml version="1.0" encoding="utf-8"?>
-<p:notes xmlns:a="http://schemas.openxmlformats.org/drawingml/2006/main" xmlns:r="http://schemas.openxmlformats.org/officeDocument/2006/relationships" xmlns:p="http://schemas.openxmlformats.org/presentationml/2006/main">
-  <p:cSld>
-    <p:spTree>
-      <p:nvGrpSpPr>
-        <p:cNvPr id="1" name=""/>
-        <p:cNvGrpSpPr/>
-        <p:nvPr/>
-      </p:nvGrpSpPr>
-      <p:grpSpPr>
-        <a:xfrm>
-          <a:off x="0" y="0"/>
-          <a:ext cx="0" cy="0"/>
-          <a:chOff x="0" y="0"/>
-          <a:chExt cx="0" cy="0"/>
-        </a:xfrm>
-      </p:grpSpPr>
-      <p:sp>
-        <p:nvSpPr>
-          <p:cNvPr id="2" name="Slide Image Placeholder 1"/>
-          <p:cNvSpPr>
-            <a:spLocks noGrp="1" noRot="1" noChangeAspect="1"/>
-          </p:cNvSpPr>
-          <p:nvPr>
-            <p:ph type="sldImg"/>
-          </p:nvPr>
-        </p:nvSpPr>
-        <p:spPr/>
-      </p:sp>
-      <p:sp>
-        <p:nvSpPr>
-          <p:cNvPr id="3" name="Notes Placeholder 2"/>
-          <p:cNvSpPr>
-            <a:spLocks noGrp="1"/>
-          </p:cNvSpPr>
-          <p:nvPr>
-            <p:ph type="body" idx="1"/>
-          </p:nvPr>
-        </p:nvSpPr>
-        <p:spPr/>
-        <p:txBody>
-          <a:bodyPr/>
-          <a:lstStyle/>
-          <a:p>
-            <a:r>
-              <a:rPr lang="en-US" dirty="0"/>
-              <a:t>SCRIPT: recap, homework, Q&amp;A. Ask what broke most today (it will be the emulator → host networking or build_runner) and pre-empt it in tomorrow's opener.
-PRESENTER TONIGHT: build the Day 5 reference from lab-4-3-solution: tests passing, two flavours, a signed AAB, a green GitHub Actions run, and the iOS build on your Mac. Charge the phone you will use for the iOS demo.</a:t>
-            </a:r>
-            <a:endParaRPr lang="en-US" dirty="0"/>
-          </a:p>
-        </p:txBody>
-      </p:sp>
-      <p:sp>
-        <p:nvSpPr>
-          <p:cNvPr id="4" name="Slide Number Placeholder 3"/>
-          <p:cNvSpPr>
-            <a:spLocks noGrp="1"/>
-          </p:cNvSpPr>
-          <p:nvPr>
-            <p:ph type="sldNum" sz="quarter" idx="10"/>
-          </p:nvPr>
-        </p:nvSpPr>
-        <p:spPr/>
-        <p:txBody>
-          <a:bodyPr/>
-          <a:lstStyle/>
-          <a:p>
-            <a:fld id="{F7021451-1387-4CA6-816F-3879F97B5CBC}" type="slidenum">
-              <a:rPr lang="en-US"/>
-              <a:t>35</a:t>
-            </a:fld>
-            <a:endParaRPr lang="en-US"/>
-          </a:p>
-        </p:txBody>
-      </p:sp>
-    </p:spTree>
-    <p:extLst>
-      <p:ext uri="{BB962C8B-B14F-4D97-AF65-F5344CB8AC3E}">
-        <p14:creationId xmlns:p14="http://schemas.microsoft.com/office/powerpoint/2010/main" val="1024086991"/>
-      </p:ext>
-    </p:extLst>
-  </p:cSld>
-  <p:clrMapOvr>
-    <a:masterClrMapping/>
-  </p:clrMapOvr>
-</p:notes>
-</file>
-
-<file path=ppt/notesSlides/notesSlide36.xml><?xml version="1.0" encoding="utf-8"?>
-<p:notes xmlns:a="http://schemas.openxmlformats.org/drawingml/2006/main" xmlns:r="http://schemas.openxmlformats.org/officeDocument/2006/relationships" xmlns:p="http://schemas.openxmlformats.org/presentationml/2006/main">
-  <p:cSld>
-    <p:spTree>
-      <p:nvGrpSpPr>
-        <p:cNvPr id="1" name=""/>
-        <p:cNvGrpSpPr/>
-        <p:nvPr/>
-      </p:nvGrpSpPr>
-      <p:grpSpPr>
-        <a:xfrm>
-          <a:off x="0" y="0"/>
-          <a:ext cx="0" cy="0"/>
-          <a:chOff x="0" y="0"/>
-          <a:chExt cx="0" cy="0"/>
-        </a:xfrm>
-      </p:grpSpPr>
-      <p:sp>
-        <p:nvSpPr>
-          <p:cNvPr id="2" name="Slide Image Placeholder 1"/>
-          <p:cNvSpPr>
-            <a:spLocks noGrp="1" noRot="1" noChangeAspect="1"/>
-          </p:cNvSpPr>
-          <p:nvPr>
-            <p:ph type="sldImg"/>
-          </p:nvPr>
-        </p:nvSpPr>
-        <p:spPr/>
-      </p:sp>
-      <p:sp>
-        <p:nvSpPr>
-          <p:cNvPr id="3" name="Notes Placeholder 2"/>
-          <p:cNvSpPr>
-            <a:spLocks noGrp="1"/>
-          </p:cNvSpPr>
-          <p:nvPr>
-            <p:ph type="body" idx="1"/>
-          </p:nvPr>
-        </p:nvSpPr>
-        <p:spPr/>
-        <p:txBody>
-          <a:bodyPr/>
-          <a:lstStyle/>
-          <a:p>
-            <a:r>
-              <a:rPr lang="en-US" dirty="0"/>
-              <a:t>PRESENTER. Today has the most infrastructure risk of the week - networking between an emulator and a laptop, on machines you do not control.
-DO THIS AT 09:00: get every machine to the point where the mock API answers, BEFORE any Dart is written. Walk the room with one command: curl / Invoke-RestMethod against localhost, then the app against 10.0.2.2. Twenty minutes spent here saves the afternoon.
-THE ESCAPE HATCH: the FakeQuoteService from Day 3 is still in the repo. Reverting one provider line turns a network problem into a non-event. Say this to the room early so nobody panics.</a:t>
-            </a:r>
-            <a:endParaRPr lang="en-US" dirty="0"/>
-          </a:p>
-        </p:txBody>
-      </p:sp>
-      <p:sp>
-        <p:nvSpPr>
-          <p:cNvPr id="4" name="Slide Number Placeholder 3"/>
-          <p:cNvSpPr>
-            <a:spLocks noGrp="1"/>
-          </p:cNvSpPr>
-          <p:nvPr>
-            <p:ph type="sldNum" sz="quarter" idx="10"/>
-          </p:nvPr>
-        </p:nvSpPr>
-        <p:spPr/>
-        <p:txBody>
-          <a:bodyPr/>
-          <a:lstStyle/>
-          <a:p>
-            <a:fld id="{F7021451-1387-4CA6-816F-3879F97B5CBC}" type="slidenum">
-              <a:rPr lang="en-US"/>
-              <a:t>36</a:t>
-            </a:fld>
-            <a:endParaRPr lang="en-US"/>
-          </a:p>
-        </p:txBody>
-      </p:sp>
-    </p:spTree>
-    <p:extLst>
-      <p:ext uri="{BB962C8B-B14F-4D97-AF65-F5344CB8AC3E}">
-        <p14:creationId xmlns:p14="http://schemas.microsoft.com/office/powerpoint/2010/main" val="1024086991"/>
-      </p:ext>
-    </p:extLst>
-  </p:cSld>
-  <p:clrMapOvr>
-    <a:masterClrMapping/>
-  </p:clrMapOvr>
-</p:notes>
-</file>
-
-<file path=ppt/notesSlides/notesSlide37.xml><?xml version="1.0" encoding="utf-8"?>
-<p:notes xmlns:a="http://schemas.openxmlformats.org/drawingml/2006/main" xmlns:r="http://schemas.openxmlformats.org/officeDocument/2006/relationships" xmlns:p="http://schemas.openxmlformats.org/presentationml/2006/main">
-  <p:cSld>
-    <p:spTree>
-      <p:nvGrpSpPr>
-        <p:cNvPr id="1" name=""/>
-        <p:cNvGrpSpPr/>
-        <p:nvPr/>
-      </p:nvGrpSpPr>
-      <p:grpSpPr>
-        <a:xfrm>
-          <a:off x="0" y="0"/>
-          <a:ext cx="0" cy="0"/>
-          <a:chOff x="0" y="0"/>
-          <a:chExt cx="0" cy="0"/>
-        </a:xfrm>
-      </p:grpSpPr>
-      <p:sp>
-        <p:nvSpPr>
-          <p:cNvPr id="2" name="Slide Image Placeholder 1"/>
-          <p:cNvSpPr>
-            <a:spLocks noGrp="1" noRot="1" noChangeAspect="1"/>
-          </p:cNvSpPr>
-          <p:nvPr>
-            <p:ph type="sldImg"/>
-          </p:nvPr>
-        </p:nvSpPr>
-        <p:spPr/>
-      </p:sp>
-      <p:sp>
-        <p:nvSpPr>
-          <p:cNvPr id="3" name="Notes Placeholder 2"/>
-          <p:cNvSpPr>
-            <a:spLocks noGrp="1"/>
-          </p:cNvSpPr>
-          <p:nvPr>
-            <p:ph type="body" idx="1"/>
-          </p:nvPr>
-        </p:nvSpPr>
-        <p:spPr/>
-        <p:txBody>
-          <a:bodyPr/>
-          <a:lstStyle/>
-          <a:p>
-            <a:r>
-              <a:rPr lang="en-US" dirty="0"/>
-              <a:t>Appendix.</a:t>
-            </a:r>
-            <a:endParaRPr lang="en-US" dirty="0"/>
-          </a:p>
-        </p:txBody>
-      </p:sp>
-      <p:sp>
-        <p:nvSpPr>
-          <p:cNvPr id="4" name="Slide Number Placeholder 3"/>
-          <p:cNvSpPr>
-            <a:spLocks noGrp="1"/>
-          </p:cNvSpPr>
-          <p:nvPr>
-            <p:ph type="sldNum" sz="quarter" idx="10"/>
-          </p:nvPr>
-        </p:nvSpPr>
-        <p:spPr/>
-        <p:txBody>
-          <a:bodyPr/>
-          <a:lstStyle/>
-          <a:p>
-            <a:fld id="{F7021451-1387-4CA6-816F-3879F97B5CBC}" type="slidenum">
-              <a:rPr lang="en-US"/>
-              <a:t>37</a:t>
-            </a:fld>
-            <a:endParaRPr lang="en-US"/>
-          </a:p>
-        </p:txBody>
-      </p:sp>
-    </p:spTree>
-    <p:extLst>
-      <p:ext uri="{BB962C8B-B14F-4D97-AF65-F5344CB8AC3E}">
-        <p14:creationId xmlns:p14="http://schemas.microsoft.com/office/powerpoint/2010/main" val="1024086991"/>
-      </p:ext>
-    </p:extLst>
-  </p:cSld>
-  <p:clrMapOvr>
-    <a:masterClrMapping/>
-  </p:clrMapOvr>
-</p:notes>
-</file>
-
-<file path=ppt/notesSlides/notesSlide38.xml><?xml version="1.0" encoding="utf-8"?>
-<p:notes xmlns:a="http://schemas.openxmlformats.org/drawingml/2006/main" xmlns:r="http://schemas.openxmlformats.org/officeDocument/2006/relationships" xmlns:p="http://schemas.openxmlformats.org/presentationml/2006/main">
-  <p:cSld>
-    <p:spTree>
-      <p:nvGrpSpPr>
-        <p:cNvPr id="1" name=""/>
-        <p:cNvGrpSpPr/>
-        <p:nvPr/>
-      </p:nvGrpSpPr>
-      <p:grpSpPr>
-        <a:xfrm>
-          <a:off x="0" y="0"/>
-          <a:ext cx="0" cy="0"/>
-          <a:chOff x="0" y="0"/>
-          <a:chExt cx="0" cy="0"/>
-        </a:xfrm>
-      </p:grpSpPr>
-      <p:sp>
-        <p:nvSpPr>
-          <p:cNvPr id="2" name="Slide Image Placeholder 1"/>
-          <p:cNvSpPr>
-            <a:spLocks noGrp="1" noRot="1" noChangeAspect="1"/>
-          </p:cNvSpPr>
-          <p:nvPr>
-            <p:ph type="sldImg"/>
-          </p:nvPr>
-        </p:nvSpPr>
-        <p:spPr/>
-      </p:sp>
-      <p:sp>
-        <p:nvSpPr>
-          <p:cNvPr id="3" name="Notes Placeholder 2"/>
-          <p:cNvSpPr>
-            <a:spLocks noGrp="1"/>
-          </p:cNvSpPr>
-          <p:nvPr>
-            <p:ph type="body" idx="1"/>
-          </p:nvPr>
-        </p:nvSpPr>
-        <p:spPr/>
-        <p:txBody>
-          <a:bodyPr/>
-          <a:lstStyle/>
-          <a:p>
-            <a:r>
-              <a:rPr lang="en-US" dirty="0"/>
-              <a:t>Every delegate runs their own copy. No packages needed.</a:t>
-            </a:r>
-            <a:endParaRPr lang="en-US" dirty="0"/>
-          </a:p>
-        </p:txBody>
-      </p:sp>
-      <p:sp>
-        <p:nvSpPr>
-          <p:cNvPr id="4" name="Slide Number Placeholder 3"/>
-          <p:cNvSpPr>
-            <a:spLocks noGrp="1"/>
-          </p:cNvSpPr>
-          <p:nvPr>
-            <p:ph type="sldNum" sz="quarter" idx="10"/>
-          </p:nvPr>
-        </p:nvSpPr>
-        <p:spPr/>
-        <p:txBody>
-          <a:bodyPr/>
-          <a:lstStyle/>
-          <a:p>
-            <a:fld id="{F7021451-1387-4CA6-816F-3879F97B5CBC}" type="slidenum">
-              <a:rPr lang="en-US"/>
-              <a:t>38</a:t>
-            </a:fld>
-            <a:endParaRPr lang="en-US"/>
-          </a:p>
-        </p:txBody>
-      </p:sp>
-    </p:spTree>
-    <p:extLst>
-      <p:ext uri="{BB962C8B-B14F-4D97-AF65-F5344CB8AC3E}">
-        <p14:creationId xmlns:p14="http://schemas.microsoft.com/office/powerpoint/2010/main" val="1024086991"/>
-      </p:ext>
-    </p:extLst>
-  </p:cSld>
-  <p:clrMapOvr>
-    <a:masterClrMapping/>
-  </p:clrMapOvr>
-</p:notes>
-</file>
-
-<file path=ppt/notesSlides/notesSlide39.xml><?xml version="1.0" encoding="utf-8"?>
-<p:notes xmlns:a="http://schemas.openxmlformats.org/drawingml/2006/main" xmlns:r="http://schemas.openxmlformats.org/officeDocument/2006/relationships" xmlns:p="http://schemas.openxmlformats.org/presentationml/2006/main">
-  <p:cSld>
-    <p:spTree>
-      <p:nvGrpSpPr>
-        <p:cNvPr id="1" name=""/>
-        <p:cNvGrpSpPr/>
-        <p:nvPr/>
-      </p:nvGrpSpPr>
-      <p:grpSpPr>
-        <a:xfrm>
-          <a:off x="0" y="0"/>
-          <a:ext cx="0" cy="0"/>
-          <a:chOff x="0" y="0"/>
-          <a:chExt cx="0" cy="0"/>
-        </a:xfrm>
-      </p:grpSpPr>
-      <p:sp>
-        <p:nvSpPr>
-          <p:cNvPr id="2" name="Slide Image Placeholder 1"/>
-          <p:cNvSpPr>
-            <a:spLocks noGrp="1" noRot="1" noChangeAspect="1"/>
-          </p:cNvSpPr>
-          <p:nvPr>
-            <p:ph type="sldImg"/>
-          </p:nvPr>
-        </p:nvSpPr>
-        <p:spPr/>
-      </p:sp>
-      <p:sp>
-        <p:nvSpPr>
-          <p:cNvPr id="3" name="Notes Placeholder 2"/>
-          <p:cNvSpPr>
-            <a:spLocks noGrp="1"/>
-          </p:cNvSpPr>
-          <p:nvPr>
-            <p:ph type="body" idx="1"/>
-          </p:nvPr>
-        </p:nvSpPr>
-        <p:spPr/>
-        <p:txBody>
-          <a:bodyPr/>
-          <a:lstStyle/>
-          <a:p>
-            <a:r>
-              <a:rPr lang="en-US" dirty="0"/>
-              <a:t>Every delegate runs their own copy. No packages needed.</a:t>
-            </a:r>
-            <a:endParaRPr lang="en-US" dirty="0"/>
-          </a:p>
-        </p:txBody>
-      </p:sp>
-      <p:sp>
-        <p:nvSpPr>
-          <p:cNvPr id="4" name="Slide Number Placeholder 3"/>
-          <p:cNvSpPr>
-            <a:spLocks noGrp="1"/>
-          </p:cNvSpPr>
-          <p:nvPr>
-            <p:ph type="sldNum" sz="quarter" idx="10"/>
-          </p:nvPr>
-        </p:nvSpPr>
-        <p:spPr/>
-        <p:txBody>
-          <a:bodyPr/>
-          <a:lstStyle/>
-          <a:p>
-            <a:fld id="{F7021451-1387-4CA6-816F-3879F97B5CBC}" type="slidenum">
-              <a:rPr lang="en-US"/>
-              <a:t>39</a:t>
-            </a:fld>
-            <a:endParaRPr lang="en-US"/>
-          </a:p>
-        </p:txBody>
-      </p:sp>
-    </p:spTree>
-    <p:extLst>
-      <p:ext uri="{BB962C8B-B14F-4D97-AF65-F5344CB8AC3E}">
-        <p14:creationId xmlns:p14="http://schemas.microsoft.com/office/powerpoint/2010/main" val="1024086991"/>
-      </p:ext>
-    </p:extLst>
-  </p:cSld>
-  <p:clrMapOvr>
-    <a:masterClrMapping/>
-  </p:clrMapOvr>
-</p:notes>
-</file>
-
-<file path=ppt/notesSlides/notesSlide4.xml><?xml version="1.0" encoding="utf-8"?>
-<p:notes xmlns:a="http://schemas.openxmlformats.org/drawingml/2006/main" xmlns:r="http://schemas.openxmlformats.org/officeDocument/2006/relationships" xmlns:p="http://schemas.openxmlformats.org/presentationml/2006/main">
-  <p:cSld>
-    <p:spTree>
-      <p:nvGrpSpPr>
-        <p:cNvPr id="1" name=""/>
-        <p:cNvGrpSpPr/>
-        <p:nvPr/>
-      </p:nvGrpSpPr>
-      <p:grpSpPr>
-        <a:xfrm>
-          <a:off x="0" y="0"/>
-          <a:ext cx="0" cy="0"/>
-          <a:chOff x="0" y="0"/>
-          <a:chExt cx="0" cy="0"/>
-        </a:xfrm>
-      </p:grpSpPr>
-      <p:sp>
-        <p:nvSpPr>
-          <p:cNvPr id="2" name="Slide Image Placeholder 1"/>
-          <p:cNvSpPr>
-            <a:spLocks noGrp="1" noRot="1" noChangeAspect="1"/>
-          </p:cNvSpPr>
-          <p:nvPr>
-            <p:ph type="sldImg"/>
-          </p:nvPr>
-        </p:nvSpPr>
-        <p:spPr/>
-      </p:sp>
-      <p:sp>
-        <p:nvSpPr>
-          <p:cNvPr id="3" name="Notes Placeholder 2"/>
-          <p:cNvSpPr>
-            <a:spLocks noGrp="1"/>
-          </p:cNvSpPr>
-          <p:nvPr>
-            <p:ph type="body" idx="1"/>
-          </p:nvPr>
-        </p:nvSpPr>
-        <p:spPr/>
-        <p:txBody>
-          <a:bodyPr/>
-          <a:lstStyle/>
-          <a:p>
-            <a:r>
-              <a:rPr lang="en-US" dirty="0"/>
-              <a:t>SCRIPT: Three minutes on Navigator 1.0 (they will meet it everywhere), then go_router, which the Flutter team maintains and which gives URLs, guards and deep links.</a:t>
-            </a:r>
-            <a:endParaRPr lang="en-US" dirty="0"/>
-          </a:p>
-        </p:txBody>
-      </p:sp>
-      <p:sp>
-        <p:nvSpPr>
-          <p:cNvPr id="4" name="Slide Number Placeholder 3"/>
-          <p:cNvSpPr>
-            <a:spLocks noGrp="1"/>
-          </p:cNvSpPr>
-          <p:nvPr>
-            <p:ph type="sldNum" sz="quarter" idx="10"/>
-          </p:nvPr>
-        </p:nvSpPr>
-        <p:spPr/>
-        <p:txBody>
-          <a:bodyPr/>
-          <a:lstStyle/>
-          <a:p>
-            <a:fld id="{F7021451-1387-4CA6-816F-3879F97B5CBC}" type="slidenum">
-              <a:rPr lang="en-US"/>
-              <a:t>4</a:t>
-            </a:fld>
-            <a:endParaRPr lang="en-US"/>
-          </a:p>
-        </p:txBody>
-      </p:sp>
-    </p:spTree>
-    <p:extLst>
-      <p:ext uri="{BB962C8B-B14F-4D97-AF65-F5344CB8AC3E}">
-        <p14:creationId xmlns:p14="http://schemas.microsoft.com/office/powerpoint/2010/main" val="1024086991"/>
-      </p:ext>
-    </p:extLst>
-  </p:cSld>
-  <p:clrMapOvr>
-    <a:masterClrMapping/>
-  </p:clrMapOvr>
-</p:notes>
-</file>
-
-<file path=ppt/notesSlides/notesSlide40.xml><?xml version="1.0" encoding="utf-8"?>
-<p:notes xmlns:a="http://schemas.openxmlformats.org/drawingml/2006/main" xmlns:r="http://schemas.openxmlformats.org/officeDocument/2006/relationships" xmlns:p="http://schemas.openxmlformats.org/presentationml/2006/main">
-  <p:cSld>
-    <p:spTree>
-      <p:nvGrpSpPr>
-        <p:cNvPr id="1" name=""/>
-        <p:cNvGrpSpPr/>
-        <p:nvPr/>
-      </p:nvGrpSpPr>
-      <p:grpSpPr>
-        <a:xfrm>
-          <a:off x="0" y="0"/>
-          <a:ext cx="0" cy="0"/>
-          <a:chOff x="0" y="0"/>
-          <a:chExt cx="0" cy="0"/>
-        </a:xfrm>
-      </p:grpSpPr>
-      <p:sp>
-        <p:nvSpPr>
-          <p:cNvPr id="2" name="Slide Image Placeholder 1"/>
-          <p:cNvSpPr>
-            <a:spLocks noGrp="1" noRot="1" noChangeAspect="1"/>
-          </p:cNvSpPr>
-          <p:nvPr>
-            <p:ph type="sldImg"/>
-          </p:nvPr>
-        </p:nvSpPr>
-        <p:spPr/>
-      </p:sp>
-      <p:sp>
-        <p:nvSpPr>
-          <p:cNvPr id="3" name="Notes Placeholder 2"/>
-          <p:cNvSpPr>
-            <a:spLocks noGrp="1"/>
-          </p:cNvSpPr>
-          <p:nvPr>
-            <p:ph type="body" idx="1"/>
-          </p:nvPr>
-        </p:nvSpPr>
-        <p:spPr/>
-        <p:txBody>
-          <a:bodyPr/>
-          <a:lstStyle/>
-          <a:p>
-            <a:r>
-              <a:rPr lang="en-US" dirty="0"/>
-              <a:t>Solution. Router and app.dart are on the module slides.</a:t>
-            </a:r>
-            <a:endParaRPr lang="en-US" dirty="0"/>
-          </a:p>
-        </p:txBody>
-      </p:sp>
-      <p:sp>
-        <p:nvSpPr>
-          <p:cNvPr id="4" name="Slide Number Placeholder 3"/>
-          <p:cNvSpPr>
-            <a:spLocks noGrp="1"/>
-          </p:cNvSpPr>
-          <p:nvPr>
-            <p:ph type="sldNum" sz="quarter" idx="10"/>
-          </p:nvPr>
-        </p:nvSpPr>
-        <p:spPr/>
-        <p:txBody>
-          <a:bodyPr/>
-          <a:lstStyle/>
-          <a:p>
-            <a:fld id="{F7021451-1387-4CA6-816F-3879F97B5CBC}" type="slidenum">
-              <a:rPr lang="en-US"/>
-              <a:t>40</a:t>
-            </a:fld>
-            <a:endParaRPr lang="en-US"/>
-          </a:p>
-        </p:txBody>
-      </p:sp>
-    </p:spTree>
-    <p:extLst>
-      <p:ext uri="{BB962C8B-B14F-4D97-AF65-F5344CB8AC3E}">
-        <p14:creationId xmlns:p14="http://schemas.microsoft.com/office/powerpoint/2010/main" val="1024086991"/>
-      </p:ext>
-    </p:extLst>
-  </p:cSld>
-  <p:clrMapOvr>
-    <a:masterClrMapping/>
-  </p:clrMapOvr>
-</p:notes>
-</file>
-
-<file path=ppt/notesSlides/notesSlide41.xml><?xml version="1.0" encoding="utf-8"?>
-<p:notes xmlns:a="http://schemas.openxmlformats.org/drawingml/2006/main" xmlns:r="http://schemas.openxmlformats.org/officeDocument/2006/relationships" xmlns:p="http://schemas.openxmlformats.org/presentationml/2006/main">
-  <p:cSld>
-    <p:spTree>
-      <p:nvGrpSpPr>
-        <p:cNvPr id="1" name=""/>
-        <p:cNvGrpSpPr/>
-        <p:nvPr/>
-      </p:nvGrpSpPr>
-      <p:grpSpPr>
-        <a:xfrm>
-          <a:off x="0" y="0"/>
-          <a:ext cx="0" cy="0"/>
-          <a:chOff x="0" y="0"/>
-          <a:chExt cx="0" cy="0"/>
-        </a:xfrm>
-      </p:grpSpPr>
-      <p:sp>
-        <p:nvSpPr>
-          <p:cNvPr id="2" name="Slide Image Placeholder 1"/>
-          <p:cNvSpPr>
-            <a:spLocks noGrp="1" noRot="1" noChangeAspect="1"/>
-          </p:cNvSpPr>
-          <p:nvPr>
-            <p:ph type="sldImg"/>
-          </p:nvPr>
-        </p:nvSpPr>
-        <p:spPr/>
-      </p:sp>
-      <p:sp>
-        <p:nvSpPr>
-          <p:cNvPr id="3" name="Notes Placeholder 2"/>
-          <p:cNvSpPr>
-            <a:spLocks noGrp="1"/>
-          </p:cNvSpPr>
-          <p:nvPr>
-            <p:ph type="body" idx="1"/>
-          </p:nvPr>
-        </p:nvSpPr>
-        <p:spPr/>
-        <p:txBody>
-          <a:bodyPr/>
-          <a:lstStyle/>
-          <a:p>
-            <a:r>
-              <a:rPr lang="en-US" dirty="0"/>
-              <a:t>Solution. Router and app.dart are on the module slides.</a:t>
-            </a:r>
-            <a:endParaRPr lang="en-US" dirty="0"/>
-          </a:p>
-        </p:txBody>
-      </p:sp>
-      <p:sp>
-        <p:nvSpPr>
-          <p:cNvPr id="4" name="Slide Number Placeholder 3"/>
-          <p:cNvSpPr>
-            <a:spLocks noGrp="1"/>
-          </p:cNvSpPr>
-          <p:nvPr>
-            <p:ph type="sldNum" sz="quarter" idx="10"/>
-          </p:nvPr>
-        </p:nvSpPr>
-        <p:spPr/>
-        <p:txBody>
-          <a:bodyPr/>
-          <a:lstStyle/>
-          <a:p>
-            <a:fld id="{F7021451-1387-4CA6-816F-3879F97B5CBC}" type="slidenum">
-              <a:rPr lang="en-US"/>
-              <a:t>41</a:t>
-            </a:fld>
-            <a:endParaRPr lang="en-US"/>
-          </a:p>
-        </p:txBody>
-      </p:sp>
-    </p:spTree>
-    <p:extLst>
-      <p:ext uri="{BB962C8B-B14F-4D97-AF65-F5344CB8AC3E}">
-        <p14:creationId xmlns:p14="http://schemas.microsoft.com/office/powerpoint/2010/main" val="1024086991"/>
-      </p:ext>
-    </p:extLst>
-  </p:cSld>
-  <p:clrMapOvr>
-    <a:masterClrMapping/>
-  </p:clrMapOvr>
-</p:notes>
-</file>
-
-<file path=ppt/notesSlides/notesSlide42.xml><?xml version="1.0" encoding="utf-8"?>
-<p:notes xmlns:a="http://schemas.openxmlformats.org/drawingml/2006/main" xmlns:r="http://schemas.openxmlformats.org/officeDocument/2006/relationships" xmlns:p="http://schemas.openxmlformats.org/presentationml/2006/main">
-  <p:cSld>
-    <p:spTree>
-      <p:nvGrpSpPr>
-        <p:cNvPr id="1" name=""/>
-        <p:cNvGrpSpPr/>
-        <p:nvPr/>
-      </p:nvGrpSpPr>
-      <p:grpSpPr>
-        <a:xfrm>
-          <a:off x="0" y="0"/>
-          <a:ext cx="0" cy="0"/>
-          <a:chOff x="0" y="0"/>
-          <a:chExt cx="0" cy="0"/>
-        </a:xfrm>
-      </p:grpSpPr>
-      <p:sp>
-        <p:nvSpPr>
-          <p:cNvPr id="2" name="Slide Image Placeholder 1"/>
-          <p:cNvSpPr>
-            <a:spLocks noGrp="1" noRot="1" noChangeAspect="1"/>
-          </p:cNvSpPr>
-          <p:nvPr>
-            <p:ph type="sldImg"/>
-          </p:nvPr>
-        </p:nvSpPr>
-        <p:spPr/>
-      </p:sp>
-      <p:sp>
-        <p:nvSpPr>
-          <p:cNvPr id="3" name="Notes Placeholder 2"/>
-          <p:cNvSpPr>
-            <a:spLocks noGrp="1"/>
-          </p:cNvSpPr>
-          <p:nvPr>
-            <p:ph type="body" idx="1"/>
-          </p:nvPr>
-        </p:nvSpPr>
-        <p:spPr/>
-        <p:txBody>
-          <a:bodyPr/>
-          <a:lstStyle/>
-          <a:p>
-            <a:r>
-              <a:rPr lang="en-US" dirty="0"/>
-              <a:t>Solution. Router and app.dart are on the module slides.</a:t>
-            </a:r>
-            <a:endParaRPr lang="en-US" dirty="0"/>
-          </a:p>
-        </p:txBody>
-      </p:sp>
-      <p:sp>
-        <p:nvSpPr>
-          <p:cNvPr id="4" name="Slide Number Placeholder 3"/>
-          <p:cNvSpPr>
-            <a:spLocks noGrp="1"/>
-          </p:cNvSpPr>
-          <p:nvPr>
-            <p:ph type="sldNum" sz="quarter" idx="10"/>
-          </p:nvPr>
-        </p:nvSpPr>
-        <p:spPr/>
-        <p:txBody>
-          <a:bodyPr/>
-          <a:lstStyle/>
-          <a:p>
-            <a:fld id="{F7021451-1387-4CA6-816F-3879F97B5CBC}" type="slidenum">
-              <a:rPr lang="en-US"/>
-              <a:t>42</a:t>
-            </a:fld>
-            <a:endParaRPr lang="en-US"/>
-          </a:p>
-        </p:txBody>
-      </p:sp>
-    </p:spTree>
-    <p:extLst>
-      <p:ext uri="{BB962C8B-B14F-4D97-AF65-F5344CB8AC3E}">
-        <p14:creationId xmlns:p14="http://schemas.microsoft.com/office/powerpoint/2010/main" val="1024086991"/>
-      </p:ext>
-    </p:extLst>
-  </p:cSld>
-  <p:clrMapOvr>
-    <a:masterClrMapping/>
-  </p:clrMapOvr>
-</p:notes>
-</file>
-
-<file path=ppt/notesSlides/notesSlide43.xml><?xml version="1.0" encoding="utf-8"?>
-<p:notes xmlns:a="http://schemas.openxmlformats.org/drawingml/2006/main" xmlns:r="http://schemas.openxmlformats.org/officeDocument/2006/relationships" xmlns:p="http://schemas.openxmlformats.org/presentationml/2006/main">
-  <p:cSld>
-    <p:spTree>
-      <p:nvGrpSpPr>
-        <p:cNvPr id="1" name=""/>
-        <p:cNvGrpSpPr/>
-        <p:nvPr/>
-      </p:nvGrpSpPr>
-      <p:grpSpPr>
-        <a:xfrm>
-          <a:off x="0" y="0"/>
-          <a:ext cx="0" cy="0"/>
-          <a:chOff x="0" y="0"/>
-          <a:chExt cx="0" cy="0"/>
-        </a:xfrm>
-      </p:grpSpPr>
-      <p:sp>
-        <p:nvSpPr>
-          <p:cNvPr id="2" name="Slide Image Placeholder 1"/>
-          <p:cNvSpPr>
-            <a:spLocks noGrp="1" noRot="1" noChangeAspect="1"/>
-          </p:cNvSpPr>
-          <p:nvPr>
-            <p:ph type="sldImg"/>
-          </p:nvPr>
-        </p:nvSpPr>
-        <p:spPr/>
-      </p:sp>
-      <p:sp>
-        <p:nvSpPr>
-          <p:cNvPr id="3" name="Notes Placeholder 2"/>
-          <p:cNvSpPr>
-            <a:spLocks noGrp="1"/>
-          </p:cNvSpPr>
-          <p:nvPr>
-            <p:ph type="body" idx="1"/>
-          </p:nvPr>
-        </p:nvSpPr>
-        <p:spPr/>
-        <p:txBody>
-          <a:bodyPr/>
-          <a:lstStyle/>
-          <a:p>
-            <a:r>
-              <a:rPr lang="en-US" dirty="0"/>
-              <a:t>Optional. If the venue network is unreliable, stay on the local mock.</a:t>
-            </a:r>
-            <a:endParaRPr lang="en-US" dirty="0"/>
-          </a:p>
-        </p:txBody>
-      </p:sp>
-      <p:sp>
-        <p:nvSpPr>
-          <p:cNvPr id="4" name="Slide Number Placeholder 3"/>
-          <p:cNvSpPr>
-            <a:spLocks noGrp="1"/>
-          </p:cNvSpPr>
-          <p:nvPr>
-            <p:ph type="sldNum" sz="quarter" idx="10"/>
-          </p:nvPr>
-        </p:nvSpPr>
-        <p:spPr/>
-        <p:txBody>
-          <a:bodyPr/>
-          <a:lstStyle/>
-          <a:p>
-            <a:fld id="{F7021451-1387-4CA6-816F-3879F97B5CBC}" type="slidenum">
-              <a:rPr lang="en-US"/>
-              <a:t>43</a:t>
-            </a:fld>
-            <a:endParaRPr lang="en-US"/>
-          </a:p>
-        </p:txBody>
-      </p:sp>
-    </p:spTree>
-    <p:extLst>
-      <p:ext uri="{BB962C8B-B14F-4D97-AF65-F5344CB8AC3E}">
-        <p14:creationId xmlns:p14="http://schemas.microsoft.com/office/powerpoint/2010/main" val="1024086991"/>
-      </p:ext>
-    </p:extLst>
-  </p:cSld>
-  <p:clrMapOvr>
-    <a:masterClrMapping/>
-  </p:clrMapOvr>
-</p:notes>
-</file>
-
-<file path=ppt/notesSlides/notesSlide44.xml><?xml version="1.0" encoding="utf-8"?>
-<p:notes xmlns:a="http://schemas.openxmlformats.org/drawingml/2006/main" xmlns:r="http://schemas.openxmlformats.org/officeDocument/2006/relationships" xmlns:p="http://schemas.openxmlformats.org/presentationml/2006/main">
-  <p:cSld>
-    <p:spTree>
-      <p:nvGrpSpPr>
-        <p:cNvPr id="1" name=""/>
-        <p:cNvGrpSpPr/>
-        <p:nvPr/>
-      </p:nvGrpSpPr>
-      <p:grpSpPr>
-        <a:xfrm>
-          <a:off x="0" y="0"/>
-          <a:ext cx="0" cy="0"/>
-          <a:chOff x="0" y="0"/>
-          <a:chExt cx="0" cy="0"/>
-        </a:xfrm>
-      </p:grpSpPr>
-      <p:sp>
-        <p:nvSpPr>
-          <p:cNvPr id="2" name="Slide Image Placeholder 1"/>
-          <p:cNvSpPr>
-            <a:spLocks noGrp="1" noRot="1" noChangeAspect="1"/>
-          </p:cNvSpPr>
-          <p:nvPr>
-            <p:ph type="sldImg"/>
-          </p:nvPr>
-        </p:nvSpPr>
-        <p:spPr/>
-      </p:sp>
-      <p:sp>
-        <p:nvSpPr>
-          <p:cNvPr id="3" name="Notes Placeholder 2"/>
-          <p:cNvSpPr>
-            <a:spLocks noGrp="1"/>
-          </p:cNvSpPr>
-          <p:nvPr>
-            <p:ph type="body" idx="1"/>
-          </p:nvPr>
-        </p:nvSpPr>
-        <p:spPr/>
-        <p:txBody>
-          <a:bodyPr/>
-          <a:lstStyle/>
-          <a:p>
-            <a:r>
-              <a:rPr lang="en-US" dirty="0"/>
-              <a:t>Put on screen for "Undefined name" errors.</a:t>
-            </a:r>
-            <a:endParaRPr lang="en-US" dirty="0"/>
-          </a:p>
-        </p:txBody>
-      </p:sp>
-      <p:sp>
-        <p:nvSpPr>
-          <p:cNvPr id="4" name="Slide Number Placeholder 3"/>
-          <p:cNvSpPr>
-            <a:spLocks noGrp="1"/>
-          </p:cNvSpPr>
-          <p:nvPr>
-            <p:ph type="sldNum" sz="quarter" idx="10"/>
-          </p:nvPr>
-        </p:nvSpPr>
-        <p:spPr/>
-        <p:txBody>
-          <a:bodyPr/>
-          <a:lstStyle/>
-          <a:p>
-            <a:fld id="{F7021451-1387-4CA6-816F-3879F97B5CBC}" type="slidenum">
-              <a:rPr lang="en-US"/>
-              <a:t>44</a:t>
-            </a:fld>
-            <a:endParaRPr lang="en-US"/>
-          </a:p>
-        </p:txBody>
-      </p:sp>
-    </p:spTree>
-    <p:extLst>
-      <p:ext uri="{BB962C8B-B14F-4D97-AF65-F5344CB8AC3E}">
-        <p14:creationId xmlns:p14="http://schemas.microsoft.com/office/powerpoint/2010/main" val="1024086991"/>
-      </p:ext>
-    </p:extLst>
-  </p:cSld>
-  <p:clrMapOvr>
-    <a:masterClrMapping/>
-  </p:clrMapOvr>
-</p:notes>
-</file>
-
-<file path=ppt/notesSlides/notesSlide45.xml><?xml version="1.0" encoding="utf-8"?>
-<p:notes xmlns:a="http://schemas.openxmlformats.org/drawingml/2006/main" xmlns:r="http://schemas.openxmlformats.org/officeDocument/2006/relationships" xmlns:p="http://schemas.openxmlformats.org/presentationml/2006/main">
-  <p:cSld>
-    <p:spTree>
-      <p:nvGrpSpPr>
-        <p:cNvPr id="1" name=""/>
-        <p:cNvGrpSpPr/>
-        <p:nvPr/>
-      </p:nvGrpSpPr>
-      <p:grpSpPr>
-        <a:xfrm>
-          <a:off x="0" y="0"/>
-          <a:ext cx="0" cy="0"/>
-          <a:chOff x="0" y="0"/>
-          <a:chExt cx="0" cy="0"/>
-        </a:xfrm>
-      </p:grpSpPr>
-      <p:sp>
-        <p:nvSpPr>
-          <p:cNvPr id="2" name="Slide Image Placeholder 1"/>
-          <p:cNvSpPr>
-            <a:spLocks noGrp="1" noRot="1" noChangeAspect="1"/>
-          </p:cNvSpPr>
-          <p:nvPr>
-            <p:ph type="sldImg"/>
-          </p:nvPr>
-        </p:nvSpPr>
-        <p:spPr/>
-      </p:sp>
-      <p:sp>
-        <p:nvSpPr>
-          <p:cNvPr id="3" name="Notes Placeholder 2"/>
-          <p:cNvSpPr>
-            <a:spLocks noGrp="1"/>
-          </p:cNvSpPr>
-          <p:nvPr>
-            <p:ph type="body" idx="1"/>
-          </p:nvPr>
-        </p:nvSpPr>
-        <p:spPr/>
-        <p:txBody>
-          <a:bodyPr/>
-          <a:lstStyle/>
-          <a:p>
-            <a:r>
-              <a:rPr lang="en-US" dirty="0"/>
-              <a:t>Solution.</a:t>
-            </a:r>
-            <a:endParaRPr lang="en-US" dirty="0"/>
-          </a:p>
-        </p:txBody>
-      </p:sp>
-      <p:sp>
-        <p:nvSpPr>
-          <p:cNvPr id="4" name="Slide Number Placeholder 3"/>
-          <p:cNvSpPr>
-            <a:spLocks noGrp="1"/>
-          </p:cNvSpPr>
-          <p:nvPr>
-            <p:ph type="sldNum" sz="quarter" idx="10"/>
-          </p:nvPr>
-        </p:nvSpPr>
-        <p:spPr/>
-        <p:txBody>
-          <a:bodyPr/>
-          <a:lstStyle/>
-          <a:p>
-            <a:fld id="{F7021451-1387-4CA6-816F-3879F97B5CBC}" type="slidenum">
-              <a:rPr lang="en-US"/>
-              <a:t>45</a:t>
-            </a:fld>
-            <a:endParaRPr lang="en-US"/>
-          </a:p>
-        </p:txBody>
-      </p:sp>
-    </p:spTree>
-    <p:extLst>
-      <p:ext uri="{BB962C8B-B14F-4D97-AF65-F5344CB8AC3E}">
-        <p14:creationId xmlns:p14="http://schemas.microsoft.com/office/powerpoint/2010/main" val="1024086991"/>
-      </p:ext>
-    </p:extLst>
-  </p:cSld>
-  <p:clrMapOvr>
-    <a:masterClrMapping/>
-  </p:clrMapOvr>
-</p:notes>
-</file>
-
-<file path=ppt/notesSlides/notesSlide46.xml><?xml version="1.0" encoding="utf-8"?>
-<p:notes xmlns:a="http://schemas.openxmlformats.org/drawingml/2006/main" xmlns:r="http://schemas.openxmlformats.org/officeDocument/2006/relationships" xmlns:p="http://schemas.openxmlformats.org/presentationml/2006/main">
-  <p:cSld>
-    <p:spTree>
-      <p:nvGrpSpPr>
-        <p:cNvPr id="1" name=""/>
-        <p:cNvGrpSpPr/>
-        <p:nvPr/>
-      </p:nvGrpSpPr>
-      <p:grpSpPr>
-        <a:xfrm>
-          <a:off x="0" y="0"/>
-          <a:ext cx="0" cy="0"/>
-          <a:chOff x="0" y="0"/>
-          <a:chExt cx="0" cy="0"/>
-        </a:xfrm>
-      </p:grpSpPr>
-      <p:sp>
-        <p:nvSpPr>
-          <p:cNvPr id="2" name="Slide Image Placeholder 1"/>
-          <p:cNvSpPr>
-            <a:spLocks noGrp="1" noRot="1" noChangeAspect="1"/>
-          </p:cNvSpPr>
-          <p:nvPr>
-            <p:ph type="sldImg"/>
-          </p:nvPr>
-        </p:nvSpPr>
-        <p:spPr/>
-      </p:sp>
-      <p:sp>
-        <p:nvSpPr>
-          <p:cNvPr id="3" name="Notes Placeholder 2"/>
-          <p:cNvSpPr>
-            <a:spLocks noGrp="1"/>
-          </p:cNvSpPr>
-          <p:nvPr>
-            <p:ph type="body" idx="1"/>
-          </p:nvPr>
-        </p:nvSpPr>
-        <p:spPr/>
-        <p:txBody>
-          <a:bodyPr/>
-          <a:lstStyle/>
-          <a:p>
-            <a:r>
-              <a:rPr lang="en-US" dirty="0"/>
-              <a:t>For anyone running in Chrome (no sqflite) and for Friday's unit tests.</a:t>
-            </a:r>
-            <a:endParaRPr lang="en-US" dirty="0"/>
-          </a:p>
-        </p:txBody>
-      </p:sp>
-      <p:sp>
-        <p:nvSpPr>
-          <p:cNvPr id="4" name="Slide Number Placeholder 3"/>
-          <p:cNvSpPr>
-            <a:spLocks noGrp="1"/>
-          </p:cNvSpPr>
-          <p:nvPr>
-            <p:ph type="sldNum" sz="quarter" idx="10"/>
-          </p:nvPr>
-        </p:nvSpPr>
-        <p:spPr/>
-        <p:txBody>
-          <a:bodyPr/>
-          <a:lstStyle/>
-          <a:p>
-            <a:fld id="{F7021451-1387-4CA6-816F-3879F97B5CBC}" type="slidenum">
-              <a:rPr lang="en-US"/>
-              <a:t>46</a:t>
-            </a:fld>
-            <a:endParaRPr lang="en-US"/>
-          </a:p>
-        </p:txBody>
-      </p:sp>
-    </p:spTree>
-    <p:extLst>
-      <p:ext uri="{BB962C8B-B14F-4D97-AF65-F5344CB8AC3E}">
-        <p14:creationId xmlns:p14="http://schemas.microsoft.com/office/powerpoint/2010/main" val="1024086991"/>
-      </p:ext>
-    </p:extLst>
-  </p:cSld>
-  <p:clrMapOvr>
-    <a:masterClrMapping/>
-  </p:clrMapOvr>
-</p:notes>
-</file>
-
-<file path=ppt/notesSlides/notesSlide47.xml><?xml version="1.0" encoding="utf-8"?>
-<p:notes xmlns:a="http://schemas.openxmlformats.org/drawingml/2006/main" xmlns:r="http://schemas.openxmlformats.org/officeDocument/2006/relationships" xmlns:p="http://schemas.openxmlformats.org/presentationml/2006/main">
-  <p:cSld>
-    <p:spTree>
-      <p:nvGrpSpPr>
-        <p:cNvPr id="1" name=""/>
-        <p:cNvGrpSpPr/>
-        <p:nvPr/>
-      </p:nvGrpSpPr>
-      <p:grpSpPr>
-        <a:xfrm>
-          <a:off x="0" y="0"/>
-          <a:ext cx="0" cy="0"/>
-          <a:chOff x="0" y="0"/>
-          <a:chExt cx="0" cy="0"/>
-        </a:xfrm>
-      </p:grpSpPr>
-      <p:sp>
-        <p:nvSpPr>
-          <p:cNvPr id="2" name="Slide Image Placeholder 1"/>
-          <p:cNvSpPr>
-            <a:spLocks noGrp="1" noRot="1" noChangeAspect="1"/>
-          </p:cNvSpPr>
-          <p:nvPr>
-            <p:ph type="sldImg"/>
-          </p:nvPr>
-        </p:nvSpPr>
-        <p:spPr/>
-      </p:sp>
-      <p:sp>
-        <p:nvSpPr>
-          <p:cNvPr id="3" name="Notes Placeholder 2"/>
-          <p:cNvSpPr>
-            <a:spLocks noGrp="1"/>
-          </p:cNvSpPr>
-          <p:nvPr>
-            <p:ph type="body" idx="1"/>
-          </p:nvPr>
-        </p:nvSpPr>
-        <p:spPr/>
-        <p:txBody>
-          <a:bodyPr/>
-          <a:lstStyle/>
-          <a:p>
-            <a:r>
-              <a:rPr lang="en-US" dirty="0"/>
-              <a:t>Second display during labs.</a:t>
-            </a:r>
-            <a:endParaRPr lang="en-US" dirty="0"/>
-          </a:p>
-        </p:txBody>
-      </p:sp>
-      <p:sp>
-        <p:nvSpPr>
-          <p:cNvPr id="4" name="Slide Number Placeholder 3"/>
-          <p:cNvSpPr>
-            <a:spLocks noGrp="1"/>
-          </p:cNvSpPr>
-          <p:nvPr>
-            <p:ph type="sldNum" sz="quarter" idx="10"/>
-          </p:nvPr>
-        </p:nvSpPr>
-        <p:spPr/>
-        <p:txBody>
-          <a:bodyPr/>
-          <a:lstStyle/>
-          <a:p>
-            <a:fld id="{F7021451-1387-4CA6-816F-3879F97B5CBC}" type="slidenum">
-              <a:rPr lang="en-US"/>
-              <a:t>47</a:t>
-            </a:fld>
-            <a:endParaRPr lang="en-US"/>
-          </a:p>
-        </p:txBody>
-      </p:sp>
-    </p:spTree>
-    <p:extLst>
-      <p:ext uri="{BB962C8B-B14F-4D97-AF65-F5344CB8AC3E}">
-        <p14:creationId xmlns:p14="http://schemas.microsoft.com/office/powerpoint/2010/main" val="1024086991"/>
-      </p:ext>
-    </p:extLst>
-  </p:cSld>
-  <p:clrMapOvr>
-    <a:masterClrMapping/>
-  </p:clrMapOvr>
-</p:notes>
-</file>
-
-<file path=ppt/notesSlides/notesSlide48.xml><?xml version="1.0" encoding="utf-8"?>
-<p:notes xmlns:a="http://schemas.openxmlformats.org/drawingml/2006/main" xmlns:r="http://schemas.openxmlformats.org/officeDocument/2006/relationships" xmlns:p="http://schemas.openxmlformats.org/presentationml/2006/main">
-  <p:cSld>
-    <p:spTree>
-      <p:nvGrpSpPr>
-        <p:cNvPr id="1" name=""/>
-        <p:cNvGrpSpPr/>
-        <p:nvPr/>
-      </p:nvGrpSpPr>
-      <p:grpSpPr>
-        <a:xfrm>
-          <a:off x="0" y="0"/>
-          <a:ext cx="0" cy="0"/>
-          <a:chOff x="0" y="0"/>
-          <a:chExt cx="0" cy="0"/>
-        </a:xfrm>
-      </p:grpSpPr>
-      <p:sp>
-        <p:nvSpPr>
-          <p:cNvPr id="2" name="Slide Image Placeholder 1"/>
-          <p:cNvSpPr>
-            <a:spLocks noGrp="1" noRot="1" noChangeAspect="1"/>
-          </p:cNvSpPr>
-          <p:nvPr>
-            <p:ph type="sldImg"/>
-          </p:nvPr>
-        </p:nvSpPr>
-        <p:spPr/>
-      </p:sp>
-      <p:sp>
-        <p:nvSpPr>
-          <p:cNvPr id="3" name="Notes Placeholder 2"/>
-          <p:cNvSpPr>
-            <a:spLocks noGrp="1"/>
-          </p:cNvSpPr>
-          <p:nvPr>
-            <p:ph type="body" idx="1"/>
-          </p:nvPr>
-        </p:nvSpPr>
-        <p:spPr/>
-        <p:txBody>
-          <a:bodyPr/>
-          <a:lstStyle/>
-          <a:p>
-            <a:r>
-              <a:rPr lang="en-US" dirty="0"/>
-              <a:t>Replace the repo placeholder.</a:t>
-            </a:r>
-            <a:endParaRPr lang="en-US" dirty="0"/>
-          </a:p>
-        </p:txBody>
-      </p:sp>
-      <p:sp>
-        <p:nvSpPr>
-          <p:cNvPr id="4" name="Slide Number Placeholder 3"/>
-          <p:cNvSpPr>
-            <a:spLocks noGrp="1"/>
-          </p:cNvSpPr>
-          <p:nvPr>
-            <p:ph type="sldNum" sz="quarter" idx="10"/>
-          </p:nvPr>
-        </p:nvSpPr>
-        <p:spPr/>
-        <p:txBody>
-          <a:bodyPr/>
-          <a:lstStyle/>
-          <a:p>
-            <a:fld id="{F7021451-1387-4CA6-816F-3879F97B5CBC}" type="slidenum">
-              <a:rPr lang="en-US"/>
-              <a:t>48</a:t>
-            </a:fld>
-            <a:endParaRPr lang="en-US"/>
-          </a:p>
-        </p:txBody>
-      </p:sp>
-    </p:spTree>
-    <p:extLst>
-      <p:ext uri="{BB962C8B-B14F-4D97-AF65-F5344CB8AC3E}">
-        <p14:creationId xmlns:p14="http://schemas.microsoft.com/office/powerpoint/2010/main" val="1024086991"/>
-      </p:ext>
-    </p:extLst>
-  </p:cSld>
-  <p:clrMapOvr>
-    <a:masterClrMapping/>
-  </p:clrMapOvr>
-</p:notes>
-</file>
-
-<file path=ppt/notesSlides/notesSlide5.xml><?xml version="1.0" encoding="utf-8"?>
-<p:notes xmlns:a="http://schemas.openxmlformats.org/drawingml/2006/main" xmlns:r="http://schemas.openxmlformats.org/officeDocument/2006/relationships" xmlns:p="http://schemas.openxmlformats.org/presentationml/2006/main">
-  <p:cSld>
-    <p:spTree>
-      <p:nvGrpSpPr>
-        <p:cNvPr id="1" name=""/>
-        <p:cNvGrpSpPr/>
-        <p:nvPr/>
-      </p:nvGrpSpPr>
-      <p:grpSpPr>
-        <a:xfrm>
-          <a:off x="0" y="0"/>
-          <a:ext cx="0" cy="0"/>
-          <a:chOff x="0" y="0"/>
-          <a:chExt cx="0" cy="0"/>
-        </a:xfrm>
-      </p:grpSpPr>
-      <p:sp>
-        <p:nvSpPr>
-          <p:cNvPr id="2" name="Slide Image Placeholder 1"/>
-          <p:cNvSpPr>
-            <a:spLocks noGrp="1" noRot="1" noChangeAspect="1"/>
-          </p:cNvSpPr>
-          <p:nvPr>
-            <p:ph type="sldImg"/>
-          </p:nvPr>
-        </p:nvSpPr>
-        <p:spPr/>
-      </p:sp>
-      <p:sp>
-        <p:nvSpPr>
-          <p:cNvPr id="3" name="Notes Placeholder 2"/>
-          <p:cNvSpPr>
-            <a:spLocks noGrp="1"/>
-          </p:cNvSpPr>
-          <p:nvPr>
-            <p:ph type="body" idx="1"/>
-          </p:nvPr>
-        </p:nvSpPr>
-        <p:spPr/>
-        <p:txBody>
-          <a:bodyPr/>
-          <a:lstStyle/>
-          <a:p>
-            <a:r>
-              <a:rPr lang="en-US" dirty="0"/>
-              <a:t>SCRIPT: Show push/pop once so they recognise it. Do not spend long. The four "falls short" points are the answer to "why not just Navigator?".
-Under the hood go_router IS Navigator 2.0 (Router API) with the boilerplate hidden - say that once for the architecture-minded.</a:t>
-            </a:r>
-            <a:endParaRPr lang="en-US" dirty="0"/>
-          </a:p>
-        </p:txBody>
-      </p:sp>
-      <p:sp>
-        <p:nvSpPr>
-          <p:cNvPr id="4" name="Slide Number Placeholder 3"/>
-          <p:cNvSpPr>
-            <a:spLocks noGrp="1"/>
-          </p:cNvSpPr>
-          <p:nvPr>
-            <p:ph type="sldNum" sz="quarter" idx="10"/>
-          </p:nvPr>
-        </p:nvSpPr>
-        <p:spPr/>
-        <p:txBody>
-          <a:bodyPr/>
-          <a:lstStyle/>
-          <a:p>
-            <a:fld id="{F7021451-1387-4CA6-816F-3879F97B5CBC}" type="slidenum">
-              <a:rPr lang="en-US"/>
-              <a:t>5</a:t>
-            </a:fld>
-            <a:endParaRPr lang="en-US"/>
-          </a:p>
-        </p:txBody>
-      </p:sp>
-    </p:spTree>
-    <p:extLst>
-      <p:ext uri="{BB962C8B-B14F-4D97-AF65-F5344CB8AC3E}">
-        <p14:creationId xmlns:p14="http://schemas.microsoft.com/office/powerpoint/2010/main" val="1024086991"/>
-      </p:ext>
-    </p:extLst>
-  </p:cSld>
-  <p:clrMapOvr>
-    <a:masterClrMapping/>
-  </p:clrMapOvr>
-</p:notes>
-</file>
-
-<file path=ppt/notesSlides/notesSlide6.xml><?xml version="1.0" encoding="utf-8"?>
-<p:notes xmlns:a="http://schemas.openxmlformats.org/drawingml/2006/main" xmlns:r="http://schemas.openxmlformats.org/officeDocument/2006/relationships" xmlns:p="http://schemas.openxmlformats.org/presentationml/2006/main">
-  <p:cSld>
-    <p:spTree>
-      <p:nvGrpSpPr>
-        <p:cNvPr id="1" name=""/>
-        <p:cNvGrpSpPr/>
-        <p:nvPr/>
-      </p:nvGrpSpPr>
-      <p:grpSpPr>
-        <a:xfrm>
-          <a:off x="0" y="0"/>
-          <a:ext cx="0" cy="0"/>
-          <a:chOff x="0" y="0"/>
-          <a:chExt cx="0" cy="0"/>
-        </a:xfrm>
-      </p:grpSpPr>
-      <p:sp>
-        <p:nvSpPr>
-          <p:cNvPr id="2" name="Slide Image Placeholder 1"/>
-          <p:cNvSpPr>
-            <a:spLocks noGrp="1" noRot="1" noChangeAspect="1"/>
-          </p:cNvSpPr>
-          <p:nvPr>
-            <p:ph type="sldImg"/>
-          </p:nvPr>
-        </p:nvSpPr>
-        <p:spPr/>
-      </p:sp>
-      <p:sp>
-        <p:nvSpPr>
-          <p:cNvPr id="3" name="Notes Placeholder 2"/>
-          <p:cNvSpPr>
-            <a:spLocks noGrp="1"/>
-          </p:cNvSpPr>
-          <p:nvPr>
-            <p:ph type="body" idx="1"/>
-          </p:nvPr>
-        </p:nvSpPr>
-        <p:spPr/>
-        <p:txBody>
-          <a:bodyPr/>
-          <a:lstStyle/>
-          <a:p>
-            <a:r>
-              <a:rPr lang="en-US" dirty="0"/>
-              <a:t>SCRIPT: Walk it top to bottom. initialLocation; debugLogDiagnostics prints every navigation in the console - leave it on all day. redirect: two rules, else null. routes: onboarding, quote, and result nested under quote so Back from a deep-linked result lands on capture.
-WHY A PROVIDER: the router watches onboardedProvider; when the flag flips, Riverpod rebuilds the router value and MaterialApp.router picks it up. Simple and enough for the course. Alternative for bigger apps: refreshListenable with a ChangeNotifier bridging Riverpod → GoRouter, so the router object is not recreated.
-onboardedProvider comes from shared_preferences this afternoon; for Lab 4.1 use a plain Notifier&lt;bool&gt; defaulting to false.
-GO_ROUTER VERSION: pin the major you tested (^14 or later). The API on this slide is stable across 12+; StatefulShellRoute arrived in 7.</a:t>
-            </a:r>
-            <a:endParaRPr lang="en-US" dirty="0"/>
-          </a:p>
-        </p:txBody>
-      </p:sp>
-      <p:sp>
-        <p:nvSpPr>
-          <p:cNvPr id="4" name="Slide Number Placeholder 3"/>
-          <p:cNvSpPr>
-            <a:spLocks noGrp="1"/>
-          </p:cNvSpPr>
-          <p:nvPr>
-            <p:ph type="sldNum" sz="quarter" idx="10"/>
-          </p:nvPr>
-        </p:nvSpPr>
-        <p:spPr/>
-        <p:txBody>
-          <a:bodyPr/>
-          <a:lstStyle/>
-          <a:p>
-            <a:fld id="{F7021451-1387-4CA6-816F-3879F97B5CBC}" type="slidenum">
-              <a:rPr lang="en-US"/>
-              <a:t>6</a:t>
-            </a:fld>
-            <a:endParaRPr lang="en-US"/>
-          </a:p>
-        </p:txBody>
-      </p:sp>
-    </p:spTree>
-    <p:extLst>
-      <p:ext uri="{BB962C8B-B14F-4D97-AF65-F5344CB8AC3E}">
-        <p14:creationId xmlns:p14="http://schemas.microsoft.com/office/powerpoint/2010/main" val="1024086991"/>
-      </p:ext>
-    </p:extLst>
-  </p:cSld>
-  <p:clrMapOvr>
-    <a:masterClrMapping/>
-  </p:clrMapOvr>
-</p:notes>
-</file>
-
-<file path=ppt/notesSlides/notesSlide7.xml><?xml version="1.0" encoding="utf-8"?>
-<p:notes xmlns:a="http://schemas.openxmlformats.org/drawingml/2006/main" xmlns:r="http://schemas.openxmlformats.org/officeDocument/2006/relationships" xmlns:p="http://schemas.openxmlformats.org/presentationml/2006/main">
-  <p:cSld>
-    <p:spTree>
-      <p:nvGrpSpPr>
-        <p:cNvPr id="1" name=""/>
-        <p:cNvGrpSpPr/>
-        <p:nvPr/>
-      </p:nvGrpSpPr>
-      <p:grpSpPr>
-        <a:xfrm>
-          <a:off x="0" y="0"/>
-          <a:ext cx="0" cy="0"/>
-          <a:chOff x="0" y="0"/>
-          <a:chExt cx="0" cy="0"/>
-        </a:xfrm>
-      </p:grpSpPr>
-      <p:sp>
-        <p:nvSpPr>
-          <p:cNvPr id="2" name="Slide Image Placeholder 1"/>
-          <p:cNvSpPr>
-            <a:spLocks noGrp="1" noRot="1" noChangeAspect="1"/>
-          </p:cNvSpPr>
-          <p:nvPr>
-            <p:ph type="sldImg"/>
-          </p:nvPr>
-        </p:nvSpPr>
-        <p:spPr/>
-      </p:sp>
-      <p:sp>
-        <p:nvSpPr>
-          <p:cNvPr id="3" name="Notes Placeholder 2"/>
-          <p:cNvSpPr>
-            <a:spLocks noGrp="1"/>
-          </p:cNvSpPr>
-          <p:nvPr>
-            <p:ph type="body" idx="1"/>
-          </p:nvPr>
-        </p:nvSpPr>
-        <p:spPr/>
-        <p:txBody>
-          <a:bodyPr/>
-          <a:lstStyle/>
-          <a:p>
-            <a:r>
-              <a:rPr lang="en-US" dirty="0"/>
-              <a:t>SCRIPT: Walk it top to bottom. initialLocation; debugLogDiagnostics prints every navigation in the console - leave it on all day. redirect: two rules, else null. routes: onboarding, quote, and result nested under quote so Back from a deep-linked result lands on capture.
-WHY A PROVIDER: the router watches onboardedProvider; when the flag flips, Riverpod rebuilds the router value and MaterialApp.router picks it up. Simple and enough for the course. Alternative for bigger apps: refreshListenable with a ChangeNotifier bridging Riverpod → GoRouter, so the router object is not recreated.
-onboardedProvider comes from shared_preferences this afternoon; for Lab 4.1 use a plain Notifier&lt;bool&gt; defaulting to false.
-GO_ROUTER VERSION: pin the major you tested (^14 or later). The API on this slide is stable across 12+; StatefulShellRoute arrived in 7.</a:t>
-            </a:r>
-            <a:endParaRPr lang="en-US" dirty="0"/>
-          </a:p>
-        </p:txBody>
-      </p:sp>
-      <p:sp>
-        <p:nvSpPr>
-          <p:cNvPr id="4" name="Slide Number Placeholder 3"/>
-          <p:cNvSpPr>
-            <a:spLocks noGrp="1"/>
-          </p:cNvSpPr>
-          <p:nvPr>
-            <p:ph type="sldNum" sz="quarter" idx="10"/>
-          </p:nvPr>
-        </p:nvSpPr>
-        <p:spPr/>
-        <p:txBody>
-          <a:bodyPr/>
-          <a:lstStyle/>
-          <a:p>
-            <a:fld id="{F7021451-1387-4CA6-816F-3879F97B5CBC}" type="slidenum">
-              <a:rPr lang="en-US"/>
-              <a:t>7</a:t>
-            </a:fld>
-            <a:endParaRPr lang="en-US"/>
-          </a:p>
-        </p:txBody>
-      </p:sp>
-    </p:spTree>
-    <p:extLst>
-      <p:ext uri="{BB962C8B-B14F-4D97-AF65-F5344CB8AC3E}">
-        <p14:creationId xmlns:p14="http://schemas.microsoft.com/office/powerpoint/2010/main" val="1024086991"/>
-      </p:ext>
-    </p:extLst>
-  </p:cSld>
-  <p:clrMapOvr>
-    <a:masterClrMapping/>
-  </p:clrMapOvr>
-</p:notes>
-</file>
-
-<file path=ppt/notesSlides/notesSlide8.xml><?xml version="1.0" encoding="utf-8"?>
-<p:notes xmlns:a="http://schemas.openxmlformats.org/drawingml/2006/main" xmlns:r="http://schemas.openxmlformats.org/officeDocument/2006/relationships" xmlns:p="http://schemas.openxmlformats.org/presentationml/2006/main">
-  <p:cSld>
-    <p:spTree>
-      <p:nvGrpSpPr>
-        <p:cNvPr id="1" name=""/>
-        <p:cNvGrpSpPr/>
-        <p:nvPr/>
-      </p:nvGrpSpPr>
-      <p:grpSpPr>
-        <a:xfrm>
-          <a:off x="0" y="0"/>
-          <a:ext cx="0" cy="0"/>
-          <a:chOff x="0" y="0"/>
-          <a:chExt cx="0" cy="0"/>
-        </a:xfrm>
-      </p:grpSpPr>
-      <p:sp>
-        <p:nvSpPr>
-          <p:cNvPr id="2" name="Slide Image Placeholder 1"/>
-          <p:cNvSpPr>
-            <a:spLocks noGrp="1" noRot="1" noChangeAspect="1"/>
-          </p:cNvSpPr>
-          <p:nvPr>
-            <p:ph type="sldImg"/>
-          </p:nvPr>
-        </p:nvSpPr>
-        <p:spPr/>
-      </p:sp>
-      <p:sp>
-        <p:nvSpPr>
-          <p:cNvPr id="3" name="Notes Placeholder 2"/>
-          <p:cNvSpPr>
-            <a:spLocks noGrp="1"/>
-          </p:cNvSpPr>
-          <p:nvPr>
-            <p:ph type="body" idx="1"/>
-          </p:nvPr>
-        </p:nvSpPr>
-        <p:spPr/>
-        <p:txBody>
-          <a:bodyPr/>
-          <a:lstStyle/>
-          <a:p>
-            <a:r>
-              <a:rPr lang="en-US" dirty="0"/>
-              <a:t>SCRIPT: The app.dart change is two lines: MaterialApp.router and routerConfig. Then the four verbs.
-extra vs id: passing the Quote object via extra is tempting; it breaks on deep links and process death. Pass the id and look the quote up in state (ResultScreen does exactly that). Say this now; it is a code-review point on Friday.</a:t>
-            </a:r>
-            <a:endParaRPr lang="en-US" dirty="0"/>
-          </a:p>
-        </p:txBody>
-      </p:sp>
-      <p:sp>
-        <p:nvSpPr>
-          <p:cNvPr id="4" name="Slide Number Placeholder 3"/>
-          <p:cNvSpPr>
-            <a:spLocks noGrp="1"/>
-          </p:cNvSpPr>
-          <p:nvPr>
-            <p:ph type="sldNum" sz="quarter" idx="10"/>
-          </p:nvPr>
-        </p:nvSpPr>
-        <p:spPr/>
-        <p:txBody>
-          <a:bodyPr/>
-          <a:lstStyle/>
-          <a:p>
-            <a:fld id="{F7021451-1387-4CA6-816F-3879F97B5CBC}" type="slidenum">
-              <a:rPr lang="en-US"/>
-              <a:t>8</a:t>
-            </a:fld>
-            <a:endParaRPr lang="en-US"/>
-          </a:p>
-        </p:txBody>
-      </p:sp>
-    </p:spTree>
-    <p:extLst>
-      <p:ext uri="{BB962C8B-B14F-4D97-AF65-F5344CB8AC3E}">
-        <p14:creationId xmlns:p14="http://schemas.microsoft.com/office/powerpoint/2010/main" val="1024086991"/>
-      </p:ext>
-    </p:extLst>
-  </p:cSld>
-  <p:clrMapOvr>
-    <a:masterClrMapping/>
-  </p:clrMapOvr>
-</p:notes>
-</file>
-
-<file path=ppt/notesSlides/notesSlide9.xml><?xml version="1.0" encoding="utf-8"?>
-<p:notes xmlns:a="http://schemas.openxmlformats.org/drawingml/2006/main" xmlns:r="http://schemas.openxmlformats.org/officeDocument/2006/relationships" xmlns:p="http://schemas.openxmlformats.org/presentationml/2006/main">
-  <p:cSld>
-    <p:spTree>
-      <p:nvGrpSpPr>
-        <p:cNvPr id="1" name=""/>
-        <p:cNvGrpSpPr/>
-        <p:nvPr/>
-      </p:nvGrpSpPr>
-      <p:grpSpPr>
-        <a:xfrm>
-          <a:off x="0" y="0"/>
-          <a:ext cx="0" cy="0"/>
-          <a:chOff x="0" y="0"/>
-          <a:chExt cx="0" cy="0"/>
-        </a:xfrm>
-      </p:grpSpPr>
-      <p:sp>
-        <p:nvSpPr>
-          <p:cNvPr id="2" name="Slide Image Placeholder 1"/>
-          <p:cNvSpPr>
-            <a:spLocks noGrp="1" noRot="1" noChangeAspect="1"/>
-          </p:cNvSpPr>
-          <p:nvPr>
-            <p:ph type="sldImg"/>
-          </p:nvPr>
-        </p:nvSpPr>
-        <p:spPr/>
-      </p:sp>
-      <p:sp>
-        <p:nvSpPr>
-          <p:cNvPr id="3" name="Notes Placeholder 2"/>
-          <p:cNvSpPr>
-            <a:spLocks noGrp="1"/>
-          </p:cNvSpPr>
-          <p:nvPr>
-            <p:ph type="body" idx="1"/>
-          </p:nvPr>
-        </p:nvSpPr>
-        <p:spPr/>
-        <p:txBody>
-          <a:bodyPr/>
-          <a:lstStyle/>
-          <a:p>
-            <a:r>
-              <a:rPr lang="en-US" dirty="0"/>
-              <a:t>SCRIPT: Replace the top-level GoRoute('/quote') with this shell in Lab 4.1 stretch or 4.3. Three branches, each its own stack. The onboarding route stays outside the shell.
-GOTCHA: routes inside branches must have absolute paths starting with '/'. GOTCHA 2: the shell's builder receives navigationShell; you must place it as the body, not wrap it in another Navigator.
-NavigationBar vs BottomNavigationBar: NavigationBar is the M3 widget; use it.</a:t>
-            </a:r>
-            <a:endParaRPr lang="en-US" dirty="0"/>
-          </a:p>
-        </p:txBody>
-      </p:sp>
-      <p:sp>
-        <p:nvSpPr>
-          <p:cNvPr id="4" name="Slide Number Placeholder 3"/>
-          <p:cNvSpPr>
-            <a:spLocks noGrp="1"/>
-          </p:cNvSpPr>
-          <p:nvPr>
-            <p:ph type="sldNum" sz="quarter" idx="10"/>
-          </p:nvPr>
-        </p:nvSpPr>
-        <p:spPr/>
-        <p:txBody>
-          <a:bodyPr/>
-          <a:lstStyle/>
-          <a:p>
-            <a:fld id="{F7021451-1387-4CA6-816F-3879F97B5CBC}" type="slidenum">
-              <a:rPr lang="en-US"/>
-              <a:t>9</a:t>
-            </a:fld>
-            <a:endParaRPr lang="en-US"/>
-          </a:p>
-        </p:txBody>
-      </p:sp>
-    </p:spTree>
-    <p:extLst>
-      <p:ext uri="{BB962C8B-B14F-4D97-AF65-F5344CB8AC3E}">
-        <p14:creationId xmlns:p14="http://schemas.microsoft.com/office/powerpoint/2010/main" val="1024086991"/>
-      </p:ext>
-    </p:extLst>
-  </p:cSld>
-  <p:clrMapOvr>
-    <a:masterClrMapping/>
-  </p:clrMapOvr>
-</p:notes>
 </file>
 
 <file path=ppt/slideLayouts/slideLayout1.xml><?xml version="1.0" encoding="utf-8"?>
@@ -24300,676 +20018,676 @@
 </file>
 
 <file path=ppt/slides/slide34.xml><?xml version="1.0" encoding="utf-8"?>
-<p:sld xmlns:a="http://schemas.openxmlformats.org/drawingml/2006/main" xmlns:r="http://schemas.openxmlformats.org/officeDocument/2006/relationships" xmlns:p="http://schemas.openxmlformats.org/presentationml/2006/main">
-  <p:cSld name="Slide 34">
-    <p:bg>
-      <p:bgPr>
-        <a:solidFill>
-          <a:srgbClr val="FFFFFF"/>
-        </a:solidFill>
-      </p:bgPr>
-    </p:bg>
-    <p:spTree>
-      <p:nvGrpSpPr>
-        <p:cNvPr id="1" name=""/>
-        <p:cNvGrpSpPr/>
-        <p:nvPr/>
-      </p:nvGrpSpPr>
-      <p:grpSpPr>
-        <a:xfrm>
-          <a:off x="0" y="0"/>
-          <a:ext cx="0" cy="0"/>
-          <a:chOff x="0" y="0"/>
-          <a:chExt cx="0" cy="0"/>
-        </a:xfrm>
-      </p:grpSpPr>
-      <p:sp>
-        <p:nvSpPr>
-          <p:cNvPr id="2" name="Shape 0"/>
-          <p:cNvSpPr/>
-          <p:nvPr/>
-        </p:nvSpPr>
-        <p:spPr>
-          <a:xfrm>
-            <a:off x="548640" y="457200"/>
-            <a:ext cx="2011680" cy="292608"/>
-          </a:xfrm>
-          <a:prstGeom prst="roundRect">
-            <a:avLst>
-              <a:gd name="adj" fmla="val 50000"/>
-            </a:avLst>
-          </a:prstGeom>
-          <a:solidFill>
-            <a:srgbClr val="0B2545"/>
-          </a:solidFill>
-          <a:ln w="12700">
-            <a:solidFill>
-              <a:srgbClr val="0B2545"/>
-            </a:solidFill>
-            <a:prstDash val="solid"/>
-          </a:ln>
-        </p:spPr>
-      </p:sp>
-      <p:sp>
-        <p:nvSpPr>
-          <p:cNvPr id="3" name="Text 1"/>
-          <p:cNvSpPr txBox="1"/>
-          <p:nvPr/>
-        </p:nvSpPr>
-        <p:spPr>
-          <a:xfrm>
-            <a:off x="548640" y="457200"/>
-            <a:ext cx="2011680" cy="292608"/>
-          </a:xfrm>
-          <a:prstGeom prst="rect">
-            <a:avLst/>
-          </a:prstGeom>
-          <a:noFill/>
-          <a:ln/>
-        </p:spPr>
-        <p:txBody>
-          <a:bodyPr wrap="square" lIns="0" tIns="0" rIns="0" bIns="0" rtlCol="0" anchor="ctr"/>
-          <a:lstStyle/>
-          <a:p>
-            <a:pPr algn="ctr" indent="0" marL="0">
-              <a:buNone/>
-            </a:pPr>
-            <a:r>
-              <a:rPr lang="en-US" sz="1000" b="1" dirty="0">
-                <a:solidFill>
-                  <a:srgbClr val="FFFFFF"/>
-                </a:solidFill>
-                <a:latin typeface="Calibri" pitchFamily="34" charset="0"/>
-                <a:ea typeface="Calibri" pitchFamily="34" charset="-122"/>
-                <a:cs typeface="Calibri" pitchFamily="34" charset="-120"/>
-              </a:rPr>
-              <a:t>READ &amp; BREAK DOWN</a:t>
-            </a:r>
-            <a:endParaRPr lang="en-US" sz="1000" dirty="0"/>
-          </a:p>
-        </p:txBody>
-      </p:sp>
-      <p:sp>
-        <p:nvSpPr>
-          <p:cNvPr id="4" name="Text 2"/>
-          <p:cNvSpPr txBox="1"/>
-          <p:nvPr/>
-        </p:nvSpPr>
-        <p:spPr>
-          <a:xfrm>
-            <a:off x="9811512" y="457200"/>
-            <a:ext cx="1828800" cy="292608"/>
-          </a:xfrm>
-          <a:prstGeom prst="rect">
-            <a:avLst/>
-          </a:prstGeom>
-          <a:noFill/>
-          <a:ln/>
-        </p:spPr>
-        <p:txBody>
-          <a:bodyPr wrap="square" lIns="0" tIns="0" rIns="0" bIns="0" rtlCol="0" anchor="ctr"/>
-          <a:lstStyle/>
-          <a:p>
-            <a:pPr algn="r" indent="0" marL="0">
-              <a:buNone/>
-            </a:pPr>
-            <a:r>
-              <a:rPr lang="en-US" sz="1200" dirty="0">
-                <a:solidFill>
-                  <a:srgbClr val="5B6773"/>
-                </a:solidFill>
-                <a:latin typeface="Calibri" pitchFamily="34" charset="0"/>
-                <a:ea typeface="Calibri" pitchFamily="34" charset="-122"/>
-                <a:cs typeface="Calibri" pitchFamily="34" charset="-120"/>
-              </a:rPr>
-              <a:t>Homework · 20 min</a:t>
-            </a:r>
-            <a:endParaRPr lang="en-US" sz="1200" dirty="0"/>
-          </a:p>
-        </p:txBody>
-      </p:sp>
-      <p:sp>
-        <p:nvSpPr>
-          <p:cNvPr id="5" name="Text 3"/>
-          <p:cNvSpPr txBox="1"/>
-          <p:nvPr/>
-        </p:nvSpPr>
-        <p:spPr>
-          <a:xfrm>
-            <a:off x="548640" y="868680"/>
-            <a:ext cx="11091672" cy="640080"/>
-          </a:xfrm>
-          <a:prstGeom prst="rect">
-            <a:avLst/>
-          </a:prstGeom>
-          <a:noFill/>
-          <a:ln/>
-        </p:spPr>
-        <p:txBody>
-          <a:bodyPr wrap="square" lIns="0" tIns="0" rIns="0" bIns="0" rtlCol="0" anchor="ctr"/>
-          <a:lstStyle/>
-          <a:p>
-            <a:pPr indent="0" marL="0">
-              <a:buNone/>
-            </a:pPr>
-            <a:r>
-              <a:rPr lang="en-US" sz="2800" b="1" dirty="0">
-                <a:solidFill>
-                  <a:srgbClr val="0B2545"/>
-                </a:solidFill>
-                <a:latin typeface="Calibri" pitchFamily="34" charset="0"/>
-                <a:ea typeface="Calibri" pitchFamily="34" charset="-122"/>
-                <a:cs typeface="Calibri" pitchFamily="34" charset="-120"/>
-              </a:rPr>
-              <a:t>Tonight: read the testing overview and one widget-test cookbook</a:t>
-            </a:r>
-            <a:endParaRPr lang="en-US" sz="2800" dirty="0"/>
-          </a:p>
-        </p:txBody>
-      </p:sp>
-      <p:sp>
-        <p:nvSpPr>
-          <p:cNvPr id="6" name="Shape 4"/>
-          <p:cNvSpPr/>
-          <p:nvPr/>
-        </p:nvSpPr>
-        <p:spPr>
-          <a:xfrm>
-            <a:off x="548640" y="1691640"/>
-            <a:ext cx="11091672" cy="960120"/>
-          </a:xfrm>
-          <a:prstGeom prst="roundRect">
-            <a:avLst>
-              <a:gd name="adj" fmla="val 9524"/>
-            </a:avLst>
-          </a:prstGeom>
-          <a:solidFill>
-            <a:srgbClr val="EAF0F7"/>
-          </a:solidFill>
-          <a:ln w="6350">
-            <a:solidFill>
-              <a:srgbClr val="EAF0F7"/>
-            </a:solidFill>
-            <a:prstDash val="solid"/>
-          </a:ln>
-          <a:effectLst>
-            <a:outerShdw sx="100000" sy="100000" kx="0" ky="0" algn="bl" rotWithShape="0" blurRad="38100" dist="12700" dir="5400000">
-              <a:srgbClr val="000000">
-                <a:alpha val="8000"/>
-              </a:srgbClr>
-            </a:outerShdw>
-          </a:effectLst>
-        </p:spPr>
-      </p:sp>
-      <p:sp>
-        <p:nvSpPr>
-          <p:cNvPr id="7" name="Text 5"/>
-          <p:cNvSpPr txBox="1"/>
-          <p:nvPr/>
-        </p:nvSpPr>
-        <p:spPr>
-          <a:xfrm>
-            <a:off x="822960" y="1783080"/>
-            <a:ext cx="10543032" cy="457200"/>
-          </a:xfrm>
-          <a:prstGeom prst="rect">
-            <a:avLst/>
-          </a:prstGeom>
-          <a:noFill/>
-          <a:ln/>
-        </p:spPr>
-        <p:txBody>
-          <a:bodyPr wrap="square" lIns="0" tIns="0" rIns="0" bIns="0" rtlCol="0" anchor="ctr"/>
-          <a:lstStyle/>
-          <a:p>
-            <a:pPr indent="0" marL="0">
-              <a:buNone/>
-            </a:pPr>
-            <a:r>
-              <a:rPr lang="en-US" sz="1800" b="1" dirty="0">
-                <a:solidFill>
-                  <a:srgbClr val="0B2545"/>
-                </a:solidFill>
-                <a:latin typeface="Courier New" pitchFamily="34" charset="0"/>
-                <a:ea typeface="Courier New" pitchFamily="34" charset="-122"/>
-                <a:cs typeface="Courier New" pitchFamily="34" charset="-120"/>
-              </a:rPr>
-              <a:t>docs.flutter.dev/testing/overview</a:t>
-            </a:r>
-            <a:endParaRPr lang="en-US" sz="1800" dirty="0"/>
-          </a:p>
-        </p:txBody>
-      </p:sp>
-      <p:sp>
-        <p:nvSpPr>
-          <p:cNvPr id="8" name="Text 6"/>
-          <p:cNvSpPr txBox="1"/>
-          <p:nvPr/>
-        </p:nvSpPr>
-        <p:spPr>
-          <a:xfrm>
-            <a:off x="822960" y="2212848"/>
-            <a:ext cx="10543032" cy="365760"/>
-          </a:xfrm>
-          <a:prstGeom prst="rect">
-            <a:avLst/>
-          </a:prstGeom>
-          <a:noFill/>
-          <a:ln/>
-        </p:spPr>
-        <p:txBody>
-          <a:bodyPr wrap="square" lIns="0" tIns="0" rIns="0" bIns="0" rtlCol="0" anchor="ctr"/>
-          <a:lstStyle/>
-          <a:p>
-            <a:pPr indent="0" marL="0">
-              <a:buNone/>
-            </a:pPr>
-            <a:r>
-              <a:rPr lang="en-US" sz="1200" dirty="0">
-                <a:solidFill>
-                  <a:srgbClr val="5B6773"/>
-                </a:solidFill>
-                <a:latin typeface="Calibri" pitchFamily="34" charset="0"/>
-                <a:ea typeface="Calibri" pitchFamily="34" charset="-122"/>
-                <a:cs typeface="Calibri" pitchFamily="34" charset="-120"/>
-              </a:rPr>
-              <a:t>Overview; then docs.flutter.dev/cookbook/testing/widget/introduction and docs.flutter.dev/cookbook/testing/widget/finders; skim riverpod.dev/docs/essentials/testing (about 20 minutes)</a:t>
-            </a:r>
-            <a:endParaRPr lang="en-US" sz="1200" dirty="0"/>
-          </a:p>
-        </p:txBody>
-      </p:sp>
-      <p:sp>
-        <p:nvSpPr>
-          <p:cNvPr id="9" name="Text 7"/>
-          <p:cNvSpPr txBox="1"/>
-          <p:nvPr/>
-        </p:nvSpPr>
-        <p:spPr>
-          <a:xfrm>
-            <a:off x="548640" y="2880360"/>
-            <a:ext cx="6655003" cy="365760"/>
-          </a:xfrm>
-          <a:prstGeom prst="rect">
-            <a:avLst/>
-          </a:prstGeom>
-          <a:noFill/>
-          <a:ln/>
-        </p:spPr>
-        <p:txBody>
-          <a:bodyPr wrap="square" lIns="0" tIns="0" rIns="0" bIns="0" rtlCol="0" anchor="ctr"/>
-          <a:lstStyle/>
-          <a:p>
-            <a:pPr indent="0" marL="0">
-              <a:buNone/>
-            </a:pPr>
-            <a:r>
-              <a:rPr lang="en-US" sz="1400" b="1" dirty="0">
-                <a:solidFill>
-                  <a:srgbClr val="0B2545"/>
-                </a:solidFill>
-                <a:latin typeface="Calibri" pitchFamily="34" charset="0"/>
-                <a:ea typeface="Calibri" pitchFamily="34" charset="-122"/>
-                <a:cs typeface="Calibri" pitchFamily="34" charset="-120"/>
-              </a:rPr>
-              <a:t>Answer these as you read</a:t>
-            </a:r>
-            <a:endParaRPr lang="en-US" sz="1400" dirty="0"/>
-          </a:p>
-        </p:txBody>
-      </p:sp>
-      <p:sp>
-        <p:nvSpPr>
-          <p:cNvPr id="10" name="Text 8"/>
-          <p:cNvSpPr txBox="1"/>
-          <p:nvPr/>
-        </p:nvSpPr>
-        <p:spPr>
-          <a:xfrm>
-            <a:off x="548640" y="3291840"/>
-            <a:ext cx="6655003" cy="2743200"/>
-          </a:xfrm>
-          <a:prstGeom prst="rect">
-            <a:avLst/>
-          </a:prstGeom>
-          <a:noFill/>
-          <a:ln/>
-        </p:spPr>
-        <p:txBody>
-          <a:bodyPr wrap="square" lIns="0" tIns="0" rIns="0" bIns="0" rtlCol="0" anchor="t"/>
-          <a:lstStyle/>
-          <a:p>
-            <a:pPr marL="279400" indent="-279400">
-              <a:spcAft>
-                <a:spcPts val="800"/>
-              </a:spcAft>
-              <a:buSzPct val="100000"/>
-              <a:buFont typeface="+mj-lt"/>
-              <a:buAutoNum type="arabicPeriod" startAt="1"/>
-            </a:pPr>
-            <a:r>
-              <a:rPr lang="en-US" sz="1400" dirty="0">
-                <a:solidFill>
-                  <a:srgbClr val="1F2933"/>
-                </a:solidFill>
-                <a:latin typeface="Calibri" pitchFamily="34" charset="0"/>
-                <a:ea typeface="Calibri" pitchFamily="34" charset="-122"/>
-                <a:cs typeface="Calibri" pitchFamily="34" charset="-120"/>
-              </a:rPr>
-              <a:t>Unit, widget, integration: one sentence each, and which layer of our app each one covers.</a:t>
-            </a:r>
-            <a:endParaRPr lang="en-US" sz="1400" dirty="0"/>
-          </a:p>
-          <a:p>
-            <a:pPr marL="279400" indent="-279400">
-              <a:spcAft>
-                <a:spcPts val="800"/>
-              </a:spcAft>
-              <a:buSzPct val="100000"/>
-              <a:buFont typeface="+mj-lt"/>
-              <a:buAutoNum type="arabicPeriod" startAt="1"/>
-            </a:pPr>
-            <a:r>
-              <a:rPr lang="en-US" sz="1400" dirty="0">
-                <a:solidFill>
-                  <a:srgbClr val="1F2933"/>
-                </a:solidFill>
-                <a:latin typeface="Calibri" pitchFamily="34" charset="0"/>
-                <a:ea typeface="Calibri" pitchFamily="34" charset="-122"/>
-                <a:cs typeface="Calibri" pitchFamily="34" charset="-120"/>
-              </a:rPr>
-              <a:t>What do pumpWidget, pump and pumpAndSettle do, and when does pumpAndSettle hang forever?</a:t>
-            </a:r>
-            <a:endParaRPr lang="en-US" sz="1400" dirty="0"/>
-          </a:p>
-          <a:p>
-            <a:pPr marL="279400" indent="-279400">
-              <a:spcAft>
-                <a:spcPts val="800"/>
-              </a:spcAft>
-              <a:buSzPct val="100000"/>
-              <a:buFont typeface="+mj-lt"/>
-              <a:buAutoNum type="arabicPeriod" startAt="1"/>
-            </a:pPr>
-            <a:r>
-              <a:rPr lang="en-US" sz="1400" dirty="0">
-                <a:solidFill>
-                  <a:srgbClr val="1F2933"/>
-                </a:solidFill>
-                <a:latin typeface="Calibri" pitchFamily="34" charset="0"/>
-                <a:ea typeface="Calibri" pitchFamily="34" charset="-122"/>
-                <a:cs typeface="Calibri" pitchFamily="34" charset="-120"/>
-              </a:rPr>
-              <a:t>Three finders you would use on the capture form, and how you tap a button in a test.</a:t>
-            </a:r>
-            <a:endParaRPr lang="en-US" sz="1400" dirty="0"/>
-          </a:p>
-          <a:p>
-            <a:pPr marL="279400" indent="-279400">
-              <a:spcAft>
-                <a:spcPts val="800"/>
-              </a:spcAft>
-              <a:buSzPct val="100000"/>
-              <a:buFont typeface="+mj-lt"/>
-              <a:buAutoNum type="arabicPeriod" startAt="1"/>
-            </a:pPr>
-            <a:r>
-              <a:rPr lang="en-US" sz="1400" dirty="0">
-                <a:solidFill>
-                  <a:srgbClr val="1F2933"/>
-                </a:solidFill>
-                <a:latin typeface="Calibri" pitchFamily="34" charset="0"/>
-                <a:ea typeface="Calibri" pitchFamily="34" charset="-122"/>
-                <a:cs typeface="Calibri" pitchFamily="34" charset="-120"/>
-              </a:rPr>
-              <a:t>How does the Riverpod testing doc swap the API for a fake in a widget test?</a:t>
-            </a:r>
-            <a:endParaRPr lang="en-US" sz="1400" dirty="0"/>
-          </a:p>
-        </p:txBody>
-      </p:sp>
-      <p:sp>
-        <p:nvSpPr>
-          <p:cNvPr id="11" name="Shape 9"/>
-          <p:cNvSpPr/>
-          <p:nvPr/>
-        </p:nvSpPr>
-        <p:spPr>
-          <a:xfrm>
-            <a:off x="7477963" y="2880360"/>
-            <a:ext cx="4162349" cy="3154680"/>
-          </a:xfrm>
-          <a:prstGeom prst="roundRect">
-            <a:avLst>
-              <a:gd name="adj" fmla="val 2899"/>
-            </a:avLst>
-          </a:prstGeom>
-          <a:solidFill>
-            <a:srgbClr val="FBF6E3"/>
-          </a:solidFill>
-          <a:ln w="6350">
-            <a:solidFill>
-              <a:srgbClr val="FBF6E3"/>
-            </a:solidFill>
-            <a:prstDash val="solid"/>
-          </a:ln>
-          <a:effectLst>
-            <a:outerShdw sx="100000" sy="100000" kx="0" ky="0" algn="bl" rotWithShape="0" blurRad="38100" dist="12700" dir="5400000">
-              <a:srgbClr val="000000">
-                <a:alpha val="8000"/>
-              </a:srgbClr>
-            </a:outerShdw>
-          </a:effectLst>
-        </p:spPr>
-      </p:sp>
-      <p:sp>
-        <p:nvSpPr>
-          <p:cNvPr id="12" name="Text 10"/>
-          <p:cNvSpPr txBox="1"/>
-          <p:nvPr/>
-        </p:nvSpPr>
-        <p:spPr>
-          <a:xfrm>
-            <a:off x="7706563" y="3017520"/>
-            <a:ext cx="3705149" cy="365760"/>
-          </a:xfrm>
-          <a:prstGeom prst="rect">
-            <a:avLst/>
-          </a:prstGeom>
-          <a:noFill/>
-          <a:ln/>
-        </p:spPr>
-        <p:txBody>
-          <a:bodyPr wrap="square" lIns="0" tIns="0" rIns="0" bIns="0" rtlCol="0" anchor="ctr"/>
-          <a:lstStyle/>
-          <a:p>
-            <a:pPr indent="0" marL="0">
-              <a:buNone/>
-            </a:pPr>
-            <a:r>
-              <a:rPr lang="en-US" sz="1400" b="1" dirty="0">
-                <a:solidFill>
-                  <a:srgbClr val="0B2545"/>
-                </a:solidFill>
-                <a:latin typeface="Calibri" pitchFamily="34" charset="0"/>
-                <a:ea typeface="Calibri" pitchFamily="34" charset="-122"/>
-                <a:cs typeface="Calibri" pitchFamily="34" charset="-120"/>
-              </a:rPr>
-              <a:t>Then</a:t>
-            </a:r>
-            <a:endParaRPr lang="en-US" sz="1400" dirty="0"/>
-          </a:p>
-        </p:txBody>
-      </p:sp>
-      <p:sp>
-        <p:nvSpPr>
-          <p:cNvPr id="13" name="Text 11"/>
-          <p:cNvSpPr txBox="1"/>
-          <p:nvPr/>
-        </p:nvSpPr>
-        <p:spPr>
-          <a:xfrm>
-            <a:off x="7706563" y="3429000"/>
-            <a:ext cx="3705149" cy="2514600"/>
-          </a:xfrm>
-          <a:prstGeom prst="rect">
-            <a:avLst/>
-          </a:prstGeom>
-          <a:noFill/>
-          <a:ln/>
-        </p:spPr>
-        <p:txBody>
-          <a:bodyPr wrap="square" lIns="0" tIns="0" rIns="0" bIns="0" rtlCol="0" anchor="t"/>
-          <a:lstStyle/>
-          <a:p>
-            <a:pPr marL="177800" indent="-177800">
-              <a:spcAft>
-                <a:spcPts val="700"/>
-              </a:spcAft>
-              <a:buSzPct val="100000"/>
-              <a:buChar char="•"/>
-            </a:pPr>
-            <a:r>
-              <a:rPr lang="en-US" sz="1250" dirty="0">
-                <a:solidFill>
-                  <a:srgbClr val="1F2933"/>
-                </a:solidFill>
-                <a:latin typeface="Calibri" pitchFamily="34" charset="0"/>
-                <a:ea typeface="Calibri" pitchFamily="34" charset="-122"/>
-                <a:cs typeface="Calibri" pitchFamily="34" charset="-120"/>
-              </a:rPr>
-              <a:t>09:00 tomorrow: two delegates present Q2 and Q4 at the whiteboard.</a:t>
-            </a:r>
-            <a:endParaRPr lang="en-US" sz="1250" dirty="0"/>
-          </a:p>
-          <a:p>
-            <a:pPr marL="177800" indent="-177800">
-              <a:spcAft>
-                <a:spcPts val="700"/>
-              </a:spcAft>
-              <a:buSzPct val="100000"/>
-              <a:buChar char="•"/>
-            </a:pPr>
-            <a:r>
-              <a:rPr lang="en-US" sz="1250" dirty="0">
-                <a:solidFill>
-                  <a:srgbClr val="1F2933"/>
-                </a:solidFill>
-                <a:latin typeface="Calibri" pitchFamily="34" charset="0"/>
-                <a:ea typeface="Calibri" pitchFamily="34" charset="-122"/>
-                <a:cs typeface="Calibri" pitchFamily="34" charset="-120"/>
-              </a:rPr>
-              <a:t>We write the first widget test live from their answers.</a:t>
-            </a:r>
-            <a:endParaRPr lang="en-US" sz="1250" dirty="0"/>
-          </a:p>
-          <a:p>
-            <a:pPr marL="177800" indent="-177800">
-              <a:spcAft>
-                <a:spcPts val="700"/>
-              </a:spcAft>
-              <a:buSzPct val="100000"/>
-              <a:buChar char="•"/>
-            </a:pPr>
-            <a:r>
-              <a:rPr lang="en-US" sz="1250" dirty="0">
-                <a:solidFill>
-                  <a:srgbClr val="1F2933"/>
-                </a:solidFill>
-                <a:latin typeface="Calibri" pitchFamily="34" charset="0"/>
-                <a:ea typeface="Calibri" pitchFamily="34" charset="-122"/>
-                <a:cs typeface="Calibri" pitchFamily="34" charset="-120"/>
-              </a:rPr>
-              <a:t>Publishing is the lowest score (1.6) - the afternoon is all release.</a:t>
-            </a:r>
-            <a:endParaRPr lang="en-US" sz="1250" dirty="0"/>
-          </a:p>
-        </p:txBody>
-      </p:sp>
-      <p:sp>
-        <p:nvSpPr>
-          <p:cNvPr id="14" name="Text 12"/>
-          <p:cNvSpPr txBox="1"/>
-          <p:nvPr/>
-        </p:nvSpPr>
-        <p:spPr>
-          <a:xfrm>
-            <a:off x="548640" y="6473952"/>
-            <a:ext cx="9994392" cy="274320"/>
-          </a:xfrm>
-          <a:prstGeom prst="rect">
-            <a:avLst/>
-          </a:prstGeom>
-          <a:noFill/>
-          <a:ln/>
-        </p:spPr>
-        <p:txBody>
-          <a:bodyPr wrap="square" lIns="0" tIns="0" rIns="0" bIns="0" rtlCol="0" anchor="ctr"/>
-          <a:lstStyle/>
-          <a:p>
-            <a:pPr indent="0" marL="0">
-              <a:buNone/>
-            </a:pPr>
-            <a:r>
-              <a:rPr lang="en-US" sz="900" dirty="0">
-                <a:solidFill>
-                  <a:srgbClr val="5B6773"/>
-                </a:solidFill>
-                <a:latin typeface="Calibri" pitchFamily="34" charset="0"/>
-                <a:ea typeface="Calibri" pitchFamily="34" charset="-122"/>
-                <a:cs typeface="Calibri" pitchFamily="34" charset="-120"/>
-              </a:rPr>
-              <a:t>MO Integrations · Flutter Training · Day 4 - Data, APIs &amp; Navigation</a:t>
-            </a:r>
-            <a:endParaRPr lang="en-US" sz="900" dirty="0"/>
-          </a:p>
-        </p:txBody>
-      </p:sp>
-      <p:sp>
-        <p:nvSpPr>
-          <p:cNvPr id="15" name="Text 13"/>
-          <p:cNvSpPr txBox="1"/>
-          <p:nvPr/>
-        </p:nvSpPr>
-        <p:spPr>
-          <a:xfrm>
-            <a:off x="10543032" y="6473952"/>
-            <a:ext cx="1097280" cy="274320"/>
-          </a:xfrm>
-          <a:prstGeom prst="rect">
-            <a:avLst/>
-          </a:prstGeom>
-          <a:noFill/>
-          <a:ln/>
-        </p:spPr>
-        <p:txBody>
-          <a:bodyPr wrap="square" lIns="0" tIns="0" rIns="0" bIns="0" rtlCol="0" anchor="ctr"/>
-          <a:lstStyle/>
-          <a:p>
-            <a:pPr algn="r" indent="0" marL="0">
-              <a:buNone/>
-            </a:pPr>
-            <a:r>
-              <a:rPr lang="en-US" sz="900" dirty="0">
-                <a:solidFill>
-                  <a:srgbClr val="5B6773"/>
-                </a:solidFill>
-                <a:latin typeface="Calibri" pitchFamily="34" charset="0"/>
-                <a:ea typeface="Calibri" pitchFamily="34" charset="-122"/>
-                <a:cs typeface="Calibri" pitchFamily="34" charset="-120"/>
-              </a:rPr>
-              <a:t>33</a:t>
-            </a:r>
-            <a:endParaRPr lang="en-US" sz="900" dirty="0"/>
-          </a:p>
-        </p:txBody>
-      </p:sp>
-    </p:spTree>
-  </p:cSld>
-  <p:clrMapOvr>
-    <a:masterClrMapping/>
-  </p:clrMapOvr>
-</p:sld>
+<ns0:sld xmlns:ns0="http://schemas.openxmlformats.org/presentationml/2006/main" xmlns:ns1="http://schemas.openxmlformats.org/drawingml/2006/main">
+  <ns0:cSld name="Slide 34">
+    <ns0:bg>
+      <ns0:bgPr>
+        <ns1:solidFill>
+          <ns1:srgbClr val="FFFFFF"/>
+        </ns1:solidFill>
+      </ns0:bgPr>
+    </ns0:bg>
+    <ns0:spTree>
+      <ns0:nvGrpSpPr>
+        <ns0:cNvPr id="1" name=""/>
+        <ns0:cNvGrpSpPr/>
+        <ns0:nvPr/>
+      </ns0:nvGrpSpPr>
+      <ns0:grpSpPr>
+        <ns1:xfrm>
+          <ns1:off x="0" y="0"/>
+          <ns1:ext cx="0" cy="0"/>
+          <ns1:chOff x="0" y="0"/>
+          <ns1:chExt cx="0" cy="0"/>
+        </ns1:xfrm>
+      </ns0:grpSpPr>
+      <ns0:sp>
+        <ns0:nvSpPr>
+          <ns0:cNvPr id="2" name="Shape 0"/>
+          <ns0:cNvSpPr/>
+          <ns0:nvPr/>
+        </ns0:nvSpPr>
+        <ns0:spPr>
+          <ns1:xfrm>
+            <ns1:off x="548640" y="457200"/>
+            <ns1:ext cx="2011680" cy="292608"/>
+          </ns1:xfrm>
+          <ns1:prstGeom prst="roundRect">
+            <ns1:avLst>
+              <ns1:gd name="adj" fmla="val 50000"/>
+            </ns1:avLst>
+          </ns1:prstGeom>
+          <ns1:solidFill>
+            <ns1:srgbClr val="0B2545"/>
+          </ns1:solidFill>
+          <ns1:ln w="12700">
+            <ns1:solidFill>
+              <ns1:srgbClr val="0B2545"/>
+            </ns1:solidFill>
+            <ns1:prstDash val="solid"/>
+          </ns1:ln>
+        </ns0:spPr>
+      </ns0:sp>
+      <ns0:sp>
+        <ns0:nvSpPr>
+          <ns0:cNvPr id="3" name="Text 1"/>
+          <ns0:cNvSpPr txBox="1"/>
+          <ns0:nvPr/>
+        </ns0:nvSpPr>
+        <ns0:spPr>
+          <ns1:xfrm>
+            <ns1:off x="548640" y="457200"/>
+            <ns1:ext cx="2011680" cy="292608"/>
+          </ns1:xfrm>
+          <ns1:prstGeom prst="rect">
+            <ns1:avLst/>
+          </ns1:prstGeom>
+          <ns1:noFill/>
+          <ns1:ln/>
+        </ns0:spPr>
+        <ns0:txBody>
+          <ns1:bodyPr wrap="square" lIns="0" tIns="0" rIns="0" bIns="0" rtlCol="0" anchor="ctr"/>
+          <ns1:lstStyle/>
+          <ns1:p>
+            <ns1:pPr algn="ctr" indent="0" marL="0">
+              <ns1:buNone/>
+            </ns1:pPr>
+            <ns1:r>
+              <ns1:rPr lang="en-US" sz="1000" b="1" dirty="0">
+                <ns1:solidFill>
+                  <ns1:srgbClr val="FFFFFF"/>
+                </ns1:solidFill>
+                <ns1:latin typeface="Calibri" pitchFamily="34" charset="0"/>
+                <ns1:ea typeface="Calibri" pitchFamily="34" charset="-122"/>
+                <ns1:cs typeface="Calibri" pitchFamily="34" charset="-120"/>
+              </ns1:rPr>
+              <ns1:t>READ &amp; BREAK DOWN</ns1:t>
+            </ns1:r>
+            <ns1:endParaRPr lang="en-US" sz="1000" dirty="0"/>
+          </ns1:p>
+        </ns0:txBody>
+      </ns0:sp>
+      <ns0:sp>
+        <ns0:nvSpPr>
+          <ns0:cNvPr id="4" name="Text 2"/>
+          <ns0:cNvSpPr txBox="1"/>
+          <ns0:nvPr/>
+        </ns0:nvSpPr>
+        <ns0:spPr>
+          <ns1:xfrm>
+            <ns1:off x="9811512" y="457200"/>
+            <ns1:ext cx="1828800" cy="292608"/>
+          </ns1:xfrm>
+          <ns1:prstGeom prst="rect">
+            <ns1:avLst/>
+          </ns1:prstGeom>
+          <ns1:noFill/>
+          <ns1:ln/>
+        </ns0:spPr>
+        <ns0:txBody>
+          <ns1:bodyPr wrap="square" lIns="0" tIns="0" rIns="0" bIns="0" rtlCol="0" anchor="ctr"/>
+          <ns1:lstStyle/>
+          <ns1:p>
+            <ns1:pPr algn="r" indent="0" marL="0">
+              <ns1:buNone/>
+            </ns1:pPr>
+            <ns1:r>
+              <ns1:rPr lang="en-US" sz="1200" dirty="0">
+                <ns1:solidFill>
+                  <ns1:srgbClr val="5B6773"/>
+                </ns1:solidFill>
+                <ns1:latin typeface="Calibri" pitchFamily="34" charset="0"/>
+                <ns1:ea typeface="Calibri" pitchFamily="34" charset="-122"/>
+                <ns1:cs typeface="Calibri" pitchFamily="34" charset="-120"/>
+              </ns1:rPr>
+              <ns1:t>Homework · 20 min</ns1:t>
+            </ns1:r>
+            <ns1:endParaRPr lang="en-US" sz="1200" dirty="0"/>
+          </ns1:p>
+        </ns0:txBody>
+      </ns0:sp>
+      <ns0:sp>
+        <ns0:nvSpPr>
+          <ns0:cNvPr id="5" name="Text 3"/>
+          <ns0:cNvSpPr txBox="1"/>
+          <ns0:nvPr/>
+        </ns0:nvSpPr>
+        <ns0:spPr>
+          <ns1:xfrm>
+            <ns1:off x="548640" y="868680"/>
+            <ns1:ext cx="11091672" cy="640080"/>
+          </ns1:xfrm>
+          <ns1:prstGeom prst="rect">
+            <ns1:avLst/>
+          </ns1:prstGeom>
+          <ns1:noFill/>
+          <ns1:ln/>
+        </ns0:spPr>
+        <ns0:txBody>
+          <ns1:bodyPr wrap="square" lIns="0" tIns="0" rIns="0" bIns="0" rtlCol="0" anchor="ctr"/>
+          <ns1:lstStyle/>
+          <ns1:p>
+            <ns1:pPr indent="0" marL="0">
+              <ns1:buNone/>
+            </ns1:pPr>
+            <ns1:r>
+              <ns1:rPr lang="en-US" sz="2800" b="1" dirty="0">
+                <ns1:solidFill>
+                  <ns1:srgbClr val="0B2545"/>
+                </ns1:solidFill>
+                <ns1:latin typeface="Calibri" pitchFamily="34" charset="0"/>
+                <ns1:ea typeface="Calibri" pitchFamily="34" charset="-122"/>
+                <ns1:cs typeface="Calibri" pitchFamily="34" charset="-120"/>
+              </ns1:rPr>
+              <ns1:t>Tonight: read the testing overview and one widget-test cookbook</ns1:t>
+            </ns1:r>
+            <ns1:endParaRPr lang="en-US" sz="2800" dirty="0"/>
+          </ns1:p>
+        </ns0:txBody>
+      </ns0:sp>
+      <ns0:sp>
+        <ns0:nvSpPr>
+          <ns0:cNvPr id="6" name="Shape 4"/>
+          <ns0:cNvSpPr/>
+          <ns0:nvPr/>
+        </ns0:nvSpPr>
+        <ns0:spPr>
+          <ns1:xfrm>
+            <ns1:off x="548640" y="1691640"/>
+            <ns1:ext cx="11091672" cy="960120"/>
+          </ns1:xfrm>
+          <ns1:prstGeom prst="roundRect">
+            <ns1:avLst>
+              <ns1:gd name="adj" fmla="val 9524"/>
+            </ns1:avLst>
+          </ns1:prstGeom>
+          <ns1:solidFill>
+            <ns1:srgbClr val="EAF0F7"/>
+          </ns1:solidFill>
+          <ns1:ln w="6350">
+            <ns1:solidFill>
+              <ns1:srgbClr val="EAF0F7"/>
+            </ns1:solidFill>
+            <ns1:prstDash val="solid"/>
+          </ns1:ln>
+          <ns1:effectLst>
+            <ns1:outerShdw sx="100000" sy="100000" kx="0" ky="0" algn="bl" rotWithShape="0" blurRad="38100" dist="12700" dir="5400000">
+              <ns1:srgbClr val="000000">
+                <ns1:alpha val="8000"/>
+              </ns1:srgbClr>
+            </ns1:outerShdw>
+          </ns1:effectLst>
+        </ns0:spPr>
+      </ns0:sp>
+      <ns0:sp>
+        <ns0:nvSpPr>
+          <ns0:cNvPr id="7" name="Text 5"/>
+          <ns0:cNvSpPr txBox="1"/>
+          <ns0:nvPr/>
+        </ns0:nvSpPr>
+        <ns0:spPr>
+          <ns1:xfrm>
+            <ns1:off x="822960" y="1783080"/>
+            <ns1:ext cx="10543032" cy="457200"/>
+          </ns1:xfrm>
+          <ns1:prstGeom prst="rect">
+            <ns1:avLst/>
+          </ns1:prstGeom>
+          <ns1:noFill/>
+          <ns1:ln/>
+        </ns0:spPr>
+        <ns0:txBody>
+          <ns1:bodyPr wrap="square" lIns="0" tIns="0" rIns="0" bIns="0" rtlCol="0" anchor="ctr"/>
+          <ns1:lstStyle/>
+          <ns1:p>
+            <ns1:pPr indent="0" marL="0">
+              <ns1:buNone/>
+            </ns1:pPr>
+            <ns1:r>
+              <ns1:rPr lang="en-US" sz="1800" b="1" dirty="0">
+                <ns1:solidFill>
+                  <ns1:srgbClr val="0B2545"/>
+                </ns1:solidFill>
+                <ns1:latin typeface="Courier New" pitchFamily="34" charset="0"/>
+                <ns1:ea typeface="Courier New" pitchFamily="34" charset="-122"/>
+                <ns1:cs typeface="Courier New" pitchFamily="34" charset="-120"/>
+              </ns1:rPr>
+              <ns1:t>docs.flutter.dev/testing/overview</ns1:t>
+            </ns1:r>
+            <ns1:endParaRPr lang="en-US" sz="1800" dirty="0"/>
+          </ns1:p>
+        </ns0:txBody>
+      </ns0:sp>
+      <ns0:sp>
+        <ns0:nvSpPr>
+          <ns0:cNvPr id="8" name="Text 6"/>
+          <ns0:cNvSpPr txBox="1"/>
+          <ns0:nvPr/>
+        </ns0:nvSpPr>
+        <ns0:spPr>
+          <ns1:xfrm>
+            <ns1:off x="822960" y="2212848"/>
+            <ns1:ext cx="10543032" cy="365760"/>
+          </ns1:xfrm>
+          <ns1:prstGeom prst="rect">
+            <ns1:avLst/>
+          </ns1:prstGeom>
+          <ns1:noFill/>
+          <ns1:ln/>
+        </ns0:spPr>
+        <ns0:txBody>
+          <ns1:bodyPr wrap="square" lIns="0" tIns="0" rIns="0" bIns="0" rtlCol="0" anchor="ctr"/>
+          <ns1:lstStyle/>
+          <ns1:p>
+            <ns1:pPr indent="0" marL="0">
+              <ns1:buNone/>
+            </ns1:pPr>
+            <ns1:r>
+              <ns1:rPr lang="en-US" sz="1200" dirty="0">
+                <ns1:solidFill>
+                  <ns1:srgbClr val="5B6773"/>
+                </ns1:solidFill>
+                <ns1:latin typeface="Calibri" pitchFamily="34" charset="0"/>
+                <ns1:ea typeface="Calibri" pitchFamily="34" charset="-122"/>
+                <ns1:cs typeface="Calibri" pitchFamily="34" charset="-120"/>
+              </ns1:rPr>
+              <ns1:t>Overview; then docs.flutter.dev/cookbook/testing/widget/introduction and docs.flutter.dev/cookbook/testing/widget/finders; skim riverpod.dev/docs/essentials/testing (about 20 minutes)</ns1:t>
+            </ns1:r>
+            <ns1:endParaRPr lang="en-US" sz="1200" dirty="0"/>
+          </ns1:p>
+        </ns0:txBody>
+      </ns0:sp>
+      <ns0:sp>
+        <ns0:nvSpPr>
+          <ns0:cNvPr id="9" name="Text 7"/>
+          <ns0:cNvSpPr txBox="1"/>
+          <ns0:nvPr/>
+        </ns0:nvSpPr>
+        <ns0:spPr>
+          <ns1:xfrm>
+            <ns1:off x="548640" y="2880360"/>
+            <ns1:ext cx="6655003" cy="365760"/>
+          </ns1:xfrm>
+          <ns1:prstGeom prst="rect">
+            <ns1:avLst/>
+          </ns1:prstGeom>
+          <ns1:noFill/>
+          <ns1:ln/>
+        </ns0:spPr>
+        <ns0:txBody>
+          <ns1:bodyPr wrap="square" lIns="0" tIns="0" rIns="0" bIns="0" rtlCol="0" anchor="ctr"/>
+          <ns1:lstStyle/>
+          <ns1:p>
+            <ns1:pPr indent="0" marL="0">
+              <ns1:buNone/>
+            </ns1:pPr>
+            <ns1:r>
+              <ns1:rPr lang="en-US" sz="1400" b="1" dirty="0">
+                <ns1:solidFill>
+                  <ns1:srgbClr val="0B2545"/>
+                </ns1:solidFill>
+                <ns1:latin typeface="Calibri" pitchFamily="34" charset="0"/>
+                <ns1:ea typeface="Calibri" pitchFamily="34" charset="-122"/>
+                <ns1:cs typeface="Calibri" pitchFamily="34" charset="-120"/>
+              </ns1:rPr>
+              <ns1:t>Answer these as you read</ns1:t>
+            </ns1:r>
+            <ns1:endParaRPr lang="en-US" sz="1400" dirty="0"/>
+          </ns1:p>
+        </ns0:txBody>
+      </ns0:sp>
+      <ns0:sp>
+        <ns0:nvSpPr>
+          <ns0:cNvPr id="10" name="Text 8"/>
+          <ns0:cNvSpPr txBox="1"/>
+          <ns0:nvPr/>
+        </ns0:nvSpPr>
+        <ns0:spPr>
+          <ns1:xfrm>
+            <ns1:off x="548640" y="3291840"/>
+            <ns1:ext cx="6655003" cy="2743200"/>
+          </ns1:xfrm>
+          <ns1:prstGeom prst="rect">
+            <ns1:avLst/>
+          </ns1:prstGeom>
+          <ns1:noFill/>
+          <ns1:ln/>
+        </ns0:spPr>
+        <ns0:txBody>
+          <ns1:bodyPr wrap="square" lIns="0" tIns="0" rIns="0" bIns="0" rtlCol="0" anchor="t"/>
+          <ns1:lstStyle/>
+          <ns1:p>
+            <ns1:pPr marL="279400" indent="-279400">
+              <ns1:spcAft>
+                <ns1:spcPts val="800"/>
+              </ns1:spcAft>
+              <ns1:buSzPct val="100000"/>
+              <ns1:buFont typeface="+mj-lt"/>
+              <ns1:buAutoNum type="arabicPeriod" startAt="1"/>
+            </ns1:pPr>
+            <ns1:r>
+              <ns1:rPr lang="en-US" sz="1400" dirty="0">
+                <ns1:solidFill>
+                  <ns1:srgbClr val="1F2933"/>
+                </ns1:solidFill>
+                <ns1:latin typeface="Calibri" pitchFamily="34" charset="0"/>
+                <ns1:ea typeface="Calibri" pitchFamily="34" charset="-122"/>
+                <ns1:cs typeface="Calibri" pitchFamily="34" charset="-120"/>
+              </ns1:rPr>
+              <ns1:t>Unit, widget, integration: one sentence each, and which layer of our app each one covers.</ns1:t>
+            </ns1:r>
+            <ns1:endParaRPr lang="en-US" sz="1400" dirty="0"/>
+          </ns1:p>
+          <ns1:p>
+            <ns1:pPr marL="279400" indent="-279400">
+              <ns1:spcAft>
+                <ns1:spcPts val="800"/>
+              </ns1:spcAft>
+              <ns1:buSzPct val="100000"/>
+              <ns1:buFont typeface="+mj-lt"/>
+              <ns1:buAutoNum type="arabicPeriod" startAt="1"/>
+            </ns1:pPr>
+            <ns1:r>
+              <ns1:rPr lang="en-US" sz="1400" dirty="0">
+                <ns1:solidFill>
+                  <ns1:srgbClr val="1F2933"/>
+                </ns1:solidFill>
+                <ns1:latin typeface="Calibri" pitchFamily="34" charset="0"/>
+                <ns1:ea typeface="Calibri" pitchFamily="34" charset="-122"/>
+                <ns1:cs typeface="Calibri" pitchFamily="34" charset="-120"/>
+              </ns1:rPr>
+              <ns1:t>What do pumpWidget, pump and pumpAndSettle do, and when does pumpAndSettle hang forever?</ns1:t>
+            </ns1:r>
+            <ns1:endParaRPr lang="en-US" sz="1400" dirty="0"/>
+          </ns1:p>
+          <ns1:p>
+            <ns1:pPr marL="279400" indent="-279400">
+              <ns1:spcAft>
+                <ns1:spcPts val="800"/>
+              </ns1:spcAft>
+              <ns1:buSzPct val="100000"/>
+              <ns1:buFont typeface="+mj-lt"/>
+              <ns1:buAutoNum type="arabicPeriod" startAt="1"/>
+            </ns1:pPr>
+            <ns1:r>
+              <ns1:rPr lang="en-US" sz="1400" dirty="0">
+                <ns1:solidFill>
+                  <ns1:srgbClr val="1F2933"/>
+                </ns1:solidFill>
+                <ns1:latin typeface="Calibri" pitchFamily="34" charset="0"/>
+                <ns1:ea typeface="Calibri" pitchFamily="34" charset="-122"/>
+                <ns1:cs typeface="Calibri" pitchFamily="34" charset="-120"/>
+              </ns1:rPr>
+              <ns1:t>Three finders you would use on the capture form, and how you tap a button in a test.</ns1:t>
+            </ns1:r>
+            <ns1:endParaRPr lang="en-US" sz="1400" dirty="0"/>
+          </ns1:p>
+          <ns1:p>
+            <ns1:pPr marL="279400" indent="-279400">
+              <ns1:spcAft>
+                <ns1:spcPts val="800"/>
+              </ns1:spcAft>
+              <ns1:buSzPct val="100000"/>
+              <ns1:buFont typeface="+mj-lt"/>
+              <ns1:buAutoNum type="arabicPeriod" startAt="1"/>
+            </ns1:pPr>
+            <ns1:r>
+              <ns1:rPr lang="en-US" sz="1400" dirty="0">
+                <ns1:solidFill>
+                  <ns1:srgbClr val="1F2933"/>
+                </ns1:solidFill>
+                <ns1:latin typeface="Calibri" pitchFamily="34" charset="0"/>
+                <ns1:ea typeface="Calibri" pitchFamily="34" charset="-122"/>
+                <ns1:cs typeface="Calibri" pitchFamily="34" charset="-120"/>
+              </ns1:rPr>
+              <ns1:t>How does the Riverpod testing doc swap the API for a fake in a widget test?</ns1:t>
+            </ns1:r>
+            <ns1:endParaRPr lang="en-US" sz="1400" dirty="0"/>
+          </ns1:p>
+        </ns0:txBody>
+      </ns0:sp>
+      <ns0:sp>
+        <ns0:nvSpPr>
+          <ns0:cNvPr id="11" name="Shape 9"/>
+          <ns0:cNvSpPr/>
+          <ns0:nvPr/>
+        </ns0:nvSpPr>
+        <ns0:spPr>
+          <ns1:xfrm>
+            <ns1:off x="7477963" y="2880360"/>
+            <ns1:ext cx="4162349" cy="3154680"/>
+          </ns1:xfrm>
+          <ns1:prstGeom prst="roundRect">
+            <ns1:avLst>
+              <ns1:gd name="adj" fmla="val 2899"/>
+            </ns1:avLst>
+          </ns1:prstGeom>
+          <ns1:solidFill>
+            <ns1:srgbClr val="FBF6E3"/>
+          </ns1:solidFill>
+          <ns1:ln w="6350">
+            <ns1:solidFill>
+              <ns1:srgbClr val="FBF6E3"/>
+            </ns1:solidFill>
+            <ns1:prstDash val="solid"/>
+          </ns1:ln>
+          <ns1:effectLst>
+            <ns1:outerShdw sx="100000" sy="100000" kx="0" ky="0" algn="bl" rotWithShape="0" blurRad="38100" dist="12700" dir="5400000">
+              <ns1:srgbClr val="000000">
+                <ns1:alpha val="8000"/>
+              </ns1:srgbClr>
+            </ns1:outerShdw>
+          </ns1:effectLst>
+        </ns0:spPr>
+      </ns0:sp>
+      <ns0:sp>
+        <ns0:nvSpPr>
+          <ns0:cNvPr id="12" name="Text 10"/>
+          <ns0:cNvSpPr txBox="1"/>
+          <ns0:nvPr/>
+        </ns0:nvSpPr>
+        <ns0:spPr>
+          <ns1:xfrm>
+            <ns1:off x="7706563" y="3017520"/>
+            <ns1:ext cx="3705149" cy="365760"/>
+          </ns1:xfrm>
+          <ns1:prstGeom prst="rect">
+            <ns1:avLst/>
+          </ns1:prstGeom>
+          <ns1:noFill/>
+          <ns1:ln/>
+        </ns0:spPr>
+        <ns0:txBody>
+          <ns1:bodyPr wrap="square" lIns="0" tIns="0" rIns="0" bIns="0" rtlCol="0" anchor="ctr"/>
+          <ns1:lstStyle/>
+          <ns1:p>
+            <ns1:pPr indent="0" marL="0">
+              <ns1:buNone/>
+            </ns1:pPr>
+            <ns1:r>
+              <ns1:rPr lang="en-US" sz="1400" b="1" dirty="0">
+                <ns1:solidFill>
+                  <ns1:srgbClr val="0B2545"/>
+                </ns1:solidFill>
+                <ns1:latin typeface="Calibri" pitchFamily="34" charset="0"/>
+                <ns1:ea typeface="Calibri" pitchFamily="34" charset="-122"/>
+                <ns1:cs typeface="Calibri" pitchFamily="34" charset="-120"/>
+              </ns1:rPr>
+              <ns1:t>Then</ns1:t>
+            </ns1:r>
+            <ns1:endParaRPr lang="en-US" sz="1400" dirty="0"/>
+          </ns1:p>
+        </ns0:txBody>
+      </ns0:sp>
+      <ns0:sp>
+        <ns0:nvSpPr>
+          <ns0:cNvPr id="13" name="Text 11"/>
+          <ns0:cNvSpPr txBox="1"/>
+          <ns0:nvPr/>
+        </ns0:nvSpPr>
+        <ns0:spPr>
+          <ns1:xfrm>
+            <ns1:off x="7706563" y="3429000"/>
+            <ns1:ext cx="3705149" cy="2514600"/>
+          </ns1:xfrm>
+          <ns1:prstGeom prst="rect">
+            <ns1:avLst/>
+          </ns1:prstGeom>
+          <ns1:noFill/>
+          <ns1:ln/>
+        </ns0:spPr>
+        <ns0:txBody>
+          <ns1:bodyPr wrap="square" lIns="0" tIns="0" rIns="0" bIns="0" rtlCol="0" anchor="t"/>
+          <ns1:lstStyle/>
+          <ns1:p>
+            <ns1:pPr marL="177800" indent="-177800">
+              <ns1:spcAft>
+                <ns1:spcPts val="700"/>
+              </ns1:spcAft>
+              <ns1:buSzPct val="100000"/>
+              <ns1:buChar char="•"/>
+            </ns1:pPr>
+            <ns1:r>
+              <ns1:rPr lang="en-US" sz="1250" dirty="0">
+                <ns1:solidFill>
+                  <ns1:srgbClr val="1F2933"/>
+                </ns1:solidFill>
+                <ns1:latin typeface="Calibri" pitchFamily="34" charset="0"/>
+                <ns1:ea typeface="Calibri" pitchFamily="34" charset="-122"/>
+                <ns1:cs typeface="Calibri" pitchFamily="34" charset="-120"/>
+              </ns1:rPr>
+              <ns1:t>09:00 tomorrow: two delegates present Q2 and Q4 at the whiteboard.</ns1:t>
+            </ns1:r>
+            <ns1:endParaRPr lang="en-US" sz="1250" dirty="0"/>
+          </ns1:p>
+          <ns1:p>
+            <ns1:pPr marL="177800" indent="-177800">
+              <ns1:spcAft>
+                <ns1:spcPts val="700"/>
+              </ns1:spcAft>
+              <ns1:buSzPct val="100000"/>
+              <ns1:buChar char="•"/>
+            </ns1:pPr>
+            <ns1:r>
+              <ns1:rPr lang="en-US" sz="1250" dirty="0">
+                <ns1:solidFill>
+                  <ns1:srgbClr val="1F2933"/>
+                </ns1:solidFill>
+                <ns1:latin typeface="Calibri" pitchFamily="34" charset="0"/>
+                <ns1:ea typeface="Calibri" pitchFamily="34" charset="-122"/>
+                <ns1:cs typeface="Calibri" pitchFamily="34" charset="-120"/>
+              </ns1:rPr>
+              <ns1:t>We write the first widget test live from their answers.</ns1:t>
+            </ns1:r>
+            <ns1:endParaRPr lang="en-US" sz="1250" dirty="0"/>
+          </ns1:p>
+          <ns1:p>
+            <ns1:pPr marL="177800" indent="-177800">
+              <ns1:spcAft>
+                <ns1:spcPts val="700"/>
+              </ns1:spcAft>
+              <ns1:buSzPct val="100000"/>
+              <ns1:buChar char="•"/>
+            </ns1:pPr>
+            <ns1:r>
+              <ns1:rPr lang="en-US" sz="1250" dirty="0">
+                <ns1:solidFill>
+                  <ns1:srgbClr val="1F2933"/>
+                </ns1:solidFill>
+                <ns1:latin typeface="Calibri" pitchFamily="34" charset="0"/>
+                <ns1:ea typeface="Calibri" pitchFamily="34" charset="-122"/>
+                <ns1:cs typeface="Calibri" pitchFamily="34" charset="-120"/>
+              </ns1:rPr>
+              <ns1:t>Tomorrow the afternoon is all release.</ns1:t>
+            </ns1:r>
+            <ns1:endParaRPr lang="en-US" sz="1250" dirty="0"/>
+          </ns1:p>
+        </ns0:txBody>
+      </ns0:sp>
+      <ns0:sp>
+        <ns0:nvSpPr>
+          <ns0:cNvPr id="14" name="Text 12"/>
+          <ns0:cNvSpPr txBox="1"/>
+          <ns0:nvPr/>
+        </ns0:nvSpPr>
+        <ns0:spPr>
+          <ns1:xfrm>
+            <ns1:off x="548640" y="6473952"/>
+            <ns1:ext cx="9994392" cy="274320"/>
+          </ns1:xfrm>
+          <ns1:prstGeom prst="rect">
+            <ns1:avLst/>
+          </ns1:prstGeom>
+          <ns1:noFill/>
+          <ns1:ln/>
+        </ns0:spPr>
+        <ns0:txBody>
+          <ns1:bodyPr wrap="square" lIns="0" tIns="0" rIns="0" bIns="0" rtlCol="0" anchor="ctr"/>
+          <ns1:lstStyle/>
+          <ns1:p>
+            <ns1:pPr indent="0" marL="0">
+              <ns1:buNone/>
+            </ns1:pPr>
+            <ns1:r>
+              <ns1:rPr lang="en-US" sz="900" dirty="0">
+                <ns1:solidFill>
+                  <ns1:srgbClr val="5B6773"/>
+                </ns1:solidFill>
+                <ns1:latin typeface="Calibri" pitchFamily="34" charset="0"/>
+                <ns1:ea typeface="Calibri" pitchFamily="34" charset="-122"/>
+                <ns1:cs typeface="Calibri" pitchFamily="34" charset="-120"/>
+              </ns1:rPr>
+              <ns1:t>MO Integrations · Flutter Training · Day 4 - Data, APIs &amp; Navigation</ns1:t>
+            </ns1:r>
+            <ns1:endParaRPr lang="en-US" sz="900" dirty="0"/>
+          </ns1:p>
+        </ns0:txBody>
+      </ns0:sp>
+      <ns0:sp>
+        <ns0:nvSpPr>
+          <ns0:cNvPr id="15" name="Text 13"/>
+          <ns0:cNvSpPr txBox="1"/>
+          <ns0:nvPr/>
+        </ns0:nvSpPr>
+        <ns0:spPr>
+          <ns1:xfrm>
+            <ns1:off x="10543032" y="6473952"/>
+            <ns1:ext cx="1097280" cy="274320"/>
+          </ns1:xfrm>
+          <ns1:prstGeom prst="rect">
+            <ns1:avLst/>
+          </ns1:prstGeom>
+          <ns1:noFill/>
+          <ns1:ln/>
+        </ns0:spPr>
+        <ns0:txBody>
+          <ns1:bodyPr wrap="square" lIns="0" tIns="0" rIns="0" bIns="0" rtlCol="0" anchor="ctr"/>
+          <ns1:lstStyle/>
+          <ns1:p>
+            <ns1:pPr algn="r" indent="0" marL="0">
+              <ns1:buNone/>
+            </ns1:pPr>
+            <ns1:r>
+              <ns1:rPr lang="en-US" sz="900" dirty="0">
+                <ns1:solidFill>
+                  <ns1:srgbClr val="5B6773"/>
+                </ns1:solidFill>
+                <ns1:latin typeface="Calibri" pitchFamily="34" charset="0"/>
+                <ns1:ea typeface="Calibri" pitchFamily="34" charset="-122"/>
+                <ns1:cs typeface="Calibri" pitchFamily="34" charset="-120"/>
+              </ns1:rPr>
+              <ns1:t>33</ns1:t>
+            </ns1:r>
+            <ns1:endParaRPr lang="en-US" sz="900" dirty="0"/>
+          </ns1:p>
+        </ns0:txBody>
+      </ns0:sp>
+    </ns0:spTree>
+  </ns0:cSld>
+  <ns0:clrMapOvr>
+    <ns1:masterClrMapping/>
+  </ns0:clrMapOvr>
+</ns0:sld>
 </file>
 
 <file path=ppt/slides/slide35.xml><?xml version="1.0" encoding="utf-8"?>
@@ -25481,1289 +21199,6 @@
                 <a:cs typeface="Calibri" pitchFamily="34" charset="-120"/>
               </a:rPr>
               <a:t>34</a:t>
-            </a:r>
-            <a:endParaRPr lang="en-US" sz="900" dirty="0"/>
-          </a:p>
-        </p:txBody>
-      </p:sp>
-    </p:spTree>
-  </p:cSld>
-  <p:clrMapOvr>
-    <a:masterClrMapping/>
-  </p:clrMapOvr>
-</p:sld>
-</file>
-
-<file path=ppt/slides/slide36.xml><?xml version="1.0" encoding="utf-8"?>
-<p:sld xmlns:a="http://schemas.openxmlformats.org/drawingml/2006/main" xmlns:r="http://schemas.openxmlformats.org/officeDocument/2006/relationships" xmlns:p="http://schemas.openxmlformats.org/presentationml/2006/main">
-  <p:cSld name="Slide 36">
-    <p:bg>
-      <p:bgPr>
-        <a:solidFill>
-          <a:srgbClr val="FFFFFF"/>
-        </a:solidFill>
-      </p:bgPr>
-    </p:bg>
-    <p:spTree>
-      <p:nvGrpSpPr>
-        <p:cNvPr id="1" name=""/>
-        <p:cNvGrpSpPr/>
-        <p:nvPr/>
-      </p:nvGrpSpPr>
-      <p:grpSpPr>
-        <a:xfrm>
-          <a:off x="0" y="0"/>
-          <a:ext cx="0" cy="0"/>
-          <a:chOff x="0" y="0"/>
-          <a:chExt cx="0" cy="0"/>
-        </a:xfrm>
-      </p:grpSpPr>
-      <p:sp>
-        <p:nvSpPr>
-          <p:cNvPr id="2" name="Text 0"/>
-          <p:cNvSpPr txBox="1"/>
-          <p:nvPr/>
-        </p:nvSpPr>
-        <p:spPr>
-          <a:xfrm>
-            <a:off x="548640" y="365760"/>
-            <a:ext cx="11091672" cy="731520"/>
-          </a:xfrm>
-          <a:prstGeom prst="rect">
-            <a:avLst/>
-          </a:prstGeom>
-          <a:noFill/>
-          <a:ln/>
-        </p:spPr>
-        <p:txBody>
-          <a:bodyPr wrap="square" lIns="0" tIns="0" rIns="0" bIns="0" rtlCol="0" anchor="ctr"/>
-          <a:lstStyle/>
-          <a:p>
-            <a:pPr indent="0" marL="0">
-              <a:buNone/>
-            </a:pPr>
-            <a:r>
-              <a:rPr lang="en-US" sz="3000" b="1" dirty="0">
-                <a:solidFill>
-                  <a:srgbClr val="0B2545"/>
-                </a:solidFill>
-                <a:latin typeface="Calibri" pitchFamily="34" charset="0"/>
-                <a:ea typeface="Calibri" pitchFamily="34" charset="-122"/>
-                <a:cs typeface="Calibri" pitchFamily="34" charset="-120"/>
-              </a:rPr>
-              <a:t>PLAN B · When it breaks in class</a:t>
-            </a:r>
-            <a:endParaRPr lang="en-US" sz="3000" dirty="0"/>
-          </a:p>
-        </p:txBody>
-      </p:sp>
-      <p:graphicFrame>
-        <p:nvGraphicFramePr>
-          <p:cNvPr id="37" name="Table 0"/>
-          <p:cNvGraphicFramePr>
-            <a:graphicFrameLocks noGrp="1"/>
-          </p:cNvGraphicFramePr>
-          <p:nvPr>
-            <p:extLst>
-              <p:ext uri="{D42A27DB-BD31-4B8C-83A1-F6EECF244321}">
-                <p14:modId xmlns:p14="http://schemas.microsoft.com/office/powerpoint/2010/main" val="1579011935"/>
-              </p:ext>
-            </p:extLst>
-          </p:nvPr>
-        </p:nvGraphicFramePr>
-        <p:xfrm>
-          <a:off x="548640" y="1325880"/>
-          <a:ext cx="11091672" cy="914400"/>
-        </p:xfrm>
-        <a:graphic>
-          <a:graphicData uri="http://schemas.openxmlformats.org/drawingml/2006/table">
-            <a:tbl>
-              <a:tblPr/>
-              <a:tblGrid>
-                <a:gridCol w="3993002"/>
-                <a:gridCol w="7098670"/>
-              </a:tblGrid>
-              <a:tr h="0">
-                <a:tc>
-                  <a:txBody>
-                    <a:bodyPr/>
-                    <a:lstStyle/>
-                    <a:p>
-                      <a:pPr indent="0" marL="0">
-                        <a:buNone/>
-                      </a:pPr>
-                      <a:r>
-                        <a:rPr lang="en-US" sz="1050" b="1" dirty="0">
-                          <a:solidFill>
-                            <a:srgbClr val="FFFFFF"/>
-                          </a:solidFill>
-                          <a:latin typeface="Calibri" pitchFamily="34" charset="0"/>
-                          <a:ea typeface="Calibri" pitchFamily="34" charset="-122"/>
-                          <a:cs typeface="Calibri" pitchFamily="34" charset="-120"/>
-                        </a:rPr>
-                        <a:t>If this happens</a:t>
-                      </a:r>
-                      <a:endParaRPr lang="en-US" sz="1050" dirty="0">
-                        <a:latin typeface="Calibri" charset="0"/>
-                        <a:ea typeface="Calibri" charset="0"/>
-                        <a:cs typeface="Calibri" charset="0"/>
-                      </a:endParaRPr>
-                    </a:p>
-                  </a:txBody>
-                  <a:tcPr marL="54864" marR="54864" marT="54864" marB="54864" anchor="ctr">
-                    <a:lnL w="6350" cap="flat" cmpd="sng" algn="ctr">
-                      <a:solidFill>
-                        <a:srgbClr val="D9DEE3"/>
-                      </a:solidFill>
-                      <a:prstDash val="solid"/>
-                      <a:round/>
-                      <a:headEnd type="none" w="med" len="med"/>
-                      <a:tailEnd type="none" w="med" len="med"/>
-                    </a:lnL>
-                    <a:lnR w="6350" cap="flat" cmpd="sng" algn="ctr">
-                      <a:solidFill>
-                        <a:srgbClr val="D9DEE3"/>
-                      </a:solidFill>
-                      <a:prstDash val="solid"/>
-                      <a:round/>
-                      <a:headEnd type="none" w="med" len="med"/>
-                      <a:tailEnd type="none" w="med" len="med"/>
-                    </a:lnR>
-                    <a:lnT w="6350" cap="flat" cmpd="sng" algn="ctr">
-                      <a:solidFill>
-                        <a:srgbClr val="D9DEE3"/>
-                      </a:solidFill>
-                      <a:prstDash val="solid"/>
-                      <a:round/>
-                      <a:headEnd type="none" w="med" len="med"/>
-                      <a:tailEnd type="none" w="med" len="med"/>
-                    </a:lnT>
-                    <a:lnB w="6350" cap="flat" cmpd="sng" algn="ctr">
-                      <a:solidFill>
-                        <a:srgbClr val="D9DEE3"/>
-                      </a:solidFill>
-                      <a:prstDash val="solid"/>
-                      <a:round/>
-                      <a:headEnd type="none" w="med" len="med"/>
-                      <a:tailEnd type="none" w="med" len="med"/>
-                    </a:lnB>
-                    <a:solidFill>
-                      <a:srgbClr val="0B2545"/>
-                    </a:solidFill>
-                  </a:tcPr>
-                </a:tc>
-                <a:tc>
-                  <a:txBody>
-                    <a:bodyPr/>
-                    <a:lstStyle/>
-                    <a:p>
-                      <a:pPr indent="0" marL="0">
-                        <a:buNone/>
-                      </a:pPr>
-                      <a:r>
-                        <a:rPr lang="en-US" sz="1050" b="1" dirty="0">
-                          <a:solidFill>
-                            <a:srgbClr val="FFFFFF"/>
-                          </a:solidFill>
-                          <a:latin typeface="Calibri" pitchFamily="34" charset="0"/>
-                          <a:ea typeface="Calibri" pitchFamily="34" charset="-122"/>
-                          <a:cs typeface="Calibri" pitchFamily="34" charset="-120"/>
-                        </a:rPr>
-                        <a:t>Do this instead</a:t>
-                      </a:r>
-                      <a:endParaRPr lang="en-US" sz="1050" dirty="0">
-                        <a:latin typeface="Calibri" charset="0"/>
-                        <a:ea typeface="Calibri" charset="0"/>
-                        <a:cs typeface="Calibri" charset="0"/>
-                      </a:endParaRPr>
-                    </a:p>
-                  </a:txBody>
-                  <a:tcPr marL="54864" marR="54864" marT="54864" marB="54864" anchor="ctr">
-                    <a:lnL w="6350" cap="flat" cmpd="sng" algn="ctr">
-                      <a:solidFill>
-                        <a:srgbClr val="D9DEE3"/>
-                      </a:solidFill>
-                      <a:prstDash val="solid"/>
-                      <a:round/>
-                      <a:headEnd type="none" w="med" len="med"/>
-                      <a:tailEnd type="none" w="med" len="med"/>
-                    </a:lnL>
-                    <a:lnR w="6350" cap="flat" cmpd="sng" algn="ctr">
-                      <a:solidFill>
-                        <a:srgbClr val="D9DEE3"/>
-                      </a:solidFill>
-                      <a:prstDash val="solid"/>
-                      <a:round/>
-                      <a:headEnd type="none" w="med" len="med"/>
-                      <a:tailEnd type="none" w="med" len="med"/>
-                    </a:lnR>
-                    <a:lnT w="6350" cap="flat" cmpd="sng" algn="ctr">
-                      <a:solidFill>
-                        <a:srgbClr val="D9DEE3"/>
-                      </a:solidFill>
-                      <a:prstDash val="solid"/>
-                      <a:round/>
-                      <a:headEnd type="none" w="med" len="med"/>
-                      <a:tailEnd type="none" w="med" len="med"/>
-                    </a:lnT>
-                    <a:lnB w="6350" cap="flat" cmpd="sng" algn="ctr">
-                      <a:solidFill>
-                        <a:srgbClr val="D9DEE3"/>
-                      </a:solidFill>
-                      <a:prstDash val="solid"/>
-                      <a:round/>
-                      <a:headEnd type="none" w="med" len="med"/>
-                      <a:tailEnd type="none" w="med" len="med"/>
-                    </a:lnB>
-                    <a:solidFill>
-                      <a:srgbClr val="0B2545"/>
-                    </a:solidFill>
-                  </a:tcPr>
-                </a:tc>
-              </a:tr>
-              <a:tr h="0">
-                <a:tc>
-                  <a:txBody>
-                    <a:bodyPr/>
-                    <a:lstStyle/>
-                    <a:p>
-                      <a:pPr indent="0" marL="0">
-                        <a:buNone/>
-                      </a:pPr>
-                      <a:r>
-                        <a:rPr lang="en-US" sz="1050" b="1" dirty="0">
-                          <a:solidFill>
-                            <a:srgbClr val="1F2933"/>
-                          </a:solidFill>
-                          <a:latin typeface="Calibri" pitchFamily="34" charset="0"/>
-                          <a:ea typeface="Calibri" pitchFamily="34" charset="-122"/>
-                          <a:cs typeface="Calibri" pitchFamily="34" charset="-120"/>
-                        </a:rPr>
-                        <a:t>Emulator cannot reach the mock API</a:t>
-                      </a:r>
-                      <a:endParaRPr lang="en-US" sz="1050" dirty="0">
-                        <a:latin typeface="Calibri" charset="0"/>
-                        <a:ea typeface="Calibri" charset="0"/>
-                        <a:cs typeface="Calibri" charset="0"/>
-                      </a:endParaRPr>
-                    </a:p>
-                  </a:txBody>
-                  <a:tcPr marL="54864" marR="54864" marT="54864" marB="54864" anchor="ctr">
-                    <a:lnL w="6350" cap="flat" cmpd="sng" algn="ctr">
-                      <a:solidFill>
-                        <a:srgbClr val="D9DEE3"/>
-                      </a:solidFill>
-                      <a:prstDash val="solid"/>
-                      <a:round/>
-                      <a:headEnd type="none" w="med" len="med"/>
-                      <a:tailEnd type="none" w="med" len="med"/>
-                    </a:lnL>
-                    <a:lnR w="6350" cap="flat" cmpd="sng" algn="ctr">
-                      <a:solidFill>
-                        <a:srgbClr val="D9DEE3"/>
-                      </a:solidFill>
-                      <a:prstDash val="solid"/>
-                      <a:round/>
-                      <a:headEnd type="none" w="med" len="med"/>
-                      <a:tailEnd type="none" w="med" len="med"/>
-                    </a:lnR>
-                    <a:lnT w="6350" cap="flat" cmpd="sng" algn="ctr">
-                      <a:solidFill>
-                        <a:srgbClr val="D9DEE3"/>
-                      </a:solidFill>
-                      <a:prstDash val="solid"/>
-                      <a:round/>
-                      <a:headEnd type="none" w="med" len="med"/>
-                      <a:tailEnd type="none" w="med" len="med"/>
-                    </a:lnT>
-                    <a:lnB w="6350" cap="flat" cmpd="sng" algn="ctr">
-                      <a:solidFill>
-                        <a:srgbClr val="D9DEE3"/>
-                      </a:solidFill>
-                      <a:prstDash val="solid"/>
-                      <a:round/>
-                      <a:headEnd type="none" w="med" len="med"/>
-                      <a:tailEnd type="none" w="med" len="med"/>
-                    </a:lnB>
-                    <a:solidFill>
-                      <a:srgbClr val="FFFFFF"/>
-                    </a:solidFill>
-                  </a:tcPr>
-                </a:tc>
-                <a:tc>
-                  <a:txBody>
-                    <a:bodyPr/>
-                    <a:lstStyle/>
-                    <a:p>
-                      <a:pPr indent="0" marL="0">
-                        <a:buNone/>
-                      </a:pPr>
-                      <a:r>
-                        <a:rPr lang="en-US" sz="1050" dirty="0">
-                          <a:solidFill>
-                            <a:srgbClr val="1F2933"/>
-                          </a:solidFill>
-                          <a:latin typeface="Calibri" pitchFamily="34" charset="0"/>
-                          <a:ea typeface="Calibri" pitchFamily="34" charset="-122"/>
-                          <a:cs typeface="Calibri" pitchFamily="34" charset="-120"/>
-                        </a:rPr>
-                        <a:t>In order: 1. Run the app in Chrome and point at http://localhost:8080.  2. Physical phone + the laptop LAN IP.  3. Revert quoteServiceProvider to FakeQuoteService - every other Day 4 objective (routing, JSON, storage, the mini-project) still works.</a:t>
-                      </a:r>
-                      <a:endParaRPr lang="en-US" sz="1050" dirty="0">
-                        <a:latin typeface="Calibri" charset="0"/>
-                        <a:ea typeface="Calibri" charset="0"/>
-                        <a:cs typeface="Calibri" charset="0"/>
-                      </a:endParaRPr>
-                    </a:p>
-                  </a:txBody>
-                  <a:tcPr marL="54864" marR="54864" marT="54864" marB="54864" anchor="ctr">
-                    <a:lnL w="6350" cap="flat" cmpd="sng" algn="ctr">
-                      <a:solidFill>
-                        <a:srgbClr val="D9DEE3"/>
-                      </a:solidFill>
-                      <a:prstDash val="solid"/>
-                      <a:round/>
-                      <a:headEnd type="none" w="med" len="med"/>
-                      <a:tailEnd type="none" w="med" len="med"/>
-                    </a:lnL>
-                    <a:lnR w="6350" cap="flat" cmpd="sng" algn="ctr">
-                      <a:solidFill>
-                        <a:srgbClr val="D9DEE3"/>
-                      </a:solidFill>
-                      <a:prstDash val="solid"/>
-                      <a:round/>
-                      <a:headEnd type="none" w="med" len="med"/>
-                      <a:tailEnd type="none" w="med" len="med"/>
-                    </a:lnR>
-                    <a:lnT w="6350" cap="flat" cmpd="sng" algn="ctr">
-                      <a:solidFill>
-                        <a:srgbClr val="D9DEE3"/>
-                      </a:solidFill>
-                      <a:prstDash val="solid"/>
-                      <a:round/>
-                      <a:headEnd type="none" w="med" len="med"/>
-                      <a:tailEnd type="none" w="med" len="med"/>
-                    </a:lnT>
-                    <a:lnB w="6350" cap="flat" cmpd="sng" algn="ctr">
-                      <a:solidFill>
-                        <a:srgbClr val="D9DEE3"/>
-                      </a:solidFill>
-                      <a:prstDash val="solid"/>
-                      <a:round/>
-                      <a:headEnd type="none" w="med" len="med"/>
-                      <a:tailEnd type="none" w="med" len="med"/>
-                    </a:lnB>
-                    <a:solidFill>
-                      <a:srgbClr val="FFFFFF"/>
-                    </a:solidFill>
-                  </a:tcPr>
-                </a:tc>
-              </a:tr>
-              <a:tr h="0">
-                <a:tc>
-                  <a:txBody>
-                    <a:bodyPr/>
-                    <a:lstStyle/>
-                    <a:p>
-                      <a:pPr indent="0" marL="0">
-                        <a:buNone/>
-                      </a:pPr>
-                      <a:r>
-                        <a:rPr lang="en-US" sz="1050" b="1" dirty="0">
-                          <a:solidFill>
-                            <a:srgbClr val="1F2933"/>
-                          </a:solidFill>
-                          <a:latin typeface="Calibri" pitchFamily="34" charset="0"/>
-                          <a:ea typeface="Calibri" pitchFamily="34" charset="-122"/>
-                          <a:cs typeface="Calibri" pitchFamily="34" charset="-120"/>
-                        </a:rPr>
-                        <a:t>Windows firewall blocks the mock server</a:t>
-                      </a:r>
-                      <a:endParaRPr lang="en-US" sz="1050" dirty="0">
-                        <a:latin typeface="Calibri" charset="0"/>
-                        <a:ea typeface="Calibri" charset="0"/>
-                        <a:cs typeface="Calibri" charset="0"/>
-                      </a:endParaRPr>
-                    </a:p>
-                  </a:txBody>
-                  <a:tcPr marL="54864" marR="54864" marT="54864" marB="54864" anchor="ctr">
-                    <a:lnL w="6350" cap="flat" cmpd="sng" algn="ctr">
-                      <a:solidFill>
-                        <a:srgbClr val="D9DEE3"/>
-                      </a:solidFill>
-                      <a:prstDash val="solid"/>
-                      <a:round/>
-                      <a:headEnd type="none" w="med" len="med"/>
-                      <a:tailEnd type="none" w="med" len="med"/>
-                    </a:lnL>
-                    <a:lnR w="6350" cap="flat" cmpd="sng" algn="ctr">
-                      <a:solidFill>
-                        <a:srgbClr val="D9DEE3"/>
-                      </a:solidFill>
-                      <a:prstDash val="solid"/>
-                      <a:round/>
-                      <a:headEnd type="none" w="med" len="med"/>
-                      <a:tailEnd type="none" w="med" len="med"/>
-                    </a:lnR>
-                    <a:lnT w="6350" cap="flat" cmpd="sng" algn="ctr">
-                      <a:solidFill>
-                        <a:srgbClr val="D9DEE3"/>
-                      </a:solidFill>
-                      <a:prstDash val="solid"/>
-                      <a:round/>
-                      <a:headEnd type="none" w="med" len="med"/>
-                      <a:tailEnd type="none" w="med" len="med"/>
-                    </a:lnT>
-                    <a:lnB w="6350" cap="flat" cmpd="sng" algn="ctr">
-                      <a:solidFill>
-                        <a:srgbClr val="D9DEE3"/>
-                      </a:solidFill>
-                      <a:prstDash val="solid"/>
-                      <a:round/>
-                      <a:headEnd type="none" w="med" len="med"/>
-                      <a:tailEnd type="none" w="med" len="med"/>
-                    </a:lnB>
-                    <a:solidFill>
-                      <a:srgbClr val="F3F5F8"/>
-                    </a:solidFill>
-                  </a:tcPr>
-                </a:tc>
-                <a:tc>
-                  <a:txBody>
-                    <a:bodyPr/>
-                    <a:lstStyle/>
-                    <a:p>
-                      <a:pPr indent="0" marL="0">
-                        <a:buNone/>
-                      </a:pPr>
-                      <a:r>
-                        <a:rPr lang="en-US" sz="1050" dirty="0">
-                          <a:solidFill>
-                            <a:srgbClr val="1F2933"/>
-                          </a:solidFill>
-                          <a:latin typeface="Calibri" pitchFamily="34" charset="0"/>
-                          <a:ea typeface="Calibri" pitchFamily="34" charset="-122"/>
-                          <a:cs typeface="Calibri" pitchFamily="34" charset="-120"/>
-                        </a:rPr>
-                        <a:t>Windows Security → Firewall → Allow an app → dart.exe on private networks. If IT blocks that, use fallback 3 above; do not lose twenty minutes to it.</a:t>
-                      </a:r>
-                      <a:endParaRPr lang="en-US" sz="1050" dirty="0">
-                        <a:latin typeface="Calibri" charset="0"/>
-                        <a:ea typeface="Calibri" charset="0"/>
-                        <a:cs typeface="Calibri" charset="0"/>
-                      </a:endParaRPr>
-                    </a:p>
-                  </a:txBody>
-                  <a:tcPr marL="54864" marR="54864" marT="54864" marB="54864" anchor="ctr">
-                    <a:lnL w="6350" cap="flat" cmpd="sng" algn="ctr">
-                      <a:solidFill>
-                        <a:srgbClr val="D9DEE3"/>
-                      </a:solidFill>
-                      <a:prstDash val="solid"/>
-                      <a:round/>
-                      <a:headEnd type="none" w="med" len="med"/>
-                      <a:tailEnd type="none" w="med" len="med"/>
-                    </a:lnL>
-                    <a:lnR w="6350" cap="flat" cmpd="sng" algn="ctr">
-                      <a:solidFill>
-                        <a:srgbClr val="D9DEE3"/>
-                      </a:solidFill>
-                      <a:prstDash val="solid"/>
-                      <a:round/>
-                      <a:headEnd type="none" w="med" len="med"/>
-                      <a:tailEnd type="none" w="med" len="med"/>
-                    </a:lnR>
-                    <a:lnT w="6350" cap="flat" cmpd="sng" algn="ctr">
-                      <a:solidFill>
-                        <a:srgbClr val="D9DEE3"/>
-                      </a:solidFill>
-                      <a:prstDash val="solid"/>
-                      <a:round/>
-                      <a:headEnd type="none" w="med" len="med"/>
-                      <a:tailEnd type="none" w="med" len="med"/>
-                    </a:lnT>
-                    <a:lnB w="6350" cap="flat" cmpd="sng" algn="ctr">
-                      <a:solidFill>
-                        <a:srgbClr val="D9DEE3"/>
-                      </a:solidFill>
-                      <a:prstDash val="solid"/>
-                      <a:round/>
-                      <a:headEnd type="none" w="med" len="med"/>
-                      <a:tailEnd type="none" w="med" len="med"/>
-                    </a:lnB>
-                    <a:solidFill>
-                      <a:srgbClr val="F3F5F8"/>
-                    </a:solidFill>
-                  </a:tcPr>
-                </a:tc>
-              </a:tr>
-              <a:tr h="0">
-                <a:tc>
-                  <a:txBody>
-                    <a:bodyPr/>
-                    <a:lstStyle/>
-                    <a:p>
-                      <a:pPr indent="0" marL="0">
-                        <a:buNone/>
-                      </a:pPr>
-                      <a:r>
-                        <a:rPr lang="en-US" sz="950" b="1" dirty="0">
-                          <a:solidFill>
-                            <a:srgbClr val="1F2933"/>
-                          </a:solidFill>
-                          <a:latin typeface="Courier New" pitchFamily="34" charset="0"/>
-                          <a:ea typeface="Courier New" pitchFamily="34" charset="-122"/>
-                          <a:cs typeface="Courier New" pitchFamily="34" charset="-120"/>
-                        </a:rPr>
-                        <a:t>build_runner fails or hangs</a:t>
-                      </a:r>
-                      <a:endParaRPr lang="en-US" sz="950" dirty="0">
-                        <a:latin typeface="Courier New" charset="0"/>
-                        <a:ea typeface="Courier New" charset="0"/>
-                        <a:cs typeface="Courier New" charset="0"/>
-                      </a:endParaRPr>
-                    </a:p>
-                  </a:txBody>
-                  <a:tcPr marL="54864" marR="54864" marT="54864" marB="54864" anchor="ctr">
-                    <a:lnL w="6350" cap="flat" cmpd="sng" algn="ctr">
-                      <a:solidFill>
-                        <a:srgbClr val="D9DEE3"/>
-                      </a:solidFill>
-                      <a:prstDash val="solid"/>
-                      <a:round/>
-                      <a:headEnd type="none" w="med" len="med"/>
-                      <a:tailEnd type="none" w="med" len="med"/>
-                    </a:lnL>
-                    <a:lnR w="6350" cap="flat" cmpd="sng" algn="ctr">
-                      <a:solidFill>
-                        <a:srgbClr val="D9DEE3"/>
-                      </a:solidFill>
-                      <a:prstDash val="solid"/>
-                      <a:round/>
-                      <a:headEnd type="none" w="med" len="med"/>
-                      <a:tailEnd type="none" w="med" len="med"/>
-                    </a:lnR>
-                    <a:lnT w="6350" cap="flat" cmpd="sng" algn="ctr">
-                      <a:solidFill>
-                        <a:srgbClr val="D9DEE3"/>
-                      </a:solidFill>
-                      <a:prstDash val="solid"/>
-                      <a:round/>
-                      <a:headEnd type="none" w="med" len="med"/>
-                      <a:tailEnd type="none" w="med" len="med"/>
-                    </a:lnT>
-                    <a:lnB w="6350" cap="flat" cmpd="sng" algn="ctr">
-                      <a:solidFill>
-                        <a:srgbClr val="D9DEE3"/>
-                      </a:solidFill>
-                      <a:prstDash val="solid"/>
-                      <a:round/>
-                      <a:headEnd type="none" w="med" len="med"/>
-                      <a:tailEnd type="none" w="med" len="med"/>
-                    </a:lnB>
-                    <a:solidFill>
-                      <a:srgbClr val="FFFFFF"/>
-                    </a:solidFill>
-                  </a:tcPr>
-                </a:tc>
-                <a:tc>
-                  <a:txBody>
-                    <a:bodyPr/>
-                    <a:lstStyle/>
-                    <a:p>
-                      <a:pPr indent="0" marL="0">
-                        <a:buNone/>
-                      </a:pPr>
-                      <a:r>
-                        <a:rPr lang="en-US" sz="1050" dirty="0">
-                          <a:solidFill>
-                            <a:srgbClr val="1F2933"/>
-                          </a:solidFill>
-                          <a:latin typeface="Calibri" pitchFamily="34" charset="0"/>
-                          <a:ea typeface="Calibri" pitchFamily="34" charset="-122"/>
-                          <a:cs typeface="Calibri" pitchFamily="34" charset="-120"/>
-                        </a:rPr>
-                        <a:t>Delete .dart_tool/build, rerun with --delete-conflicting-outputs. Still failing → use the hand-written toJson/fromJson from the earlier slide. The lab passes either way; code-gen is a convenience, not a requirement.</a:t>
-                      </a:r>
-                      <a:endParaRPr lang="en-US" sz="1050" dirty="0">
-                        <a:latin typeface="Calibri" charset="0"/>
-                        <a:ea typeface="Calibri" charset="0"/>
-                        <a:cs typeface="Calibri" charset="0"/>
-                      </a:endParaRPr>
-                    </a:p>
-                  </a:txBody>
-                  <a:tcPr marL="54864" marR="54864" marT="54864" marB="54864" anchor="ctr">
-                    <a:lnL w="6350" cap="flat" cmpd="sng" algn="ctr">
-                      <a:solidFill>
-                        <a:srgbClr val="D9DEE3"/>
-                      </a:solidFill>
-                      <a:prstDash val="solid"/>
-                      <a:round/>
-                      <a:headEnd type="none" w="med" len="med"/>
-                      <a:tailEnd type="none" w="med" len="med"/>
-                    </a:lnL>
-                    <a:lnR w="6350" cap="flat" cmpd="sng" algn="ctr">
-                      <a:solidFill>
-                        <a:srgbClr val="D9DEE3"/>
-                      </a:solidFill>
-                      <a:prstDash val="solid"/>
-                      <a:round/>
-                      <a:headEnd type="none" w="med" len="med"/>
-                      <a:tailEnd type="none" w="med" len="med"/>
-                    </a:lnR>
-                    <a:lnT w="6350" cap="flat" cmpd="sng" algn="ctr">
-                      <a:solidFill>
-                        <a:srgbClr val="D9DEE3"/>
-                      </a:solidFill>
-                      <a:prstDash val="solid"/>
-                      <a:round/>
-                      <a:headEnd type="none" w="med" len="med"/>
-                      <a:tailEnd type="none" w="med" len="med"/>
-                    </a:lnT>
-                    <a:lnB w="6350" cap="flat" cmpd="sng" algn="ctr">
-                      <a:solidFill>
-                        <a:srgbClr val="D9DEE3"/>
-                      </a:solidFill>
-                      <a:prstDash val="solid"/>
-                      <a:round/>
-                      <a:headEnd type="none" w="med" len="med"/>
-                      <a:tailEnd type="none" w="med" len="med"/>
-                    </a:lnB>
-                    <a:solidFill>
-                      <a:srgbClr val="FFFFFF"/>
-                    </a:solidFill>
-                  </a:tcPr>
-                </a:tc>
-              </a:tr>
-              <a:tr h="0">
-                <a:tc>
-                  <a:txBody>
-                    <a:bodyPr/>
-                    <a:lstStyle/>
-                    <a:p>
-                      <a:pPr indent="0" marL="0">
-                        <a:buNone/>
-                      </a:pPr>
-                      <a:r>
-                        <a:rPr lang="en-US" sz="950" b="1" dirty="0">
-                          <a:solidFill>
-                            <a:srgbClr val="1F2933"/>
-                          </a:solidFill>
-                          <a:latin typeface="Courier New" pitchFamily="34" charset="0"/>
-                          <a:ea typeface="Courier New" pitchFamily="34" charset="-122"/>
-                          <a:cs typeface="Courier New" pitchFamily="34" charset="-120"/>
-                        </a:rPr>
-                        <a:t>sqflite unavailable (Chrome, desktop)</a:t>
-                      </a:r>
-                      <a:endParaRPr lang="en-US" sz="950" dirty="0">
-                        <a:latin typeface="Courier New" charset="0"/>
-                        <a:ea typeface="Courier New" charset="0"/>
-                        <a:cs typeface="Courier New" charset="0"/>
-                      </a:endParaRPr>
-                    </a:p>
-                  </a:txBody>
-                  <a:tcPr marL="54864" marR="54864" marT="54864" marB="54864" anchor="ctr">
-                    <a:lnL w="6350" cap="flat" cmpd="sng" algn="ctr">
-                      <a:solidFill>
-                        <a:srgbClr val="D9DEE3"/>
-                      </a:solidFill>
-                      <a:prstDash val="solid"/>
-                      <a:round/>
-                      <a:headEnd type="none" w="med" len="med"/>
-                      <a:tailEnd type="none" w="med" len="med"/>
-                    </a:lnL>
-                    <a:lnR w="6350" cap="flat" cmpd="sng" algn="ctr">
-                      <a:solidFill>
-                        <a:srgbClr val="D9DEE3"/>
-                      </a:solidFill>
-                      <a:prstDash val="solid"/>
-                      <a:round/>
-                      <a:headEnd type="none" w="med" len="med"/>
-                      <a:tailEnd type="none" w="med" len="med"/>
-                    </a:lnR>
-                    <a:lnT w="6350" cap="flat" cmpd="sng" algn="ctr">
-                      <a:solidFill>
-                        <a:srgbClr val="D9DEE3"/>
-                      </a:solidFill>
-                      <a:prstDash val="solid"/>
-                      <a:round/>
-                      <a:headEnd type="none" w="med" len="med"/>
-                      <a:tailEnd type="none" w="med" len="med"/>
-                    </a:lnT>
-                    <a:lnB w="6350" cap="flat" cmpd="sng" algn="ctr">
-                      <a:solidFill>
-                        <a:srgbClr val="D9DEE3"/>
-                      </a:solidFill>
-                      <a:prstDash val="solid"/>
-                      <a:round/>
-                      <a:headEnd type="none" w="med" len="med"/>
-                      <a:tailEnd type="none" w="med" len="med"/>
-                    </a:lnB>
-                    <a:solidFill>
-                      <a:srgbClr val="F3F5F8"/>
-                    </a:solidFill>
-                  </a:tcPr>
-                </a:tc>
-                <a:tc>
-                  <a:txBody>
-                    <a:bodyPr/>
-                    <a:lstStyle/>
-                    <a:p>
-                      <a:pPr indent="0" marL="0">
-                        <a:buNone/>
-                      </a:pPr>
-                      <a:r>
-                        <a:rPr lang="en-US" sz="1050" dirty="0">
-                          <a:solidFill>
-                            <a:srgbClr val="1F2933"/>
-                          </a:solidFill>
-                          <a:latin typeface="Calibri" pitchFamily="34" charset="0"/>
-                          <a:ea typeface="Calibri" pitchFamily="34" charset="-122"/>
-                          <a:cs typeface="Calibri" pitchFamily="34" charset="-120"/>
-                        </a:rPr>
-                        <a:t>InMemoryQuoteRepository override - Appendix E. Identical repository interface, so every other line of the lab is unchanged.</a:t>
-                      </a:r>
-                      <a:endParaRPr lang="en-US" sz="1050" dirty="0">
-                        <a:latin typeface="Calibri" charset="0"/>
-                        <a:ea typeface="Calibri" charset="0"/>
-                        <a:cs typeface="Calibri" charset="0"/>
-                      </a:endParaRPr>
-                    </a:p>
-                  </a:txBody>
-                  <a:tcPr marL="54864" marR="54864" marT="54864" marB="54864" anchor="ctr">
-                    <a:lnL w="6350" cap="flat" cmpd="sng" algn="ctr">
-                      <a:solidFill>
-                        <a:srgbClr val="D9DEE3"/>
-                      </a:solidFill>
-                      <a:prstDash val="solid"/>
-                      <a:round/>
-                      <a:headEnd type="none" w="med" len="med"/>
-                      <a:tailEnd type="none" w="med" len="med"/>
-                    </a:lnL>
-                    <a:lnR w="6350" cap="flat" cmpd="sng" algn="ctr">
-                      <a:solidFill>
-                        <a:srgbClr val="D9DEE3"/>
-                      </a:solidFill>
-                      <a:prstDash val="solid"/>
-                      <a:round/>
-                      <a:headEnd type="none" w="med" len="med"/>
-                      <a:tailEnd type="none" w="med" len="med"/>
-                    </a:lnR>
-                    <a:lnT w="6350" cap="flat" cmpd="sng" algn="ctr">
-                      <a:solidFill>
-                        <a:srgbClr val="D9DEE3"/>
-                      </a:solidFill>
-                      <a:prstDash val="solid"/>
-                      <a:round/>
-                      <a:headEnd type="none" w="med" len="med"/>
-                      <a:tailEnd type="none" w="med" len="med"/>
-                    </a:lnT>
-                    <a:lnB w="6350" cap="flat" cmpd="sng" algn="ctr">
-                      <a:solidFill>
-                        <a:srgbClr val="D9DEE3"/>
-                      </a:solidFill>
-                      <a:prstDash val="solid"/>
-                      <a:round/>
-                      <a:headEnd type="none" w="med" len="med"/>
-                      <a:tailEnd type="none" w="med" len="med"/>
-                    </a:lnB>
-                    <a:solidFill>
-                      <a:srgbClr val="F3F5F8"/>
-                    </a:solidFill>
-                  </a:tcPr>
-                </a:tc>
-              </a:tr>
-              <a:tr h="0">
-                <a:tc>
-                  <a:txBody>
-                    <a:bodyPr/>
-                    <a:lstStyle/>
-                    <a:p>
-                      <a:pPr indent="0" marL="0">
-                        <a:buNone/>
-                      </a:pPr>
-                      <a:r>
-                        <a:rPr lang="en-US" sz="1050" b="1" dirty="0">
-                          <a:solidFill>
-                            <a:srgbClr val="1F2933"/>
-                          </a:solidFill>
-                          <a:latin typeface="Calibri" pitchFamily="34" charset="0"/>
-                          <a:ea typeface="Calibri" pitchFamily="34" charset="-122"/>
-                          <a:cs typeface="Calibri" pitchFamily="34" charset="-120"/>
-                        </a:rPr>
-                        <a:t>Deep link will not fire</a:t>
-                      </a:r>
-                      <a:endParaRPr lang="en-US" sz="1050" dirty="0">
-                        <a:latin typeface="Calibri" charset="0"/>
-                        <a:ea typeface="Calibri" charset="0"/>
-                        <a:cs typeface="Calibri" charset="0"/>
-                      </a:endParaRPr>
-                    </a:p>
-                  </a:txBody>
-                  <a:tcPr marL="54864" marR="54864" marT="54864" marB="54864" anchor="ctr">
-                    <a:lnL w="6350" cap="flat" cmpd="sng" algn="ctr">
-                      <a:solidFill>
-                        <a:srgbClr val="D9DEE3"/>
-                      </a:solidFill>
-                      <a:prstDash val="solid"/>
-                      <a:round/>
-                      <a:headEnd type="none" w="med" len="med"/>
-                      <a:tailEnd type="none" w="med" len="med"/>
-                    </a:lnL>
-                    <a:lnR w="6350" cap="flat" cmpd="sng" algn="ctr">
-                      <a:solidFill>
-                        <a:srgbClr val="D9DEE3"/>
-                      </a:solidFill>
-                      <a:prstDash val="solid"/>
-                      <a:round/>
-                      <a:headEnd type="none" w="med" len="med"/>
-                      <a:tailEnd type="none" w="med" len="med"/>
-                    </a:lnR>
-                    <a:lnT w="6350" cap="flat" cmpd="sng" algn="ctr">
-                      <a:solidFill>
-                        <a:srgbClr val="D9DEE3"/>
-                      </a:solidFill>
-                      <a:prstDash val="solid"/>
-                      <a:round/>
-                      <a:headEnd type="none" w="med" len="med"/>
-                      <a:tailEnd type="none" w="med" len="med"/>
-                    </a:lnT>
-                    <a:lnB w="6350" cap="flat" cmpd="sng" algn="ctr">
-                      <a:solidFill>
-                        <a:srgbClr val="D9DEE3"/>
-                      </a:solidFill>
-                      <a:prstDash val="solid"/>
-                      <a:round/>
-                      <a:headEnd type="none" w="med" len="med"/>
-                      <a:tailEnd type="none" w="med" len="med"/>
-                    </a:lnB>
-                    <a:solidFill>
-                      <a:srgbClr val="FFFFFF"/>
-                    </a:solidFill>
-                  </a:tcPr>
-                </a:tc>
-                <a:tc>
-                  <a:txBody>
-                    <a:bodyPr/>
-                    <a:lstStyle/>
-                    <a:p>
-                      <a:pPr indent="0" marL="0">
-                        <a:buNone/>
-                      </a:pPr>
-                      <a:r>
-                        <a:rPr lang="en-US" sz="1050" dirty="0">
-                          <a:solidFill>
-                            <a:srgbClr val="1F2933"/>
-                          </a:solidFill>
-                          <a:latin typeface="Calibri" pitchFamily="34" charset="0"/>
-                          <a:ea typeface="Calibri" pitchFamily="34" charset="-122"/>
-                          <a:cs typeface="Calibri" pitchFamily="34" charset="-120"/>
-                        </a:rPr>
-                        <a:t>Demo it on your machine only. It is a five-minute topic and no later lab depends on it.</a:t>
-                      </a:r>
-                      <a:endParaRPr lang="en-US" sz="1050" dirty="0">
-                        <a:latin typeface="Calibri" charset="0"/>
-                        <a:ea typeface="Calibri" charset="0"/>
-                        <a:cs typeface="Calibri" charset="0"/>
-                      </a:endParaRPr>
-                    </a:p>
-                  </a:txBody>
-                  <a:tcPr marL="54864" marR="54864" marT="54864" marB="54864" anchor="ctr">
-                    <a:lnL w="6350" cap="flat" cmpd="sng" algn="ctr">
-                      <a:solidFill>
-                        <a:srgbClr val="D9DEE3"/>
-                      </a:solidFill>
-                      <a:prstDash val="solid"/>
-                      <a:round/>
-                      <a:headEnd type="none" w="med" len="med"/>
-                      <a:tailEnd type="none" w="med" len="med"/>
-                    </a:lnL>
-                    <a:lnR w="6350" cap="flat" cmpd="sng" algn="ctr">
-                      <a:solidFill>
-                        <a:srgbClr val="D9DEE3"/>
-                      </a:solidFill>
-                      <a:prstDash val="solid"/>
-                      <a:round/>
-                      <a:headEnd type="none" w="med" len="med"/>
-                      <a:tailEnd type="none" w="med" len="med"/>
-                    </a:lnR>
-                    <a:lnT w="6350" cap="flat" cmpd="sng" algn="ctr">
-                      <a:solidFill>
-                        <a:srgbClr val="D9DEE3"/>
-                      </a:solidFill>
-                      <a:prstDash val="solid"/>
-                      <a:round/>
-                      <a:headEnd type="none" w="med" len="med"/>
-                      <a:tailEnd type="none" w="med" len="med"/>
-                    </a:lnT>
-                    <a:lnB w="6350" cap="flat" cmpd="sng" algn="ctr">
-                      <a:solidFill>
-                        <a:srgbClr val="D9DEE3"/>
-                      </a:solidFill>
-                      <a:prstDash val="solid"/>
-                      <a:round/>
-                      <a:headEnd type="none" w="med" len="med"/>
-                      <a:tailEnd type="none" w="med" len="med"/>
-                    </a:lnB>
-                    <a:solidFill>
-                      <a:srgbClr val="FFFFFF"/>
-                    </a:solidFill>
-                  </a:tcPr>
-                </a:tc>
-              </a:tr>
-              <a:tr h="0">
-                <a:tc>
-                  <a:txBody>
-                    <a:bodyPr/>
-                    <a:lstStyle/>
-                    <a:p>
-                      <a:pPr indent="0" marL="0">
-                        <a:buNone/>
-                      </a:pPr>
-                      <a:r>
-                        <a:rPr lang="en-US" sz="1050" b="1" dirty="0">
-                          <a:solidFill>
-                            <a:srgbClr val="1F2933"/>
-                          </a:solidFill>
-                          <a:latin typeface="Calibri" pitchFamily="34" charset="0"/>
-                          <a:ea typeface="Calibri" pitchFamily="34" charset="-122"/>
-                          <a:cs typeface="Calibri" pitchFamily="34" charset="-120"/>
-                        </a:rPr>
-                        <a:t>Redirect loop locks a delegate out of the app</a:t>
-                      </a:r>
-                      <a:endParaRPr lang="en-US" sz="1050" dirty="0">
-                        <a:latin typeface="Calibri" charset="0"/>
-                        <a:ea typeface="Calibri" charset="0"/>
-                        <a:cs typeface="Calibri" charset="0"/>
-                      </a:endParaRPr>
-                    </a:p>
-                  </a:txBody>
-                  <a:tcPr marL="54864" marR="54864" marT="54864" marB="54864" anchor="ctr">
-                    <a:lnL w="6350" cap="flat" cmpd="sng" algn="ctr">
-                      <a:solidFill>
-                        <a:srgbClr val="D9DEE3"/>
-                      </a:solidFill>
-                      <a:prstDash val="solid"/>
-                      <a:round/>
-                      <a:headEnd type="none" w="med" len="med"/>
-                      <a:tailEnd type="none" w="med" len="med"/>
-                    </a:lnL>
-                    <a:lnR w="6350" cap="flat" cmpd="sng" algn="ctr">
-                      <a:solidFill>
-                        <a:srgbClr val="D9DEE3"/>
-                      </a:solidFill>
-                      <a:prstDash val="solid"/>
-                      <a:round/>
-                      <a:headEnd type="none" w="med" len="med"/>
-                      <a:tailEnd type="none" w="med" len="med"/>
-                    </a:lnR>
-                    <a:lnT w="6350" cap="flat" cmpd="sng" algn="ctr">
-                      <a:solidFill>
-                        <a:srgbClr val="D9DEE3"/>
-                      </a:solidFill>
-                      <a:prstDash val="solid"/>
-                      <a:round/>
-                      <a:headEnd type="none" w="med" len="med"/>
-                      <a:tailEnd type="none" w="med" len="med"/>
-                    </a:lnT>
-                    <a:lnB w="6350" cap="flat" cmpd="sng" algn="ctr">
-                      <a:solidFill>
-                        <a:srgbClr val="D9DEE3"/>
-                      </a:solidFill>
-                      <a:prstDash val="solid"/>
-                      <a:round/>
-                      <a:headEnd type="none" w="med" len="med"/>
-                      <a:tailEnd type="none" w="med" len="med"/>
-                    </a:lnB>
-                    <a:solidFill>
-                      <a:srgbClr val="F3F5F8"/>
-                    </a:solidFill>
-                  </a:tcPr>
-                </a:tc>
-                <a:tc>
-                  <a:txBody>
-                    <a:bodyPr/>
-                    <a:lstStyle/>
-                    <a:p>
-                      <a:pPr indent="0" marL="0">
-                        <a:buNone/>
-                      </a:pPr>
-                      <a:r>
-                        <a:rPr lang="en-US" sz="1050" dirty="0">
-                          <a:solidFill>
-                            <a:srgbClr val="1F2933"/>
-                          </a:solidFill>
-                          <a:latin typeface="Calibri" pitchFamily="34" charset="0"/>
-                          <a:ea typeface="Calibri" pitchFamily="34" charset="-122"/>
-                          <a:cs typeface="Calibri" pitchFamily="34" charset="-120"/>
-                        </a:rPr>
-                        <a:t>Comment out the redirect function, hot restart, then fix the condition. Show this once for the whole room - several will hit it.</a:t>
-                      </a:r>
-                      <a:endParaRPr lang="en-US" sz="1050" dirty="0">
-                        <a:latin typeface="Calibri" charset="0"/>
-                        <a:ea typeface="Calibri" charset="0"/>
-                        <a:cs typeface="Calibri" charset="0"/>
-                      </a:endParaRPr>
-                    </a:p>
-                  </a:txBody>
-                  <a:tcPr marL="54864" marR="54864" marT="54864" marB="54864" anchor="ctr">
-                    <a:lnL w="6350" cap="flat" cmpd="sng" algn="ctr">
-                      <a:solidFill>
-                        <a:srgbClr val="D9DEE3"/>
-                      </a:solidFill>
-                      <a:prstDash val="solid"/>
-                      <a:round/>
-                      <a:headEnd type="none" w="med" len="med"/>
-                      <a:tailEnd type="none" w="med" len="med"/>
-                    </a:lnL>
-                    <a:lnR w="6350" cap="flat" cmpd="sng" algn="ctr">
-                      <a:solidFill>
-                        <a:srgbClr val="D9DEE3"/>
-                      </a:solidFill>
-                      <a:prstDash val="solid"/>
-                      <a:round/>
-                      <a:headEnd type="none" w="med" len="med"/>
-                      <a:tailEnd type="none" w="med" len="med"/>
-                    </a:lnR>
-                    <a:lnT w="6350" cap="flat" cmpd="sng" algn="ctr">
-                      <a:solidFill>
-                        <a:srgbClr val="D9DEE3"/>
-                      </a:solidFill>
-                      <a:prstDash val="solid"/>
-                      <a:round/>
-                      <a:headEnd type="none" w="med" len="med"/>
-                      <a:tailEnd type="none" w="med" len="med"/>
-                    </a:lnT>
-                    <a:lnB w="6350" cap="flat" cmpd="sng" algn="ctr">
-                      <a:solidFill>
-                        <a:srgbClr val="D9DEE3"/>
-                      </a:solidFill>
-                      <a:prstDash val="solid"/>
-                      <a:round/>
-                      <a:headEnd type="none" w="med" len="med"/>
-                      <a:tailEnd type="none" w="med" len="med"/>
-                    </a:lnB>
-                    <a:solidFill>
-                      <a:srgbClr val="F3F5F8"/>
-                    </a:solidFill>
-                  </a:tcPr>
-                </a:tc>
-              </a:tr>
-              <a:tr h="0">
-                <a:tc>
-                  <a:txBody>
-                    <a:bodyPr/>
-                    <a:lstStyle/>
-                    <a:p>
-                      <a:pPr indent="0" marL="0">
-                        <a:buNone/>
-                      </a:pPr>
-                      <a:r>
-                        <a:rPr lang="en-US" sz="1050" b="1" dirty="0">
-                          <a:solidFill>
-                            <a:srgbClr val="1F2933"/>
-                          </a:solidFill>
-                          <a:latin typeface="Calibri" pitchFamily="34" charset="0"/>
-                          <a:ea typeface="Calibri" pitchFamily="34" charset="-122"/>
-                          <a:cs typeface="Calibri" pitchFamily="34" charset="-120"/>
-                        </a:rPr>
-                        <a:t>The whole afternoon is behind</a:t>
-                      </a:r>
-                      <a:endParaRPr lang="en-US" sz="1050" dirty="0">
-                        <a:latin typeface="Calibri" charset="0"/>
-                        <a:ea typeface="Calibri" charset="0"/>
-                        <a:cs typeface="Calibri" charset="0"/>
-                      </a:endParaRPr>
-                    </a:p>
-                  </a:txBody>
-                  <a:tcPr marL="54864" marR="54864" marT="54864" marB="54864" anchor="ctr">
-                    <a:lnL w="6350" cap="flat" cmpd="sng" algn="ctr">
-                      <a:solidFill>
-                        <a:srgbClr val="D9DEE3"/>
-                      </a:solidFill>
-                      <a:prstDash val="solid"/>
-                      <a:round/>
-                      <a:headEnd type="none" w="med" len="med"/>
-                      <a:tailEnd type="none" w="med" len="med"/>
-                    </a:lnL>
-                    <a:lnR w="6350" cap="flat" cmpd="sng" algn="ctr">
-                      <a:solidFill>
-                        <a:srgbClr val="D9DEE3"/>
-                      </a:solidFill>
-                      <a:prstDash val="solid"/>
-                      <a:round/>
-                      <a:headEnd type="none" w="med" len="med"/>
-                      <a:tailEnd type="none" w="med" len="med"/>
-                    </a:lnR>
-                    <a:lnT w="6350" cap="flat" cmpd="sng" algn="ctr">
-                      <a:solidFill>
-                        <a:srgbClr val="D9DEE3"/>
-                      </a:solidFill>
-                      <a:prstDash val="solid"/>
-                      <a:round/>
-                      <a:headEnd type="none" w="med" len="med"/>
-                      <a:tailEnd type="none" w="med" len="med"/>
-                    </a:lnT>
-                    <a:lnB w="6350" cap="flat" cmpd="sng" algn="ctr">
-                      <a:solidFill>
-                        <a:srgbClr val="D9DEE3"/>
-                      </a:solidFill>
-                      <a:prstDash val="solid"/>
-                      <a:round/>
-                      <a:headEnd type="none" w="med" len="med"/>
-                      <a:tailEnd type="none" w="med" len="med"/>
-                    </a:lnB>
-                    <a:solidFill>
-                      <a:srgbClr val="FFFFFF"/>
-                    </a:solidFill>
-                  </a:tcPr>
-                </a:tc>
-                <a:tc>
-                  <a:txBody>
-                    <a:bodyPr/>
-                    <a:lstStyle/>
-                    <a:p>
-                      <a:pPr indent="0" marL="0">
-                        <a:buNone/>
-                      </a:pPr>
-                      <a:r>
-                        <a:rPr lang="en-US" sz="1050" dirty="0">
-                          <a:solidFill>
-                            <a:srgbClr val="1F2933"/>
-                          </a:solidFill>
-                          <a:latin typeface="Calibri" pitchFamily="34" charset="0"/>
-                          <a:ea typeface="Calibri" pitchFamily="34" charset="-122"/>
-                          <a:cs typeface="Calibri" pitchFamily="34" charset="-120"/>
-                        </a:rPr>
-                        <a:t>Lab 4.3 core is steps 1-5. The shell route and the deep-link lookup are stretch. Friday needs the app to run, not to be complete.</a:t>
-                      </a:r>
-                      <a:endParaRPr lang="en-US" sz="1050" dirty="0">
-                        <a:latin typeface="Calibri" charset="0"/>
-                        <a:ea typeface="Calibri" charset="0"/>
-                        <a:cs typeface="Calibri" charset="0"/>
-                      </a:endParaRPr>
-                    </a:p>
-                  </a:txBody>
-                  <a:tcPr marL="54864" marR="54864" marT="54864" marB="54864" anchor="ctr">
-                    <a:lnL w="6350" cap="flat" cmpd="sng" algn="ctr">
-                      <a:solidFill>
-                        <a:srgbClr val="D9DEE3"/>
-                      </a:solidFill>
-                      <a:prstDash val="solid"/>
-                      <a:round/>
-                      <a:headEnd type="none" w="med" len="med"/>
-                      <a:tailEnd type="none" w="med" len="med"/>
-                    </a:lnL>
-                    <a:lnR w="6350" cap="flat" cmpd="sng" algn="ctr">
-                      <a:solidFill>
-                        <a:srgbClr val="D9DEE3"/>
-                      </a:solidFill>
-                      <a:prstDash val="solid"/>
-                      <a:round/>
-                      <a:headEnd type="none" w="med" len="med"/>
-                      <a:tailEnd type="none" w="med" len="med"/>
-                    </a:lnR>
-                    <a:lnT w="6350" cap="flat" cmpd="sng" algn="ctr">
-                      <a:solidFill>
-                        <a:srgbClr val="D9DEE3"/>
-                      </a:solidFill>
-                      <a:prstDash val="solid"/>
-                      <a:round/>
-                      <a:headEnd type="none" w="med" len="med"/>
-                      <a:tailEnd type="none" w="med" len="med"/>
-                    </a:lnT>
-                    <a:lnB w="6350" cap="flat" cmpd="sng" algn="ctr">
-                      <a:solidFill>
-                        <a:srgbClr val="D9DEE3"/>
-                      </a:solidFill>
-                      <a:prstDash val="solid"/>
-                      <a:round/>
-                      <a:headEnd type="none" w="med" len="med"/>
-                      <a:tailEnd type="none" w="med" len="med"/>
-                    </a:lnB>
-                    <a:solidFill>
-                      <a:srgbClr val="FFFFFF"/>
-                    </a:solidFill>
-                  </a:tcPr>
-                </a:tc>
-              </a:tr>
-            </a:tbl>
-          </a:graphicData>
-        </a:graphic>
-      </p:graphicFrame>
-      <p:sp>
-        <p:nvSpPr>
-          <p:cNvPr id="4" name="Text 1"/>
-          <p:cNvSpPr txBox="1"/>
-          <p:nvPr/>
-        </p:nvSpPr>
-        <p:spPr>
-          <a:xfrm>
-            <a:off x="548640" y="6473952"/>
-            <a:ext cx="9994392" cy="274320"/>
-          </a:xfrm>
-          <a:prstGeom prst="rect">
-            <a:avLst/>
-          </a:prstGeom>
-          <a:noFill/>
-          <a:ln/>
-        </p:spPr>
-        <p:txBody>
-          <a:bodyPr wrap="square" lIns="0" tIns="0" rIns="0" bIns="0" rtlCol="0" anchor="ctr"/>
-          <a:lstStyle/>
-          <a:p>
-            <a:pPr indent="0" marL="0">
-              <a:buNone/>
-            </a:pPr>
-            <a:r>
-              <a:rPr lang="en-US" sz="900" dirty="0">
-                <a:solidFill>
-                  <a:srgbClr val="5B6773"/>
-                </a:solidFill>
-                <a:latin typeface="Calibri" pitchFamily="34" charset="0"/>
-                <a:ea typeface="Calibri" pitchFamily="34" charset="-122"/>
-                <a:cs typeface="Calibri" pitchFamily="34" charset="-120"/>
-              </a:rPr>
-              <a:t>MO Integrations · Flutter Training · Day 4 - Data, APIs &amp; Navigation</a:t>
-            </a:r>
-            <a:endParaRPr lang="en-US" sz="900" dirty="0"/>
-          </a:p>
-        </p:txBody>
-      </p:sp>
-      <p:sp>
-        <p:nvSpPr>
-          <p:cNvPr id="5" name="Text 2"/>
-          <p:cNvSpPr txBox="1"/>
-          <p:nvPr/>
-        </p:nvSpPr>
-        <p:spPr>
-          <a:xfrm>
-            <a:off x="10543032" y="6473952"/>
-            <a:ext cx="1097280" cy="274320"/>
-          </a:xfrm>
-          <a:prstGeom prst="rect">
-            <a:avLst/>
-          </a:prstGeom>
-          <a:noFill/>
-          <a:ln/>
-        </p:spPr>
-        <p:txBody>
-          <a:bodyPr wrap="square" lIns="0" tIns="0" rIns="0" bIns="0" rtlCol="0" anchor="ctr"/>
-          <a:lstStyle/>
-          <a:p>
-            <a:pPr algn="r" indent="0" marL="0">
-              <a:buNone/>
-            </a:pPr>
-            <a:r>
-              <a:rPr lang="en-US" sz="900" dirty="0">
-                <a:solidFill>
-                  <a:srgbClr val="5B6773"/>
-                </a:solidFill>
-                <a:latin typeface="Calibri" pitchFamily="34" charset="0"/>
-                <a:ea typeface="Calibri" pitchFamily="34" charset="-122"/>
-                <a:cs typeface="Calibri" pitchFamily="34" charset="-120"/>
-              </a:rPr>
-              <a:t>35</a:t>
             </a:r>
             <a:endParaRPr lang="en-US" sz="900" dirty="0"/>
           </a:p>
